--- a/docs/formation/CR_COPIL_Scoring_PF.pptx
+++ b/docs/formation/CR_COPIL_Scoring_PF.pptx
@@ -8,9 +8,10 @@
     <p:sldId id="256" r:id="rId2"/>
     <p:sldId id="257" r:id="rId3"/>
     <p:sldId id="258" r:id="rId4"/>
+    <p:sldId id="259" r:id="rId5"/>
   </p:sldIdLst>
   <p:notesMasterIdLst>
-    <p:notesMasterId r:id="rId5"/>
+    <p:notesMasterId r:id="rId6"/>
   </p:notesMasterIdLst>
   <p:sldSz cx="12192000" cy="6858000"/>
   <p:notesSz cx="6858000" cy="12192000"/>
@@ -504,7 +505,7 @@
           <a:p>
             <a:r>
               <a:rPr lang="en-US" dirty="0"/>
-              <a:t/>
+              <a:t>Couverture du compte-rendu : participants à compléter, date du comité à renseigner. Document à valider par les participants.</a:t>
             </a:r>
             <a:endParaRPr lang="en-US" dirty="0"/>
           </a:p>
@@ -592,7 +593,7 @@
           <a:p>
             <a:r>
               <a:rPr lang="en-US" dirty="0"/>
-              <a:t/>
+              <a:t>Page 1 : objectifs, état du modèle (17 plafonds désormais), outil web. Décisions formulées en propositions, à confirmer par le comité.</a:t>
             </a:r>
             <a:endParaRPr lang="en-US" dirty="0"/>
           </a:p>
@@ -680,7 +681,7 @@
           <a:p>
             <a:r>
               <a:rPr lang="en-US" dirty="0"/>
-              <a:t/>
+              <a:t>Page 2 : données de test, import par IA avec l’origine des champs, stress test (bibliothèque de scénarios et calcul du choc).</a:t>
             </a:r>
             <a:endParaRPr lang="en-US" dirty="0"/>
           </a:p>
@@ -704,6 +705,94 @@
             <a:fld id="{F7021451-1387-4CA6-816F-3879F97B5CBC}" type="slidenum">
               <a:rPr lang="en-US"/>
               <a:t>3</a:t>
+            </a:fld>
+            <a:endParaRPr lang="en-US"/>
+          </a:p>
+        </p:txBody>
+      </p:sp>
+    </p:spTree>
+    <p:extLst>
+      <p:ext uri="{BB962C8B-B14F-4D97-AF65-F5344CB8AC3E}">
+        <p14:creationId xmlns:p14="http://schemas.microsoft.com/office/powerpoint/2010/main" val="1024086991"/>
+      </p:ext>
+    </p:extLst>
+  </p:cSld>
+  <p:clrMapOvr>
+    <a:masterClrMapping/>
+  </p:clrMapOvr>
+</p:notes>
+</file>
+
+<file path=ppt/notesSlides/notesSlide4.xml><?xml version="1.0" encoding="utf-8"?>
+<p:notes xmlns:a="http://schemas.openxmlformats.org/drawingml/2006/main" xmlns:r="http://schemas.openxmlformats.org/officeDocument/2006/relationships" xmlns:p="http://schemas.openxmlformats.org/presentationml/2006/main">
+  <p:cSld>
+    <p:spTree>
+      <p:nvGrpSpPr>
+        <p:cNvPr id="1" name=""/>
+        <p:cNvGrpSpPr/>
+        <p:nvPr/>
+      </p:nvGrpSpPr>
+      <p:grpSpPr>
+        <a:xfrm>
+          <a:off x="0" y="0"/>
+          <a:ext cx="0" cy="0"/>
+          <a:chOff x="0" y="0"/>
+          <a:chExt cx="0" cy="0"/>
+        </a:xfrm>
+      </p:grpSpPr>
+      <p:sp>
+        <p:nvSpPr>
+          <p:cNvPr id="2" name="Slide Image Placeholder 1"/>
+          <p:cNvSpPr>
+            <a:spLocks noGrp="1" noRot="1" noChangeAspect="1"/>
+          </p:cNvSpPr>
+          <p:nvPr>
+            <p:ph type="sldImg"/>
+          </p:nvPr>
+        </p:nvSpPr>
+        <p:spPr/>
+      </p:sp>
+      <p:sp>
+        <p:nvSpPr>
+          <p:cNvPr id="3" name="Notes Placeholder 2"/>
+          <p:cNvSpPr>
+            <a:spLocks noGrp="1"/>
+          </p:cNvSpPr>
+          <p:nvPr>
+            <p:ph type="body" idx="1"/>
+          </p:nvPr>
+        </p:nvSpPr>
+        <p:spPr/>
+        <p:txBody>
+          <a:bodyPr/>
+          <a:lstStyle/>
+          <a:p>
+            <a:r>
+              <a:rPr lang="en-US" dirty="0"/>
+              <a:t>Page 3 : volet climatique (lots 1 et 2, étude d’impact, dossier de validation), outil Excel version 4, documents, conduite de changement et pilotage.</a:t>
+            </a:r>
+            <a:endParaRPr lang="en-US" dirty="0"/>
+          </a:p>
+        </p:txBody>
+      </p:sp>
+      <p:sp>
+        <p:nvSpPr>
+          <p:cNvPr id="4" name="Slide Number Placeholder 3"/>
+          <p:cNvSpPr>
+            <a:spLocks noGrp="1"/>
+          </p:cNvSpPr>
+          <p:nvPr>
+            <p:ph type="sldNum" sz="quarter" idx="10"/>
+          </p:nvPr>
+        </p:nvSpPr>
+        <p:spPr/>
+        <p:txBody>
+          <a:bodyPr/>
+          <a:lstStyle/>
+          <a:p>
+            <a:fld id="{F7021451-1387-4CA6-816F-3879F97B5CBC}" type="slidenum">
+              <a:rPr lang="en-US"/>
+              <a:t>4</a:t>
             </a:fld>
             <a:endParaRPr lang="en-US"/>
           </a:p>
@@ -753,6 +842,38 @@
 </file>
 
 <file path=ppt/slideLayouts/slideLayout2.xml><?xml version="1.0" encoding="utf-8"?>
+<p:sldLayout xmlns:a="http://schemas.openxmlformats.org/drawingml/2006/main" xmlns:r="http://schemas.openxmlformats.org/officeDocument/2006/relationships" xmlns:p="http://schemas.openxmlformats.org/presentationml/2006/main" preserve="1">
+  <p:cSld name="COUVERTURE">
+    <p:bg>
+      <p:bgPr>
+        <a:solidFill>
+          <a:srgbClr val="FFFFFF"/>
+        </a:solidFill>
+      </p:bgPr>
+    </p:bg>
+    <p:spTree>
+      <p:nvGrpSpPr>
+        <p:cNvPr id="1" name=""/>
+        <p:cNvGrpSpPr/>
+        <p:nvPr/>
+      </p:nvGrpSpPr>
+      <p:grpSpPr>
+        <a:xfrm>
+          <a:off x="0" y="0"/>
+          <a:ext cx="0" cy="0"/>
+          <a:chOff x="0" y="0"/>
+          <a:chExt cx="0" cy="0"/>
+        </a:xfrm>
+      </p:grpSpPr>
+    </p:spTree>
+  </p:cSld>
+  <p:clrMapOvr>
+    <a:masterClrMapping/>
+  </p:clrMapOvr>
+</p:sldLayout>
+</file>
+
+<file path=ppt/slideLayouts/slideLayout3.xml><?xml version="1.0" encoding="utf-8"?>
 <p:sldLayout xmlns:a="http://schemas.openxmlformats.org/drawingml/2006/main" xmlns:r="http://schemas.openxmlformats.org/officeDocument/2006/relationships" xmlns:p="http://schemas.openxmlformats.org/presentationml/2006/main" preserve="1">
   <p:cSld name="RELEVE">
     <p:bg>
@@ -821,7 +942,7 @@
       <p:sp>
         <p:nvSpPr>
           <p:cNvPr id="3" name="Text 0"/>
-          <p:cNvSpPr txBox="1"/>
+          <p:cNvSpPr/>
           <p:nvPr/>
         </p:nvSpPr>
         <p:spPr>
@@ -836,7 +957,7 @@
           <a:ln/>
         </p:spPr>
         <p:txBody>
-          <a:bodyPr wrap="square" rtlCol="0" anchor="ctr"/>
+          <a:bodyPr wrap="square" lIns="0" tIns="0" rIns="0" bIns="0" rtlCol="0" anchor="ctr"/>
           <a:lstStyle/>
           <a:p>
             <a:pPr algn="r" indent="0" marL="0">
@@ -847,6 +968,9 @@
                 <a:solidFill>
                   <a:srgbClr val="7A7A7A"/>
                 </a:solidFill>
+                <a:latin typeface="Segoe UI" pitchFamily="34" charset="0"/>
+                <a:ea typeface="Segoe UI" pitchFamily="34" charset="-122"/>
+                <a:cs typeface="Segoe UI" pitchFamily="34" charset="-120"/>
               </a:rPr>
               <a:t>Risques Groupe</a:t>
             </a:r>
@@ -886,6 +1010,9 @@
                 <a:solidFill>
                   <a:srgbClr val="7A7A7A"/>
                 </a:solidFill>
+                <a:latin typeface="Segoe UI"/>
+                <a:ea typeface="Segoe UI"/>
+                <a:cs typeface="Segoe UI"/>
               </a:defRPr>
             </a:lvl1pPr>
           </a:lstStyle>
@@ -893,7 +1020,7 @@
             <a:pPr algn="r"/>
             <a:fld id="{F7021451-1387-4CA6-816F-3879F97B5CBC}" type="slidenum">
               <a:rPr b="0" lang="en-US"/>
-              <a:t>1002</a:t>
+              <a:t>1003</a:t>
             </a:fld>
             <a:endParaRPr lang="en-US"/>
           </a:p>
@@ -956,6 +1083,9 @@
                 <a:solidFill>
                   <a:srgbClr val="7A7A7A"/>
                 </a:solidFill>
+                <a:latin typeface="Segoe UI"/>
+                <a:ea typeface="Segoe UI"/>
+                <a:cs typeface="Segoe UI"/>
               </a:defRPr>
             </a:lvl1pPr>
           </a:lstStyle>
@@ -975,6 +1105,7 @@
   <p:sldLayoutIdLst>
     <p:sldLayoutId id="2147483649" r:id="rId1"/>
     <p:sldLayoutId id="2147483650" r:id="rId2"/>
+    <p:sldLayoutId id="2147483651" r:id="rId3"/>
   </p:sldLayoutIdLst>
   <p:hf sldNum="0" hdr="0" ftr="0" dt="0"/>
   <p:txStyles>
@@ -1233,13 +1364,6 @@
 <file path=ppt/slides/slide1.xml><?xml version="1.0" encoding="utf-8"?>
 <p:sld xmlns:a="http://schemas.openxmlformats.org/drawingml/2006/main" xmlns:r="http://schemas.openxmlformats.org/officeDocument/2006/relationships" xmlns:p="http://schemas.openxmlformats.org/presentationml/2006/main">
   <p:cSld name="Slide 1">
-    <p:bg>
-      <p:bgPr>
-        <a:solidFill>
-          <a:srgbClr val="FFFFFF"/>
-        </a:solidFill>
-      </p:bgPr>
-    </p:bg>
     <p:spTree>
       <p:nvGrpSpPr>
         <p:cNvPr id="1" name=""/>
@@ -1304,14 +1428,14 @@
       </p:pic>
       <p:sp>
         <p:nvSpPr>
-          <p:cNvPr id="4" name="panneau-participants"/>
+          <p:cNvPr id="4" name="Shape 0"/>
           <p:cNvSpPr/>
           <p:nvPr/>
         </p:nvSpPr>
         <p:spPr>
           <a:xfrm>
             <a:off x="182880" y="1161288"/>
-            <a:ext cx="6035040" cy="5029200"/>
+            <a:ext cx="6035040" cy="4197096"/>
           </a:xfrm>
           <a:prstGeom prst="rect">
             <a:avLst/>
@@ -1337,7 +1461,7 @@
         </p:nvSpPr>
         <p:spPr>
           <a:xfrm>
-            <a:off x="292608" y="1417320"/>
+            <a:off x="292608" y="1371600"/>
             <a:ext cx="3657600" cy="320040"/>
           </a:xfrm>
           <a:prstGeom prst="rect">
@@ -1358,6 +1482,9 @@
                 <a:solidFill>
                   <a:srgbClr val="404040"/>
                 </a:solidFill>
+                <a:latin typeface="Segoe UI" pitchFamily="34" charset="0"/>
+                <a:ea typeface="Segoe UI" pitchFamily="34" charset="-122"/>
+                <a:cs typeface="Segoe UI" pitchFamily="34" charset="-120"/>
               </a:rPr>
               <a:t>Liste des participants :</a:t>
             </a:r>
@@ -1373,7 +1500,7 @@
         </p:nvSpPr>
         <p:spPr>
           <a:xfrm>
-            <a:off x="384048" y="1920240"/>
+            <a:off x="384048" y="1874520"/>
             <a:ext cx="2377440" cy="274320"/>
           </a:xfrm>
           <a:prstGeom prst="rect">
@@ -1394,6 +1521,9 @@
                 <a:solidFill>
                   <a:srgbClr val="404040"/>
                 </a:solidFill>
+                <a:latin typeface="Segoe UI" pitchFamily="34" charset="0"/>
+                <a:ea typeface="Segoe UI" pitchFamily="34" charset="-122"/>
+                <a:cs typeface="Segoe UI" pitchFamily="34" charset="-120"/>
               </a:rPr>
               <a:t>Risques Groupe :</a:t>
             </a:r>
@@ -1409,7 +1539,7 @@
         </p:nvSpPr>
         <p:spPr>
           <a:xfrm>
-            <a:off x="384048" y="2212848"/>
+            <a:off x="384048" y="2185416"/>
             <a:ext cx="2377440" cy="822960"/>
           </a:xfrm>
           <a:prstGeom prst="rect">
@@ -1419,13 +1549,10 @@
           <a:ln/>
         </p:spPr>
         <p:txBody>
-          <a:bodyPr wrap="square" lIns="0" tIns="0" rIns="0" bIns="0" rtlCol="0" anchor="ctr"/>
+          <a:bodyPr wrap="square" lIns="0" tIns="0" rIns="0" bIns="0" rtlCol="0" anchor="t"/>
           <a:lstStyle/>
           <a:p>
             <a:pPr marL="152400" indent="-152400">
-              <a:spcAft>
-                <a:spcPts val="300"/>
-              </a:spcAft>
               <a:buSzPct val="100000"/>
               <a:buChar char="▪"/>
             </a:pPr>
@@ -1434,6 +1561,9 @@
                 <a:solidFill>
                   <a:srgbClr val="404040"/>
                 </a:solidFill>
+                <a:latin typeface="Segoe UI" pitchFamily="34" charset="0"/>
+                <a:ea typeface="Segoe UI" pitchFamily="34" charset="-122"/>
+                <a:cs typeface="Segoe UI" pitchFamily="34" charset="-120"/>
               </a:rPr>
               <a:t>M. Edoumi Tariq</a:t>
             </a:r>
@@ -1441,9 +1571,6 @@
           </a:p>
           <a:p>
             <a:pPr marL="152400" indent="-152400">
-              <a:spcAft>
-                <a:spcPts val="300"/>
-              </a:spcAft>
               <a:buSzPct val="100000"/>
               <a:buChar char="▪"/>
             </a:pPr>
@@ -1452,6 +1579,9 @@
                 <a:solidFill>
                   <a:srgbClr val="404040"/>
                 </a:solidFill>
+                <a:latin typeface="Segoe UI" pitchFamily="34" charset="0"/>
+                <a:ea typeface="Segoe UI" pitchFamily="34" charset="-122"/>
+                <a:cs typeface="Segoe UI" pitchFamily="34" charset="-120"/>
               </a:rPr>
               <a:t>[Nom à compléter]</a:t>
             </a:r>
@@ -1459,9 +1589,6 @@
           </a:p>
           <a:p>
             <a:pPr marL="152400" indent="-152400">
-              <a:spcAft>
-                <a:spcPts val="300"/>
-              </a:spcAft>
               <a:buSzPct val="100000"/>
               <a:buChar char="▪"/>
             </a:pPr>
@@ -1470,6 +1597,9 @@
                 <a:solidFill>
                   <a:srgbClr val="404040"/>
                 </a:solidFill>
+                <a:latin typeface="Segoe UI" pitchFamily="34" charset="0"/>
+                <a:ea typeface="Segoe UI" pitchFamily="34" charset="-122"/>
+                <a:cs typeface="Segoe UI" pitchFamily="34" charset="-120"/>
               </a:rPr>
               <a:t>[Nom à compléter]</a:t>
             </a:r>
@@ -1485,7 +1615,7 @@
         </p:nvSpPr>
         <p:spPr>
           <a:xfrm>
-            <a:off x="384048" y="3246120"/>
+            <a:off x="384048" y="3154680"/>
             <a:ext cx="2377440" cy="274320"/>
           </a:xfrm>
           <a:prstGeom prst="rect">
@@ -1506,6 +1636,9 @@
                 <a:solidFill>
                   <a:srgbClr val="404040"/>
                 </a:solidFill>
+                <a:latin typeface="Segoe UI" pitchFamily="34" charset="0"/>
+                <a:ea typeface="Segoe UI" pitchFamily="34" charset="-122"/>
+                <a:cs typeface="Segoe UI" pitchFamily="34" charset="-120"/>
               </a:rPr>
               <a:t>Équipe SI :</a:t>
             </a:r>
@@ -1521,7 +1654,7 @@
         </p:nvSpPr>
         <p:spPr>
           <a:xfrm>
-            <a:off x="384048" y="3538728"/>
+            <a:off x="384048" y="3465576"/>
             <a:ext cx="2377440" cy="274320"/>
           </a:xfrm>
           <a:prstGeom prst="rect">
@@ -1531,13 +1664,10 @@
           <a:ln/>
         </p:spPr>
         <p:txBody>
-          <a:bodyPr wrap="square" lIns="0" tIns="0" rIns="0" bIns="0" rtlCol="0" anchor="ctr"/>
+          <a:bodyPr wrap="square" lIns="0" tIns="0" rIns="0" bIns="0" rtlCol="0" anchor="t"/>
           <a:lstStyle/>
           <a:p>
             <a:pPr marL="152400" indent="-152400">
-              <a:spcAft>
-                <a:spcPts val="300"/>
-              </a:spcAft>
               <a:buSzPct val="100000"/>
               <a:buChar char="▪"/>
             </a:pPr>
@@ -1546,6 +1676,9 @@
                 <a:solidFill>
                   <a:srgbClr val="404040"/>
                 </a:solidFill>
+                <a:latin typeface="Segoe UI" pitchFamily="34" charset="0"/>
+                <a:ea typeface="Segoe UI" pitchFamily="34" charset="-122"/>
+                <a:cs typeface="Segoe UI" pitchFamily="34" charset="-120"/>
               </a:rPr>
               <a:t>[Nom à compléter]</a:t>
             </a:r>
@@ -1561,7 +1694,7 @@
         </p:nvSpPr>
         <p:spPr>
           <a:xfrm>
-            <a:off x="2743200" y="3246120"/>
+            <a:off x="2834640" y="3154680"/>
             <a:ext cx="2377440" cy="274320"/>
           </a:xfrm>
           <a:prstGeom prst="rect">
@@ -1582,6 +1715,9 @@
                 <a:solidFill>
                   <a:srgbClr val="404040"/>
                 </a:solidFill>
+                <a:latin typeface="Segoe UI" pitchFamily="34" charset="0"/>
+                <a:ea typeface="Segoe UI" pitchFamily="34" charset="-122"/>
+                <a:cs typeface="Segoe UI" pitchFamily="34" charset="-120"/>
               </a:rPr>
               <a:t>Équipe DATA :</a:t>
             </a:r>
@@ -1597,7 +1733,7 @@
         </p:nvSpPr>
         <p:spPr>
           <a:xfrm>
-            <a:off x="2743200" y="3538728"/>
+            <a:off x="2834640" y="3465576"/>
             <a:ext cx="2377440" cy="274320"/>
           </a:xfrm>
           <a:prstGeom prst="rect">
@@ -1607,13 +1743,10 @@
           <a:ln/>
         </p:spPr>
         <p:txBody>
-          <a:bodyPr wrap="square" lIns="0" tIns="0" rIns="0" bIns="0" rtlCol="0" anchor="ctr"/>
+          <a:bodyPr wrap="square" lIns="0" tIns="0" rIns="0" bIns="0" rtlCol="0" anchor="t"/>
           <a:lstStyle/>
           <a:p>
             <a:pPr marL="152400" indent="-152400">
-              <a:spcAft>
-                <a:spcPts val="300"/>
-              </a:spcAft>
               <a:buSzPct val="100000"/>
               <a:buChar char="▪"/>
             </a:pPr>
@@ -1622,6 +1755,9 @@
                 <a:solidFill>
                   <a:srgbClr val="404040"/>
                 </a:solidFill>
+                <a:latin typeface="Segoe UI" pitchFamily="34" charset="0"/>
+                <a:ea typeface="Segoe UI" pitchFamily="34" charset="-122"/>
+                <a:cs typeface="Segoe UI" pitchFamily="34" charset="-120"/>
               </a:rPr>
               <a:t>[Nom à compléter]</a:t>
             </a:r>
@@ -1637,7 +1773,7 @@
         </p:nvSpPr>
         <p:spPr>
           <a:xfrm>
-            <a:off x="384048" y="4160520"/>
+            <a:off x="384048" y="4069080"/>
             <a:ext cx="2377440" cy="274320"/>
           </a:xfrm>
           <a:prstGeom prst="rect">
@@ -1658,6 +1794,9 @@
                 <a:solidFill>
                   <a:srgbClr val="404040"/>
                 </a:solidFill>
+                <a:latin typeface="Segoe UI" pitchFamily="34" charset="0"/>
+                <a:ea typeface="Segoe UI" pitchFamily="34" charset="-122"/>
+                <a:cs typeface="Segoe UI" pitchFamily="34" charset="-120"/>
               </a:rPr>
               <a:t>Conformité :</a:t>
             </a:r>
@@ -1673,7 +1812,7 @@
         </p:nvSpPr>
         <p:spPr>
           <a:xfrm>
-            <a:off x="384048" y="4453128"/>
+            <a:off x="384048" y="4379976"/>
             <a:ext cx="2377440" cy="274320"/>
           </a:xfrm>
           <a:prstGeom prst="rect">
@@ -1683,13 +1822,10 @@
           <a:ln/>
         </p:spPr>
         <p:txBody>
-          <a:bodyPr wrap="square" lIns="0" tIns="0" rIns="0" bIns="0" rtlCol="0" anchor="ctr"/>
+          <a:bodyPr wrap="square" lIns="0" tIns="0" rIns="0" bIns="0" rtlCol="0" anchor="t"/>
           <a:lstStyle/>
           <a:p>
             <a:pPr marL="152400" indent="-152400">
-              <a:spcAft>
-                <a:spcPts val="300"/>
-              </a:spcAft>
               <a:buSzPct val="100000"/>
               <a:buChar char="▪"/>
             </a:pPr>
@@ -1698,6 +1834,9 @@
                 <a:solidFill>
                   <a:srgbClr val="404040"/>
                 </a:solidFill>
+                <a:latin typeface="Segoe UI" pitchFamily="34" charset="0"/>
+                <a:ea typeface="Segoe UI" pitchFamily="34" charset="-122"/>
+                <a:cs typeface="Segoe UI" pitchFamily="34" charset="-120"/>
               </a:rPr>
               <a:t>[Nom à compléter]</a:t>
             </a:r>
@@ -1713,7 +1852,7 @@
         </p:nvSpPr>
         <p:spPr>
           <a:xfrm>
-            <a:off x="2743200" y="4160520"/>
+            <a:off x="2834640" y="4069080"/>
             <a:ext cx="2377440" cy="274320"/>
           </a:xfrm>
           <a:prstGeom prst="rect">
@@ -1734,6 +1873,9 @@
                 <a:solidFill>
                   <a:srgbClr val="404040"/>
                 </a:solidFill>
+                <a:latin typeface="Segoe UI" pitchFamily="34" charset="0"/>
+                <a:ea typeface="Segoe UI" pitchFamily="34" charset="-122"/>
+                <a:cs typeface="Segoe UI" pitchFamily="34" charset="-120"/>
               </a:rPr>
               <a:t>Direction des engagements :</a:t>
             </a:r>
@@ -1749,7 +1891,7 @@
         </p:nvSpPr>
         <p:spPr>
           <a:xfrm>
-            <a:off x="2743200" y="4453128"/>
+            <a:off x="2834640" y="4379976"/>
             <a:ext cx="2377440" cy="274320"/>
           </a:xfrm>
           <a:prstGeom prst="rect">
@@ -1759,13 +1901,10 @@
           <a:ln/>
         </p:spPr>
         <p:txBody>
-          <a:bodyPr wrap="square" lIns="0" tIns="0" rIns="0" bIns="0" rtlCol="0" anchor="ctr"/>
+          <a:bodyPr wrap="square" lIns="0" tIns="0" rIns="0" bIns="0" rtlCol="0" anchor="t"/>
           <a:lstStyle/>
           <a:p>
             <a:pPr marL="152400" indent="-152400">
-              <a:spcAft>
-                <a:spcPts val="300"/>
-              </a:spcAft>
               <a:buSzPct val="100000"/>
               <a:buChar char="▪"/>
             </a:pPr>
@@ -1774,6 +1913,9 @@
                 <a:solidFill>
                   <a:srgbClr val="404040"/>
                 </a:solidFill>
+                <a:latin typeface="Segoe UI" pitchFamily="34" charset="0"/>
+                <a:ea typeface="Segoe UI" pitchFamily="34" charset="-122"/>
+                <a:cs typeface="Segoe UI" pitchFamily="34" charset="-120"/>
               </a:rPr>
               <a:t>[Nom à compléter]</a:t>
             </a:r>
@@ -1783,7 +1925,7 @@
       </p:sp>
       <p:sp>
         <p:nvSpPr>
-          <p:cNvPr id="16" name="bandeau-titre"/>
+          <p:cNvPr id="16" name="Shape 12"/>
           <p:cNvSpPr/>
           <p:nvPr/>
         </p:nvSpPr>
@@ -1827,7 +1969,7 @@
           <a:bodyPr wrap="square" lIns="0" tIns="0" rIns="0" bIns="0" rtlCol="0" anchor="t"/>
           <a:lstStyle/>
           <a:p>
-            <a:pPr algn="l" indent="0" marL="0">
+            <a:pPr indent="0" marL="0">
               <a:buNone/>
             </a:pPr>
             <a:r>
@@ -1835,6 +1977,9 @@
                 <a:solidFill>
                   <a:srgbClr val="FFFFFF"/>
                 </a:solidFill>
+                <a:latin typeface="Segoe UI" pitchFamily="34" charset="0"/>
+                <a:ea typeface="Segoe UI" pitchFamily="34" charset="-122"/>
+                <a:cs typeface="Segoe UI" pitchFamily="34" charset="-120"/>
               </a:rPr>
               <a:t>Modèle de scoring Project Finance : conception du modèle et de l’outil de notation</a:t>
             </a:r>
@@ -1850,7 +1995,7 @@
         </p:nvSpPr>
         <p:spPr>
           <a:xfrm>
-            <a:off x="7498080" y="3794760"/>
+            <a:off x="7498080" y="3749040"/>
             <a:ext cx="4526280" cy="457200"/>
           </a:xfrm>
           <a:prstGeom prst="rect">
@@ -1871,6 +2016,9 @@
                 <a:solidFill>
                   <a:srgbClr val="FFFFFF"/>
                 </a:solidFill>
+                <a:latin typeface="Segoe UI" pitchFamily="34" charset="0"/>
+                <a:ea typeface="Segoe UI" pitchFamily="34" charset="-122"/>
+                <a:cs typeface="Segoe UI" pitchFamily="34" charset="-120"/>
               </a:rPr>
               <a:t>Compte-rendu du Comité de Pilotage du [jj/mm/aaaa]</a:t>
             </a:r>
@@ -1886,7 +2034,7 @@
         </p:nvSpPr>
         <p:spPr>
           <a:xfrm>
-            <a:off x="7498080" y="4206240"/>
+            <a:off x="7498080" y="4187952"/>
             <a:ext cx="4526280" cy="320040"/>
           </a:xfrm>
           <a:prstGeom prst="rect">
@@ -1907,6 +2055,9 @@
                 <a:solidFill>
                   <a:srgbClr val="FCE3C6"/>
                 </a:solidFill>
+                <a:latin typeface="Segoe UI" pitchFamily="34" charset="0"/>
+                <a:ea typeface="Segoe UI" pitchFamily="34" charset="-122"/>
+                <a:cs typeface="Segoe UI" pitchFamily="34" charset="-120"/>
               </a:rPr>
               <a:t>Projet — à valider par les participants</a:t>
             </a:r>
@@ -1932,7 +2083,7 @@
           <a:ln/>
         </p:spPr>
         <p:txBody>
-          <a:bodyPr wrap="square" rtlCol="0" anchor="ctr"/>
+          <a:bodyPr wrap="square" lIns="0" tIns="0" rIns="0" bIns="0" rtlCol="0" anchor="ctr"/>
           <a:lstStyle/>
           <a:p>
             <a:pPr algn="ctr" indent="0" marL="0">
@@ -1943,6 +2094,9 @@
                 <a:solidFill>
                   <a:srgbClr val="7A7A7A"/>
                 </a:solidFill>
+                <a:latin typeface="Segoe UI" pitchFamily="34" charset="0"/>
+                <a:ea typeface="Segoe UI" pitchFamily="34" charset="-122"/>
+                <a:cs typeface="Segoe UI" pitchFamily="34" charset="-120"/>
               </a:rPr>
               <a:t>Risques Groupe</a:t>
             </a:r>
@@ -1968,7 +2122,7 @@
           <a:ln/>
         </p:spPr>
         <p:txBody>
-          <a:bodyPr wrap="square" rtlCol="0" anchor="ctr"/>
+          <a:bodyPr wrap="square" lIns="0" tIns="0" rIns="0" bIns="0" rtlCol="0" anchor="ctr"/>
           <a:lstStyle/>
           <a:p>
             <a:pPr algn="r" indent="0" marL="0">
@@ -1979,6 +2133,9 @@
                 <a:solidFill>
                   <a:srgbClr val="7A7A7A"/>
                 </a:solidFill>
+                <a:latin typeface="Segoe UI" pitchFamily="34" charset="0"/>
+                <a:ea typeface="Segoe UI" pitchFamily="34" charset="-122"/>
+                <a:cs typeface="Segoe UI" pitchFamily="34" charset="-120"/>
               </a:rPr>
               <a:t>1</a:t>
             </a:r>
@@ -2031,7 +2188,7 @@
           <a:ln/>
         </p:spPr>
         <p:txBody>
-          <a:bodyPr wrap="square" rtlCol="0" anchor="ctr"/>
+          <a:bodyPr wrap="square" lIns="0" tIns="0" rIns="0" bIns="0" rtlCol="0" anchor="ctr"/>
           <a:lstStyle/>
           <a:p>
             <a:pPr algn="l" indent="0" marL="0">
@@ -2046,7 +2203,7 @@
                 <a:ea typeface="Segoe UI" pitchFamily="34" charset="-122"/>
                 <a:cs typeface="Segoe UI" pitchFamily="34" charset="-120"/>
               </a:rPr>
-              <a:t>Relevé d’informations, de décisions et d’actions (1/2)</a:t>
+              <a:t>Relevé d’informations, de décisions et d’actions (1/3)</a:t>
             </a:r>
             <a:endParaRPr lang="en-US" sz="1800" dirty="0"/>
           </a:p>
@@ -2108,36 +2265,36 @@
                     </a:p>
                   </a:txBody>
                   <a:tcPr marL="91440" marR="91440" marT="45720" marB="45720" anchor="ctr">
-                    <a:lnL w="38100" cap="flat" cmpd="sng" algn="ctr">
-                      <a:solidFill>
-                        <a:srgbClr val="FFFFFF"/>
+                    <a:lnL w="9525" cap="flat" cmpd="sng" algn="ctr">
+                      <a:solidFill>
+                        <a:srgbClr val="D9D9D9"/>
                       </a:solidFill>
                       <a:prstDash val="solid"/>
                       <a:round/>
                       <a:headEnd type="none" w="med" len="med"/>
                       <a:tailEnd type="none" w="med" len="med"/>
                     </a:lnL>
-                    <a:lnR w="38100" cap="flat" cmpd="sng" algn="ctr">
-                      <a:solidFill>
-                        <a:srgbClr val="FFFFFF"/>
+                    <a:lnR w="9525" cap="flat" cmpd="sng" algn="ctr">
+                      <a:solidFill>
+                        <a:srgbClr val="D9D9D9"/>
                       </a:solidFill>
                       <a:prstDash val="solid"/>
                       <a:round/>
                       <a:headEnd type="none" w="med" len="med"/>
                       <a:tailEnd type="none" w="med" len="med"/>
                     </a:lnR>
-                    <a:lnT w="38100" cap="flat" cmpd="sng" algn="ctr">
-                      <a:solidFill>
-                        <a:srgbClr val="FFFFFF"/>
+                    <a:lnT w="9525" cap="flat" cmpd="sng" algn="ctr">
+                      <a:solidFill>
+                        <a:srgbClr val="D9D9D9"/>
                       </a:solidFill>
                       <a:prstDash val="solid"/>
                       <a:round/>
                       <a:headEnd type="none" w="med" len="med"/>
                       <a:tailEnd type="none" w="med" len="med"/>
                     </a:lnT>
-                    <a:lnB w="38100" cap="flat" cmpd="sng" algn="ctr">
-                      <a:solidFill>
-                        <a:srgbClr val="FFFFFF"/>
+                    <a:lnB w="9525" cap="flat" cmpd="sng" algn="ctr">
+                      <a:solidFill>
+                        <a:srgbClr val="D9D9D9"/>
                       </a:solidFill>
                       <a:prstDash val="solid"/>
                       <a:round/>
@@ -2176,36 +2333,36 @@
                     </a:p>
                   </a:txBody>
                   <a:tcPr marL="91440" marR="91440" marT="45720" marB="45720" anchor="ctr">
-                    <a:lnL w="38100" cap="flat" cmpd="sng" algn="ctr">
-                      <a:solidFill>
-                        <a:srgbClr val="FFFFFF"/>
+                    <a:lnL w="9525" cap="flat" cmpd="sng" algn="ctr">
+                      <a:solidFill>
+                        <a:srgbClr val="D9D9D9"/>
                       </a:solidFill>
                       <a:prstDash val="solid"/>
                       <a:round/>
                       <a:headEnd type="none" w="med" len="med"/>
                       <a:tailEnd type="none" w="med" len="med"/>
                     </a:lnL>
-                    <a:lnR w="38100" cap="flat" cmpd="sng" algn="ctr">
-                      <a:solidFill>
-                        <a:srgbClr val="FFFFFF"/>
+                    <a:lnR w="9525" cap="flat" cmpd="sng" algn="ctr">
+                      <a:solidFill>
+                        <a:srgbClr val="D9D9D9"/>
                       </a:solidFill>
                       <a:prstDash val="solid"/>
                       <a:round/>
                       <a:headEnd type="none" w="med" len="med"/>
                       <a:tailEnd type="none" w="med" len="med"/>
                     </a:lnR>
-                    <a:lnT w="38100" cap="flat" cmpd="sng" algn="ctr">
-                      <a:solidFill>
-                        <a:srgbClr val="FFFFFF"/>
+                    <a:lnT w="9525" cap="flat" cmpd="sng" algn="ctr">
+                      <a:solidFill>
+                        <a:srgbClr val="D9D9D9"/>
                       </a:solidFill>
                       <a:prstDash val="solid"/>
                       <a:round/>
                       <a:headEnd type="none" w="med" len="med"/>
                       <a:tailEnd type="none" w="med" len="med"/>
                     </a:lnT>
-                    <a:lnB w="38100" cap="flat" cmpd="sng" algn="ctr">
-                      <a:solidFill>
-                        <a:srgbClr val="FFFFFF"/>
+                    <a:lnB w="9525" cap="flat" cmpd="sng" algn="ctr">
+                      <a:solidFill>
+                        <a:srgbClr val="D9D9D9"/>
                       </a:solidFill>
                       <a:prstDash val="solid"/>
                       <a:round/>
@@ -2244,36 +2401,36 @@
                     </a:p>
                   </a:txBody>
                   <a:tcPr marL="91440" marR="91440" marT="45720" marB="45720" anchor="ctr">
-                    <a:lnL w="38100" cap="flat" cmpd="sng" algn="ctr">
-                      <a:solidFill>
-                        <a:srgbClr val="FFFFFF"/>
+                    <a:lnL w="9525" cap="flat" cmpd="sng" algn="ctr">
+                      <a:solidFill>
+                        <a:srgbClr val="D9D9D9"/>
                       </a:solidFill>
                       <a:prstDash val="solid"/>
                       <a:round/>
                       <a:headEnd type="none" w="med" len="med"/>
                       <a:tailEnd type="none" w="med" len="med"/>
                     </a:lnL>
-                    <a:lnR w="38100" cap="flat" cmpd="sng" algn="ctr">
-                      <a:solidFill>
-                        <a:srgbClr val="FFFFFF"/>
+                    <a:lnR w="9525" cap="flat" cmpd="sng" algn="ctr">
+                      <a:solidFill>
+                        <a:srgbClr val="D9D9D9"/>
                       </a:solidFill>
                       <a:prstDash val="solid"/>
                       <a:round/>
                       <a:headEnd type="none" w="med" len="med"/>
                       <a:tailEnd type="none" w="med" len="med"/>
                     </a:lnR>
-                    <a:lnT w="38100" cap="flat" cmpd="sng" algn="ctr">
-                      <a:solidFill>
-                        <a:srgbClr val="FFFFFF"/>
+                    <a:lnT w="9525" cap="flat" cmpd="sng" algn="ctr">
+                      <a:solidFill>
+                        <a:srgbClr val="D9D9D9"/>
                       </a:solidFill>
                       <a:prstDash val="solid"/>
                       <a:round/>
                       <a:headEnd type="none" w="med" len="med"/>
                       <a:tailEnd type="none" w="med" len="med"/>
                     </a:lnT>
-                    <a:lnB w="38100" cap="flat" cmpd="sng" algn="ctr">
-                      <a:solidFill>
-                        <a:srgbClr val="FFFFFF"/>
+                    <a:lnB w="9525" cap="flat" cmpd="sng" algn="ctr">
+                      <a:solidFill>
+                        <a:srgbClr val="D9D9D9"/>
                       </a:solidFill>
                       <a:prstDash val="solid"/>
                       <a:round/>
@@ -2312,36 +2469,36 @@
                     </a:p>
                   </a:txBody>
                   <a:tcPr marL="91440" marR="91440" marT="45720" marB="45720" anchor="ctr">
-                    <a:lnL w="38100" cap="flat" cmpd="sng" algn="ctr">
-                      <a:solidFill>
-                        <a:srgbClr val="FFFFFF"/>
+                    <a:lnL w="9525" cap="flat" cmpd="sng" algn="ctr">
+                      <a:solidFill>
+                        <a:srgbClr val="D9D9D9"/>
                       </a:solidFill>
                       <a:prstDash val="solid"/>
                       <a:round/>
                       <a:headEnd type="none" w="med" len="med"/>
                       <a:tailEnd type="none" w="med" len="med"/>
                     </a:lnL>
-                    <a:lnR w="38100" cap="flat" cmpd="sng" algn="ctr">
-                      <a:solidFill>
-                        <a:srgbClr val="FFFFFF"/>
+                    <a:lnR w="9525" cap="flat" cmpd="sng" algn="ctr">
+                      <a:solidFill>
+                        <a:srgbClr val="D9D9D9"/>
                       </a:solidFill>
                       <a:prstDash val="solid"/>
                       <a:round/>
                       <a:headEnd type="none" w="med" len="med"/>
                       <a:tailEnd type="none" w="med" len="med"/>
                     </a:lnR>
-                    <a:lnT w="38100" cap="flat" cmpd="sng" algn="ctr">
-                      <a:solidFill>
-                        <a:srgbClr val="FFFFFF"/>
+                    <a:lnT w="9525" cap="flat" cmpd="sng" algn="ctr">
+                      <a:solidFill>
+                        <a:srgbClr val="D9D9D9"/>
                       </a:solidFill>
                       <a:prstDash val="solid"/>
                       <a:round/>
                       <a:headEnd type="none" w="med" len="med"/>
                       <a:tailEnd type="none" w="med" len="med"/>
                     </a:lnT>
-                    <a:lnB w="38100" cap="flat" cmpd="sng" algn="ctr">
-                      <a:solidFill>
-                        <a:srgbClr val="FFFFFF"/>
+                    <a:lnB w="9525" cap="flat" cmpd="sng" algn="ctr">
+                      <a:solidFill>
+                        <a:srgbClr val="D9D9D9"/>
                       </a:solidFill>
                       <a:prstDash val="solid"/>
                       <a:round/>
@@ -2354,7 +2511,7 @@
                   </a:tcPr>
                 </a:tc>
               </a:tr>
-              <a:tr h="731520">
+              <a:tr h="960120">
                 <a:tc>
                   <a:txBody>
                     <a:bodyPr/>
@@ -2382,36 +2539,36 @@
                     </a:p>
                   </a:txBody>
                   <a:tcPr marL="76200" marR="127000" marT="50800" marB="50800" anchor="ctr">
-                    <a:lnL w="38100" cap="flat" cmpd="sng" algn="ctr">
-                      <a:solidFill>
-                        <a:srgbClr val="FFFFFF"/>
+                    <a:lnL w="9525" cap="flat" cmpd="sng" algn="ctr">
+                      <a:solidFill>
+                        <a:srgbClr val="D9D9D9"/>
                       </a:solidFill>
                       <a:prstDash val="solid"/>
                       <a:round/>
                       <a:headEnd type="none" w="med" len="med"/>
                       <a:tailEnd type="none" w="med" len="med"/>
                     </a:lnL>
-                    <a:lnR w="38100" cap="flat" cmpd="sng" algn="ctr">
-                      <a:solidFill>
-                        <a:srgbClr val="FFFFFF"/>
+                    <a:lnR w="9525" cap="flat" cmpd="sng" algn="ctr">
+                      <a:solidFill>
+                        <a:srgbClr val="D9D9D9"/>
                       </a:solidFill>
                       <a:prstDash val="solid"/>
                       <a:round/>
                       <a:headEnd type="none" w="med" len="med"/>
                       <a:tailEnd type="none" w="med" len="med"/>
                     </a:lnR>
-                    <a:lnT w="38100" cap="flat" cmpd="sng" algn="ctr">
-                      <a:solidFill>
-                        <a:srgbClr val="FFFFFF"/>
+                    <a:lnT w="9525" cap="flat" cmpd="sng" algn="ctr">
+                      <a:solidFill>
+                        <a:srgbClr val="D9D9D9"/>
                       </a:solidFill>
                       <a:prstDash val="solid"/>
                       <a:round/>
                       <a:headEnd type="none" w="med" len="med"/>
                       <a:tailEnd type="none" w="med" len="med"/>
                     </a:lnT>
-                    <a:lnB w="38100" cap="flat" cmpd="sng" algn="ctr">
-                      <a:solidFill>
-                        <a:srgbClr val="FFFFFF"/>
+                    <a:lnB w="9525" cap="flat" cmpd="sng" algn="ctr">
+                      <a:solidFill>
+                        <a:srgbClr val="D9D9D9"/>
                       </a:solidFill>
                       <a:prstDash val="solid"/>
                       <a:round/>
@@ -2452,7 +2609,7 @@
                   <a:tcPr marL="91440" marR="91440" marT="45720" marB="45720" anchor="ctr">
                     <a:lnL w="9525" cap="flat" cmpd="sng" algn="ctr">
                       <a:solidFill>
-                        <a:srgbClr val="E3E3E3"/>
+                        <a:srgbClr val="D9D9D9"/>
                       </a:solidFill>
                       <a:prstDash val="solid"/>
                       <a:round/>
@@ -2461,7 +2618,7 @@
                     </a:lnL>
                     <a:lnR w="9525" cap="flat" cmpd="sng" algn="ctr">
                       <a:solidFill>
-                        <a:srgbClr val="E3E3E3"/>
+                        <a:srgbClr val="D9D9D9"/>
                       </a:solidFill>
                       <a:prstDash val="solid"/>
                       <a:round/>
@@ -2470,7 +2627,7 @@
                     </a:lnR>
                     <a:lnT w="9525" cap="flat" cmpd="sng" algn="ctr">
                       <a:solidFill>
-                        <a:srgbClr val="E3E3E3"/>
+                        <a:srgbClr val="D9D9D9"/>
                       </a:solidFill>
                       <a:prstDash val="solid"/>
                       <a:round/>
@@ -2479,7 +2636,7 @@
                     </a:lnT>
                     <a:lnB w="9525" cap="flat" cmpd="sng" algn="ctr">
                       <a:solidFill>
-                        <a:srgbClr val="E3E3E3"/>
+                        <a:srgbClr val="D9D9D9"/>
                       </a:solidFill>
                       <a:prstDash val="solid"/>
                       <a:round/>
@@ -2514,13 +2671,6 @@
                         </a:rPr>
                         <a:t>Restitution de l’avancement du projet </a:t>
                       </a:r>
-                      <a:pPr algn="just" marL="177800" indent="-177800">
-                        <a:spcAft>
-                          <a:spcPts val="400"/>
-                        </a:spcAft>
-                        <a:buSzPct val="100000"/>
-                        <a:buChar char="▪"/>
-                      </a:pPr>
                       <a:r>
                         <a:rPr lang="en-US" sz="1150" b="1" dirty="0">
                           <a:solidFill>
@@ -2532,13 +2682,6 @@
                         </a:rPr>
                         <a:t>« Modèle de scoring Project Finance »</a:t>
                       </a:r>
-                      <a:pPr algn="just" marL="177800" indent="-177800">
-                        <a:spcAft>
-                          <a:spcPts val="400"/>
-                        </a:spcAft>
-                        <a:buSzPct val="100000"/>
-                        <a:buChar char="▪"/>
-                      </a:pPr>
                       <a:r>
                         <a:rPr lang="en-US" sz="1150" dirty="0">
                           <a:solidFill>
@@ -2548,7 +2691,29 @@
                           <a:ea typeface="Segoe UI" pitchFamily="34" charset="-122"/>
                           <a:cs typeface="Segoe UI" pitchFamily="34" charset="-120"/>
                         </a:rPr>
-                        <a:t> : modèle de notation, outil web, données de test et import des pièces par l’IA.</a:t>
+                        <a:t> : modèle de notation, outil web, données de test et import des pièces par l’IA, complétés depuis le précédent comité par </a:t>
+                      </a:r>
+                      <a:r>
+                        <a:rPr lang="en-US" sz="1150" b="1" dirty="0">
+                          <a:solidFill>
+                            <a:srgbClr val="333333"/>
+                          </a:solidFill>
+                          <a:latin typeface="Segoe UI" pitchFamily="34" charset="0"/>
+                          <a:ea typeface="Segoe UI" pitchFamily="34" charset="-122"/>
+                          <a:cs typeface="Segoe UI" pitchFamily="34" charset="-120"/>
+                        </a:rPr>
+                        <a:t>la traçabilité des champs proposés par l’IA, la bibliothèque de scénarios de stress et le volet climatique</a:t>
+                      </a:r>
+                      <a:r>
+                        <a:rPr lang="en-US" sz="1150" dirty="0">
+                          <a:solidFill>
+                            <a:srgbClr val="333333"/>
+                          </a:solidFill>
+                          <a:latin typeface="Segoe UI" pitchFamily="34" charset="0"/>
+                          <a:ea typeface="Segoe UI" pitchFamily="34" charset="-122"/>
+                          <a:cs typeface="Segoe UI" pitchFamily="34" charset="-120"/>
+                        </a:rPr>
+                        <a:t>.</a:t>
                       </a:r>
                       <a:endParaRPr lang="en-US" sz="1150" dirty="0">
                         <a:latin typeface="Segoe UI" charset="0"/>
@@ -2582,10 +2747,10 @@
                       </a:endParaRPr>
                     </a:p>
                   </a:txBody>
-                  <a:tcPr marL="101600" marR="127000" marT="63500" marB="63500" anchor="ctr">
+                  <a:tcPr marL="91440" marR="91440" marT="45720" marB="45720" anchor="ctr">
                     <a:lnL w="9525" cap="flat" cmpd="sng" algn="ctr">
                       <a:solidFill>
-                        <a:srgbClr val="E3E3E3"/>
+                        <a:srgbClr val="D9D9D9"/>
                       </a:solidFill>
                       <a:prstDash val="solid"/>
                       <a:round/>
@@ -2594,7 +2759,7 @@
                     </a:lnL>
                     <a:lnR w="9525" cap="flat" cmpd="sng" algn="ctr">
                       <a:solidFill>
-                        <a:srgbClr val="E3E3E3"/>
+                        <a:srgbClr val="D9D9D9"/>
                       </a:solidFill>
                       <a:prstDash val="solid"/>
                       <a:round/>
@@ -2603,7 +2768,7 @@
                     </a:lnR>
                     <a:lnT w="9525" cap="flat" cmpd="sng" algn="ctr">
                       <a:solidFill>
-                        <a:srgbClr val="E3E3E3"/>
+                        <a:srgbClr val="D9D9D9"/>
                       </a:solidFill>
                       <a:prstDash val="solid"/>
                       <a:round/>
@@ -2612,7 +2777,7 @@
                     </a:lnT>
                     <a:lnB w="9525" cap="flat" cmpd="sng" algn="ctr">
                       <a:solidFill>
-                        <a:srgbClr val="E3E3E3"/>
+                        <a:srgbClr val="D9D9D9"/>
                       </a:solidFill>
                       <a:prstDash val="solid"/>
                       <a:round/>
@@ -2653,7 +2818,7 @@
                   <a:tcPr marL="91440" marR="91440" marT="45720" marB="45720" anchor="ctr">
                     <a:lnL w="9525" cap="flat" cmpd="sng" algn="ctr">
                       <a:solidFill>
-                        <a:srgbClr val="E3E3E3"/>
+                        <a:srgbClr val="D9D9D9"/>
                       </a:solidFill>
                       <a:prstDash val="solid"/>
                       <a:round/>
@@ -2662,7 +2827,7 @@
                     </a:lnL>
                     <a:lnR w="9525" cap="flat" cmpd="sng" algn="ctr">
                       <a:solidFill>
-                        <a:srgbClr val="E3E3E3"/>
+                        <a:srgbClr val="D9D9D9"/>
                       </a:solidFill>
                       <a:prstDash val="solid"/>
                       <a:round/>
@@ -2671,7 +2836,7 @@
                     </a:lnR>
                     <a:lnT w="9525" cap="flat" cmpd="sng" algn="ctr">
                       <a:solidFill>
-                        <a:srgbClr val="E3E3E3"/>
+                        <a:srgbClr val="D9D9D9"/>
                       </a:solidFill>
                       <a:prstDash val="solid"/>
                       <a:round/>
@@ -2680,7 +2845,7 @@
                     </a:lnT>
                     <a:lnB w="9525" cap="flat" cmpd="sng" algn="ctr">
                       <a:solidFill>
-                        <a:srgbClr val="E3E3E3"/>
+                        <a:srgbClr val="D9D9D9"/>
                       </a:solidFill>
                       <a:prstDash val="solid"/>
                       <a:round/>
@@ -2721,36 +2886,36 @@
                     </a:p>
                   </a:txBody>
                   <a:tcPr marL="76200" marR="127000" marT="50800" marB="50800" anchor="ctr">
-                    <a:lnL w="38100" cap="flat" cmpd="sng" algn="ctr">
-                      <a:solidFill>
-                        <a:srgbClr val="FFFFFF"/>
+                    <a:lnL w="9525" cap="flat" cmpd="sng" algn="ctr">
+                      <a:solidFill>
+                        <a:srgbClr val="D9D9D9"/>
                       </a:solidFill>
                       <a:prstDash val="solid"/>
                       <a:round/>
                       <a:headEnd type="none" w="med" len="med"/>
                       <a:tailEnd type="none" w="med" len="med"/>
                     </a:lnL>
-                    <a:lnR w="38100" cap="flat" cmpd="sng" algn="ctr">
-                      <a:solidFill>
-                        <a:srgbClr val="FFFFFF"/>
+                    <a:lnR w="9525" cap="flat" cmpd="sng" algn="ctr">
+                      <a:solidFill>
+                        <a:srgbClr val="D9D9D9"/>
                       </a:solidFill>
                       <a:prstDash val="solid"/>
                       <a:round/>
                       <a:headEnd type="none" w="med" len="med"/>
                       <a:tailEnd type="none" w="med" len="med"/>
                     </a:lnR>
-                    <a:lnT w="38100" cap="flat" cmpd="sng" algn="ctr">
-                      <a:solidFill>
-                        <a:srgbClr val="FFFFFF"/>
+                    <a:lnT w="9525" cap="flat" cmpd="sng" algn="ctr">
+                      <a:solidFill>
+                        <a:srgbClr val="D9D9D9"/>
                       </a:solidFill>
                       <a:prstDash val="solid"/>
                       <a:round/>
                       <a:headEnd type="none" w="med" len="med"/>
                       <a:tailEnd type="none" w="med" len="med"/>
                     </a:lnT>
-                    <a:lnB w="38100" cap="flat" cmpd="sng" algn="ctr">
-                      <a:solidFill>
-                        <a:srgbClr val="FFFFFF"/>
+                    <a:lnB w="9525" cap="flat" cmpd="sng" algn="ctr">
+                      <a:solidFill>
+                        <a:srgbClr val="D9D9D9"/>
                       </a:solidFill>
                       <a:prstDash val="solid"/>
                       <a:round/>
@@ -2791,7 +2956,7 @@
                   <a:tcPr marL="91440" marR="91440" marT="45720" marB="45720" anchor="ctr">
                     <a:lnL w="9525" cap="flat" cmpd="sng" algn="ctr">
                       <a:solidFill>
-                        <a:srgbClr val="E3E3E3"/>
+                        <a:srgbClr val="D9D9D9"/>
                       </a:solidFill>
                       <a:prstDash val="solid"/>
                       <a:round/>
@@ -2800,7 +2965,7 @@
                     </a:lnL>
                     <a:lnR w="9525" cap="flat" cmpd="sng" algn="ctr">
                       <a:solidFill>
-                        <a:srgbClr val="E3E3E3"/>
+                        <a:srgbClr val="D9D9D9"/>
                       </a:solidFill>
                       <a:prstDash val="solid"/>
                       <a:round/>
@@ -2809,7 +2974,7 @@
                     </a:lnR>
                     <a:lnT w="9525" cap="flat" cmpd="sng" algn="ctr">
                       <a:solidFill>
-                        <a:srgbClr val="E3E3E3"/>
+                        <a:srgbClr val="D9D9D9"/>
                       </a:solidFill>
                       <a:prstDash val="solid"/>
                       <a:round/>
@@ -2818,7 +2983,7 @@
                     </a:lnT>
                     <a:lnB w="9525" cap="flat" cmpd="sng" algn="ctr">
                       <a:solidFill>
-                        <a:srgbClr val="E3E3E3"/>
+                        <a:srgbClr val="D9D9D9"/>
                       </a:solidFill>
                       <a:prstDash val="solid"/>
                       <a:round/>
@@ -2853,13 +3018,6 @@
                         </a:rPr>
                         <a:t>Le modèle est stabilisé : </a:t>
                       </a:r>
-                      <a:pPr algn="just" marL="177800" indent="-177800">
-                        <a:spcAft>
-                          <a:spcPts val="400"/>
-                        </a:spcAft>
-                        <a:buSzPct val="100000"/>
-                        <a:buChar char="▪"/>
-                      </a:pPr>
                       <a:r>
                         <a:rPr lang="en-US" sz="1150" b="1" dirty="0">
                           <a:solidFill>
@@ -2869,15 +3027,8 @@
                           <a:ea typeface="Segoe UI" pitchFamily="34" charset="-122"/>
                           <a:cs typeface="Segoe UI" pitchFamily="34" charset="-120"/>
                         </a:rPr>
-                        <a:t>9 domaines pondérés selon la phase, noyau financier N1 à N6, 25 critères, 15 plafonds et 12 verrous</a:t>
-                      </a:r>
-                      <a:pPr algn="just" marL="177800" indent="-177800">
-                        <a:spcAft>
-                          <a:spcPts val="400"/>
-                        </a:spcAft>
-                        <a:buSzPct val="100000"/>
-                        <a:buChar char="▪"/>
-                      </a:pPr>
+                        <a:t>9 domaines pondérés selon la phase, noyau financier N1 à N6, 25 critères, 17 plafonds (C1 à C17) et 12 verrous</a:t>
+                      </a:r>
                       <a:r>
                         <a:rPr lang="en-US" sz="1150" dirty="0">
                           <a:solidFill>
@@ -2912,15 +3063,8 @@
                           <a:ea typeface="Segoe UI" pitchFamily="34" charset="-122"/>
                           <a:cs typeface="Segoe UI" pitchFamily="34" charset="-120"/>
                         </a:rPr>
-                        <a:t>Les paramètres (poids, seuils, plafonds, correspondance des grades) restent des </a:t>
-                      </a:r>
-                      <a:pPr algn="just" marL="177800" indent="-177800">
-                        <a:spcAft>
-                          <a:spcPts val="400"/>
-                        </a:spcAft>
-                        <a:buSzPct val="100000"/>
-                        <a:buChar char="▪"/>
-                      </a:pPr>
+                        <a:t>Les paramètres (poids, seuils, plafonds, scénarios de stress, règles climatiques, correspondance des grades) restent des </a:t>
+                      </a:r>
                       <a:r>
                         <a:rPr lang="en-US" sz="1150" b="1" dirty="0">
                           <a:solidFill>
@@ -2932,13 +3076,6 @@
                         </a:rPr>
                         <a:t>valeurs candidates</a:t>
                       </a:r>
-                      <a:pPr algn="just" marL="177800" indent="-177800">
-                        <a:spcAft>
-                          <a:spcPts val="400"/>
-                        </a:spcAft>
-                        <a:buSzPct val="100000"/>
-                        <a:buChar char="▪"/>
-                      </a:pPr>
                       <a:r>
                         <a:rPr lang="en-US" sz="1150" dirty="0">
                           <a:solidFill>
@@ -2957,10 +3094,10 @@
                       </a:endParaRPr>
                     </a:p>
                   </a:txBody>
-                  <a:tcPr marL="101600" marR="127000" marT="63500" marB="63500" anchor="ctr">
+                  <a:tcPr marL="91440" marR="91440" marT="45720" marB="45720" anchor="ctr">
                     <a:lnL w="9525" cap="flat" cmpd="sng" algn="ctr">
                       <a:solidFill>
-                        <a:srgbClr val="E3E3E3"/>
+                        <a:srgbClr val="D9D9D9"/>
                       </a:solidFill>
                       <a:prstDash val="solid"/>
                       <a:round/>
@@ -2969,7 +3106,7 @@
                     </a:lnL>
                     <a:lnR w="9525" cap="flat" cmpd="sng" algn="ctr">
                       <a:solidFill>
-                        <a:srgbClr val="E3E3E3"/>
+                        <a:srgbClr val="D9D9D9"/>
                       </a:solidFill>
                       <a:prstDash val="solid"/>
                       <a:round/>
@@ -2978,7 +3115,7 @@
                     </a:lnR>
                     <a:lnT w="9525" cap="flat" cmpd="sng" algn="ctr">
                       <a:solidFill>
-                        <a:srgbClr val="E3E3E3"/>
+                        <a:srgbClr val="D9D9D9"/>
                       </a:solidFill>
                       <a:prstDash val="solid"/>
                       <a:round/>
@@ -2987,7 +3124,7 @@
                     </a:lnT>
                     <a:lnB w="9525" cap="flat" cmpd="sng" algn="ctr">
                       <a:solidFill>
-                        <a:srgbClr val="E3E3E3"/>
+                        <a:srgbClr val="D9D9D9"/>
                       </a:solidFill>
                       <a:prstDash val="solid"/>
                       <a:round/>
@@ -3028,7 +3165,7 @@
                   <a:tcPr marL="91440" marR="91440" marT="45720" marB="45720" anchor="ctr">
                     <a:lnL w="9525" cap="flat" cmpd="sng" algn="ctr">
                       <a:solidFill>
-                        <a:srgbClr val="E3E3E3"/>
+                        <a:srgbClr val="D9D9D9"/>
                       </a:solidFill>
                       <a:prstDash val="solid"/>
                       <a:round/>
@@ -3037,7 +3174,7 @@
                     </a:lnL>
                     <a:lnR w="9525" cap="flat" cmpd="sng" algn="ctr">
                       <a:solidFill>
-                        <a:srgbClr val="E3E3E3"/>
+                        <a:srgbClr val="D9D9D9"/>
                       </a:solidFill>
                       <a:prstDash val="solid"/>
                       <a:round/>
@@ -3046,7 +3183,7 @@
                     </a:lnR>
                     <a:lnT w="9525" cap="flat" cmpd="sng" algn="ctr">
                       <a:solidFill>
-                        <a:srgbClr val="E3E3E3"/>
+                        <a:srgbClr val="D9D9D9"/>
                       </a:solidFill>
                       <a:prstDash val="solid"/>
                       <a:round/>
@@ -3055,7 +3192,7 @@
                     </a:lnT>
                     <a:lnB w="9525" cap="flat" cmpd="sng" algn="ctr">
                       <a:solidFill>
-                        <a:srgbClr val="E3E3E3"/>
+                        <a:srgbClr val="D9D9D9"/>
                       </a:solidFill>
                       <a:prstDash val="solid"/>
                       <a:round/>
@@ -3101,7 +3238,7 @@
                   <a:tcPr marL="91440" marR="91440" marT="45720" marB="45720" anchor="ctr">
                     <a:lnL w="9525" cap="flat" cmpd="sng" algn="ctr">
                       <a:solidFill>
-                        <a:srgbClr val="E3E3E3"/>
+                        <a:srgbClr val="D9D9D9"/>
                       </a:solidFill>
                       <a:prstDash val="solid"/>
                       <a:round/>
@@ -3110,7 +3247,7 @@
                     </a:lnL>
                     <a:lnR w="9525" cap="flat" cmpd="sng" algn="ctr">
                       <a:solidFill>
-                        <a:srgbClr val="E3E3E3"/>
+                        <a:srgbClr val="D9D9D9"/>
                       </a:solidFill>
                       <a:prstDash val="solid"/>
                       <a:round/>
@@ -3119,7 +3256,7 @@
                     </a:lnR>
                     <a:lnT w="9525" cap="flat" cmpd="sng" algn="ctr">
                       <a:solidFill>
-                        <a:srgbClr val="E3E3E3"/>
+                        <a:srgbClr val="D9D9D9"/>
                       </a:solidFill>
                       <a:prstDash val="solid"/>
                       <a:round/>
@@ -3128,7 +3265,7 @@
                     </a:lnT>
                     <a:lnB w="9525" cap="flat" cmpd="sng" algn="ctr">
                       <a:solidFill>
-                        <a:srgbClr val="E3E3E3"/>
+                        <a:srgbClr val="D9D9D9"/>
                       </a:solidFill>
                       <a:prstDash val="solid"/>
                       <a:round/>
@@ -3163,13 +3300,6 @@
                         </a:rPr>
                         <a:t>Il est proposé de </a:t>
                       </a:r>
-                      <a:pPr algn="just" marL="177800" indent="-177800">
-                        <a:spcAft>
-                          <a:spcPts val="400"/>
-                        </a:spcAft>
-                        <a:buSzPct val="100000"/>
-                        <a:buChar char="▪"/>
-                      </a:pPr>
                       <a:r>
                         <a:rPr lang="en-US" sz="1150" b="1" dirty="0">
                           <a:solidFill>
@@ -3181,13 +3311,6 @@
                         </a:rPr>
                         <a:t>soumettre le modèle à la revue des experts</a:t>
                       </a:r>
-                      <a:pPr algn="just" marL="177800" indent="-177800">
-                        <a:spcAft>
-                          <a:spcPts val="400"/>
-                        </a:spcAft>
-                        <a:buSzPct val="100000"/>
-                        <a:buChar char="▪"/>
-                      </a:pPr>
                       <a:r>
                         <a:rPr lang="en-US" sz="1150" dirty="0">
                           <a:solidFill>
@@ -3206,10 +3329,10 @@
                       </a:endParaRPr>
                     </a:p>
                   </a:txBody>
-                  <a:tcPr marL="101600" marR="127000" marT="63500" marB="63500" anchor="ctr">
+                  <a:tcPr marL="91440" marR="91440" marT="45720" marB="45720" anchor="ctr">
                     <a:lnL w="9525" cap="flat" cmpd="sng" algn="ctr">
                       <a:solidFill>
-                        <a:srgbClr val="E3E3E3"/>
+                        <a:srgbClr val="D9D9D9"/>
                       </a:solidFill>
                       <a:prstDash val="solid"/>
                       <a:round/>
@@ -3218,7 +3341,7 @@
                     </a:lnL>
                     <a:lnR w="9525" cap="flat" cmpd="sng" algn="ctr">
                       <a:solidFill>
-                        <a:srgbClr val="E3E3E3"/>
+                        <a:srgbClr val="D9D9D9"/>
                       </a:solidFill>
                       <a:prstDash val="solid"/>
                       <a:round/>
@@ -3227,7 +3350,7 @@
                     </a:lnR>
                     <a:lnT w="9525" cap="flat" cmpd="sng" algn="ctr">
                       <a:solidFill>
-                        <a:srgbClr val="E3E3E3"/>
+                        <a:srgbClr val="D9D9D9"/>
                       </a:solidFill>
                       <a:prstDash val="solid"/>
                       <a:round/>
@@ -3236,7 +3359,7 @@
                     </a:lnT>
                     <a:lnB w="9525" cap="flat" cmpd="sng" algn="ctr">
                       <a:solidFill>
-                        <a:srgbClr val="E3E3E3"/>
+                        <a:srgbClr val="D9D9D9"/>
                       </a:solidFill>
                       <a:prstDash val="solid"/>
                       <a:round/>
@@ -3277,7 +3400,7 @@
                   <a:tcPr marL="91440" marR="91440" marT="45720" marB="45720" anchor="ctr">
                     <a:lnL w="9525" cap="flat" cmpd="sng" algn="ctr">
                       <a:solidFill>
-                        <a:srgbClr val="E3E3E3"/>
+                        <a:srgbClr val="D9D9D9"/>
                       </a:solidFill>
                       <a:prstDash val="solid"/>
                       <a:round/>
@@ -3286,7 +3409,7 @@
                     </a:lnL>
                     <a:lnR w="9525" cap="flat" cmpd="sng" algn="ctr">
                       <a:solidFill>
-                        <a:srgbClr val="E3E3E3"/>
+                        <a:srgbClr val="D9D9D9"/>
                       </a:solidFill>
                       <a:prstDash val="solid"/>
                       <a:round/>
@@ -3295,7 +3418,7 @@
                     </a:lnR>
                     <a:lnT w="9525" cap="flat" cmpd="sng" algn="ctr">
                       <a:solidFill>
-                        <a:srgbClr val="E3E3E3"/>
+                        <a:srgbClr val="D9D9D9"/>
                       </a:solidFill>
                       <a:prstDash val="solid"/>
                       <a:round/>
@@ -3304,7 +3427,7 @@
                     </a:lnT>
                     <a:lnB w="9525" cap="flat" cmpd="sng" algn="ctr">
                       <a:solidFill>
-                        <a:srgbClr val="E3E3E3"/>
+                        <a:srgbClr val="D9D9D9"/>
                       </a:solidFill>
                       <a:prstDash val="solid"/>
                       <a:round/>
@@ -3350,7 +3473,7 @@
                   <a:tcPr marL="91440" marR="91440" marT="45720" marB="45720" anchor="ctr">
                     <a:lnL w="9525" cap="flat" cmpd="sng" algn="ctr">
                       <a:solidFill>
-                        <a:srgbClr val="E3E3E3"/>
+                        <a:srgbClr val="D9D9D9"/>
                       </a:solidFill>
                       <a:prstDash val="solid"/>
                       <a:round/>
@@ -3359,7 +3482,7 @@
                     </a:lnL>
                     <a:lnR w="9525" cap="flat" cmpd="sng" algn="ctr">
                       <a:solidFill>
-                        <a:srgbClr val="E3E3E3"/>
+                        <a:srgbClr val="D9D9D9"/>
                       </a:solidFill>
                       <a:prstDash val="solid"/>
                       <a:round/>
@@ -3368,7 +3491,7 @@
                     </a:lnR>
                     <a:lnT w="9525" cap="flat" cmpd="sng" algn="ctr">
                       <a:solidFill>
-                        <a:srgbClr val="E3E3E3"/>
+                        <a:srgbClr val="D9D9D9"/>
                       </a:solidFill>
                       <a:prstDash val="solid"/>
                       <a:round/>
@@ -3377,7 +3500,7 @@
                     </a:lnT>
                     <a:lnB w="9525" cap="flat" cmpd="sng" algn="ctr">
                       <a:solidFill>
-                        <a:srgbClr val="E3E3E3"/>
+                        <a:srgbClr val="D9D9D9"/>
                       </a:solidFill>
                       <a:prstDash val="solid"/>
                       <a:round/>
@@ -3412,13 +3535,6 @@
                         </a:rPr>
                         <a:t>Faire valider par la Conformité la </a:t>
                       </a:r>
-                      <a:pPr algn="just" marL="177800" indent="-177800">
-                        <a:spcAft>
-                          <a:spcPts val="400"/>
-                        </a:spcAft>
-                        <a:buSzPct val="100000"/>
-                        <a:buChar char="▪"/>
-                      </a:pPr>
                       <a:r>
                         <a:rPr lang="en-US" sz="1150" b="1" dirty="0">
                           <a:solidFill>
@@ -3430,13 +3546,6 @@
                         </a:rPr>
                         <a:t>portée des directives BAM 3/W/2025 (consortialisation) et 2/W/2025 (risques climatiques)</a:t>
                       </a:r>
-                      <a:pPr algn="just" marL="177800" indent="-177800">
-                        <a:spcAft>
-                          <a:spcPts val="400"/>
-                        </a:spcAft>
-                        <a:buSzPct val="100000"/>
-                        <a:buChar char="▪"/>
-                      </a:pPr>
                       <a:r>
                         <a:rPr lang="en-US" sz="1150" dirty="0">
                           <a:solidFill>
@@ -3455,10 +3564,10 @@
                       </a:endParaRPr>
                     </a:p>
                   </a:txBody>
-                  <a:tcPr marL="101600" marR="127000" marT="63500" marB="63500" anchor="ctr">
+                  <a:tcPr marL="91440" marR="91440" marT="45720" marB="45720" anchor="ctr">
                     <a:lnL w="9525" cap="flat" cmpd="sng" algn="ctr">
                       <a:solidFill>
-                        <a:srgbClr val="E3E3E3"/>
+                        <a:srgbClr val="D9D9D9"/>
                       </a:solidFill>
                       <a:prstDash val="solid"/>
                       <a:round/>
@@ -3467,7 +3576,7 @@
                     </a:lnL>
                     <a:lnR w="9525" cap="flat" cmpd="sng" algn="ctr">
                       <a:solidFill>
-                        <a:srgbClr val="E3E3E3"/>
+                        <a:srgbClr val="D9D9D9"/>
                       </a:solidFill>
                       <a:prstDash val="solid"/>
                       <a:round/>
@@ -3476,7 +3585,7 @@
                     </a:lnR>
                     <a:lnT w="9525" cap="flat" cmpd="sng" algn="ctr">
                       <a:solidFill>
-                        <a:srgbClr val="E3E3E3"/>
+                        <a:srgbClr val="D9D9D9"/>
                       </a:solidFill>
                       <a:prstDash val="solid"/>
                       <a:round/>
@@ -3485,7 +3594,7 @@
                     </a:lnT>
                     <a:lnB w="9525" cap="flat" cmpd="sng" algn="ctr">
                       <a:solidFill>
-                        <a:srgbClr val="E3E3E3"/>
+                        <a:srgbClr val="D9D9D9"/>
                       </a:solidFill>
                       <a:prstDash val="solid"/>
                       <a:round/>
@@ -3526,7 +3635,7 @@
                   <a:tcPr marL="91440" marR="91440" marT="45720" marB="45720" anchor="ctr">
                     <a:lnL w="9525" cap="flat" cmpd="sng" algn="ctr">
                       <a:solidFill>
-                        <a:srgbClr val="E3E3E3"/>
+                        <a:srgbClr val="D9D9D9"/>
                       </a:solidFill>
                       <a:prstDash val="solid"/>
                       <a:round/>
@@ -3535,7 +3644,7 @@
                     </a:lnL>
                     <a:lnR w="9525" cap="flat" cmpd="sng" algn="ctr">
                       <a:solidFill>
-                        <a:srgbClr val="E3E3E3"/>
+                        <a:srgbClr val="D9D9D9"/>
                       </a:solidFill>
                       <a:prstDash val="solid"/>
                       <a:round/>
@@ -3544,7 +3653,7 @@
                     </a:lnR>
                     <a:lnT w="9525" cap="flat" cmpd="sng" algn="ctr">
                       <a:solidFill>
-                        <a:srgbClr val="E3E3E3"/>
+                        <a:srgbClr val="D9D9D9"/>
                       </a:solidFill>
                       <a:prstDash val="solid"/>
                       <a:round/>
@@ -3553,7 +3662,7 @@
                     </a:lnT>
                     <a:lnB w="9525" cap="flat" cmpd="sng" algn="ctr">
                       <a:solidFill>
-                        <a:srgbClr val="E3E3E3"/>
+                        <a:srgbClr val="D9D9D9"/>
                       </a:solidFill>
                       <a:prstDash val="solid"/>
                       <a:round/>
@@ -3594,36 +3703,36 @@
                     </a:p>
                   </a:txBody>
                   <a:tcPr marL="76200" marR="127000" marT="50800" marB="50800" anchor="ctr">
-                    <a:lnL w="38100" cap="flat" cmpd="sng" algn="ctr">
-                      <a:solidFill>
-                        <a:srgbClr val="FFFFFF"/>
+                    <a:lnL w="9525" cap="flat" cmpd="sng" algn="ctr">
+                      <a:solidFill>
+                        <a:srgbClr val="D9D9D9"/>
                       </a:solidFill>
                       <a:prstDash val="solid"/>
                       <a:round/>
                       <a:headEnd type="none" w="med" len="med"/>
                       <a:tailEnd type="none" w="med" len="med"/>
                     </a:lnL>
-                    <a:lnR w="38100" cap="flat" cmpd="sng" algn="ctr">
-                      <a:solidFill>
-                        <a:srgbClr val="FFFFFF"/>
+                    <a:lnR w="9525" cap="flat" cmpd="sng" algn="ctr">
+                      <a:solidFill>
+                        <a:srgbClr val="D9D9D9"/>
                       </a:solidFill>
                       <a:prstDash val="solid"/>
                       <a:round/>
                       <a:headEnd type="none" w="med" len="med"/>
                       <a:tailEnd type="none" w="med" len="med"/>
                     </a:lnR>
-                    <a:lnT w="38100" cap="flat" cmpd="sng" algn="ctr">
-                      <a:solidFill>
-                        <a:srgbClr val="FFFFFF"/>
+                    <a:lnT w="9525" cap="flat" cmpd="sng" algn="ctr">
+                      <a:solidFill>
+                        <a:srgbClr val="D9D9D9"/>
                       </a:solidFill>
                       <a:prstDash val="solid"/>
                       <a:round/>
                       <a:headEnd type="none" w="med" len="med"/>
                       <a:tailEnd type="none" w="med" len="med"/>
                     </a:lnT>
-                    <a:lnB w="38100" cap="flat" cmpd="sng" algn="ctr">
-                      <a:solidFill>
-                        <a:srgbClr val="FFFFFF"/>
+                    <a:lnB w="9525" cap="flat" cmpd="sng" algn="ctr">
+                      <a:solidFill>
+                        <a:srgbClr val="D9D9D9"/>
                       </a:solidFill>
                       <a:prstDash val="solid"/>
                       <a:round/>
@@ -3664,7 +3773,7 @@
                   <a:tcPr marL="91440" marR="91440" marT="45720" marB="45720" anchor="ctr">
                     <a:lnL w="9525" cap="flat" cmpd="sng" algn="ctr">
                       <a:solidFill>
-                        <a:srgbClr val="E3E3E3"/>
+                        <a:srgbClr val="D9D9D9"/>
                       </a:solidFill>
                       <a:prstDash val="solid"/>
                       <a:round/>
@@ -3673,7 +3782,7 @@
                     </a:lnL>
                     <a:lnR w="9525" cap="flat" cmpd="sng" algn="ctr">
                       <a:solidFill>
-                        <a:srgbClr val="E3E3E3"/>
+                        <a:srgbClr val="D9D9D9"/>
                       </a:solidFill>
                       <a:prstDash val="solid"/>
                       <a:round/>
@@ -3682,7 +3791,7 @@
                     </a:lnR>
                     <a:lnT w="9525" cap="flat" cmpd="sng" algn="ctr">
                       <a:solidFill>
-                        <a:srgbClr val="E3E3E3"/>
+                        <a:srgbClr val="D9D9D9"/>
                       </a:solidFill>
                       <a:prstDash val="solid"/>
                       <a:round/>
@@ -3691,7 +3800,7 @@
                     </a:lnT>
                     <a:lnB w="9525" cap="flat" cmpd="sng" algn="ctr">
                       <a:solidFill>
-                        <a:srgbClr val="E3E3E3"/>
+                        <a:srgbClr val="D9D9D9"/>
                       </a:solidFill>
                       <a:prstDash val="solid"/>
                       <a:round/>
@@ -3726,13 +3835,6 @@
                         </a:rPr>
                         <a:t>Le </a:t>
                       </a:r>
-                      <a:pPr algn="just" marL="177800" indent="-177800">
-                        <a:spcAft>
-                          <a:spcPts val="400"/>
-                        </a:spcAft>
-                        <a:buSzPct val="100000"/>
-                        <a:buChar char="▪"/>
-                      </a:pPr>
                       <a:r>
                         <a:rPr lang="en-US" sz="1150" b="1" dirty="0">
                           <a:solidFill>
@@ -3744,13 +3846,6 @@
                         </a:rPr>
                         <a:t>parcours de saisie en 13 blocs, la lecture des pièces par l’IA et l’export des propositions</a:t>
                       </a:r>
-                      <a:pPr algn="just" marL="177800" indent="-177800">
-                        <a:spcAft>
-                          <a:spcPts val="400"/>
-                        </a:spcAft>
-                        <a:buSzPct val="100000"/>
-                        <a:buChar char="▪"/>
-                      </a:pPr>
                       <a:r>
                         <a:rPr lang="en-US" sz="1150" dirty="0">
                           <a:solidFill>
@@ -3787,13 +3882,6 @@
                         </a:rPr>
                         <a:t>Un </a:t>
                       </a:r>
-                      <a:pPr algn="just" marL="177800" indent="-177800">
-                        <a:spcAft>
-                          <a:spcPts val="400"/>
-                        </a:spcAft>
-                        <a:buSzPct val="100000"/>
-                        <a:buChar char="▪"/>
-                      </a:pPr>
                       <a:r>
                         <a:rPr lang="en-US" sz="1150" b="1" dirty="0">
                           <a:solidFill>
@@ -3805,13 +3893,6 @@
                         </a:rPr>
                         <a:t>diagnostic complet</a:t>
                       </a:r>
-                      <a:pPr algn="just" marL="177800" indent="-177800">
-                        <a:spcAft>
-                          <a:spcPts val="400"/>
-                        </a:spcAft>
-                        <a:buSzPct val="100000"/>
-                        <a:buChar char="▪"/>
-                      </a:pPr>
                       <a:r>
                         <a:rPr lang="en-US" sz="1150" dirty="0">
                           <a:solidFill>
@@ -3830,10 +3911,10 @@
                       </a:endParaRPr>
                     </a:p>
                   </a:txBody>
-                  <a:tcPr marL="101600" marR="127000" marT="63500" marB="63500" anchor="ctr">
+                  <a:tcPr marL="91440" marR="91440" marT="45720" marB="45720" anchor="ctr">
                     <a:lnL w="9525" cap="flat" cmpd="sng" algn="ctr">
                       <a:solidFill>
-                        <a:srgbClr val="E3E3E3"/>
+                        <a:srgbClr val="D9D9D9"/>
                       </a:solidFill>
                       <a:prstDash val="solid"/>
                       <a:round/>
@@ -3842,7 +3923,7 @@
                     </a:lnL>
                     <a:lnR w="9525" cap="flat" cmpd="sng" algn="ctr">
                       <a:solidFill>
-                        <a:srgbClr val="E3E3E3"/>
+                        <a:srgbClr val="D9D9D9"/>
                       </a:solidFill>
                       <a:prstDash val="solid"/>
                       <a:round/>
@@ -3851,7 +3932,7 @@
                     </a:lnR>
                     <a:lnT w="9525" cap="flat" cmpd="sng" algn="ctr">
                       <a:solidFill>
-                        <a:srgbClr val="E3E3E3"/>
+                        <a:srgbClr val="D9D9D9"/>
                       </a:solidFill>
                       <a:prstDash val="solid"/>
                       <a:round/>
@@ -3860,7 +3941,7 @@
                     </a:lnT>
                     <a:lnB w="9525" cap="flat" cmpd="sng" algn="ctr">
                       <a:solidFill>
-                        <a:srgbClr val="E3E3E3"/>
+                        <a:srgbClr val="D9D9D9"/>
                       </a:solidFill>
                       <a:prstDash val="solid"/>
                       <a:round/>
@@ -3901,7 +3982,7 @@
                   <a:tcPr marL="91440" marR="91440" marT="45720" marB="45720" anchor="ctr">
                     <a:lnL w="9525" cap="flat" cmpd="sng" algn="ctr">
                       <a:solidFill>
-                        <a:srgbClr val="E3E3E3"/>
+                        <a:srgbClr val="D9D9D9"/>
                       </a:solidFill>
                       <a:prstDash val="solid"/>
                       <a:round/>
@@ -3910,7 +3991,7 @@
                     </a:lnL>
                     <a:lnR w="9525" cap="flat" cmpd="sng" algn="ctr">
                       <a:solidFill>
-                        <a:srgbClr val="E3E3E3"/>
+                        <a:srgbClr val="D9D9D9"/>
                       </a:solidFill>
                       <a:prstDash val="solid"/>
                       <a:round/>
@@ -3919,7 +4000,7 @@
                     </a:lnR>
                     <a:lnT w="9525" cap="flat" cmpd="sng" algn="ctr">
                       <a:solidFill>
-                        <a:srgbClr val="E3E3E3"/>
+                        <a:srgbClr val="D9D9D9"/>
                       </a:solidFill>
                       <a:prstDash val="solid"/>
                       <a:round/>
@@ -3928,7 +4009,7 @@
                     </a:lnT>
                     <a:lnB w="9525" cap="flat" cmpd="sng" algn="ctr">
                       <a:solidFill>
-                        <a:srgbClr val="E3E3E3"/>
+                        <a:srgbClr val="D9D9D9"/>
                       </a:solidFill>
                       <a:prstDash val="solid"/>
                       <a:round/>
@@ -3974,7 +4055,7 @@
                   <a:tcPr marL="91440" marR="91440" marT="45720" marB="45720" anchor="ctr">
                     <a:lnL w="9525" cap="flat" cmpd="sng" algn="ctr">
                       <a:solidFill>
-                        <a:srgbClr val="E3E3E3"/>
+                        <a:srgbClr val="D9D9D9"/>
                       </a:solidFill>
                       <a:prstDash val="solid"/>
                       <a:round/>
@@ -3983,7 +4064,7 @@
                     </a:lnL>
                     <a:lnR w="9525" cap="flat" cmpd="sng" algn="ctr">
                       <a:solidFill>
-                        <a:srgbClr val="E3E3E3"/>
+                        <a:srgbClr val="D9D9D9"/>
                       </a:solidFill>
                       <a:prstDash val="solid"/>
                       <a:round/>
@@ -3992,7 +4073,7 @@
                     </a:lnR>
                     <a:lnT w="9525" cap="flat" cmpd="sng" algn="ctr">
                       <a:solidFill>
-                        <a:srgbClr val="E3E3E3"/>
+                        <a:srgbClr val="D9D9D9"/>
                       </a:solidFill>
                       <a:prstDash val="solid"/>
                       <a:round/>
@@ -4001,7 +4082,7 @@
                     </a:lnT>
                     <a:lnB w="9525" cap="flat" cmpd="sng" algn="ctr">
                       <a:solidFill>
-                        <a:srgbClr val="E3E3E3"/>
+                        <a:srgbClr val="D9D9D9"/>
                       </a:solidFill>
                       <a:prstDash val="solid"/>
                       <a:round/>
@@ -4036,13 +4117,6 @@
                         </a:rPr>
                         <a:t>Fusionner la branche de développement dans la branche principale pour </a:t>
                       </a:r>
-                      <a:pPr algn="just" marL="177800" indent="-177800">
-                        <a:spcAft>
-                          <a:spcPts val="400"/>
-                        </a:spcAft>
-                        <a:buSzPct val="100000"/>
-                        <a:buChar char="▪"/>
-                      </a:pPr>
                       <a:r>
                         <a:rPr lang="en-US" sz="1150" b="1" dirty="0">
                           <a:solidFill>
@@ -4054,13 +4128,6 @@
                         </a:rPr>
                         <a:t>mettre en ligne les correctifs</a:t>
                       </a:r>
-                      <a:pPr algn="just" marL="177800" indent="-177800">
-                        <a:spcAft>
-                          <a:spcPts val="400"/>
-                        </a:spcAft>
-                        <a:buSzPct val="100000"/>
-                        <a:buChar char="▪"/>
-                      </a:pPr>
                       <a:r>
                         <a:rPr lang="en-US" sz="1150" dirty="0">
                           <a:solidFill>
@@ -4070,7 +4137,7 @@
                           <a:ea typeface="Segoe UI" pitchFamily="34" charset="-122"/>
                           <a:cs typeface="Segoe UI" pitchFamily="34" charset="-120"/>
                         </a:rPr>
-                        <a:t>, dont celui du déploiement sur l’hébergeur.</a:t>
+                        <a:t> et les évolutions récentes, dont le déploiement sur l’hébergeur.</a:t>
                       </a:r>
                       <a:endParaRPr lang="en-US" sz="1150" dirty="0">
                         <a:latin typeface="Segoe UI" charset="0"/>
@@ -4079,10 +4146,10 @@
                       </a:endParaRPr>
                     </a:p>
                   </a:txBody>
-                  <a:tcPr marL="101600" marR="127000" marT="63500" marB="63500" anchor="ctr">
+                  <a:tcPr marL="91440" marR="91440" marT="45720" marB="45720" anchor="ctr">
                     <a:lnL w="9525" cap="flat" cmpd="sng" algn="ctr">
                       <a:solidFill>
-                        <a:srgbClr val="E3E3E3"/>
+                        <a:srgbClr val="D9D9D9"/>
                       </a:solidFill>
                       <a:prstDash val="solid"/>
                       <a:round/>
@@ -4091,7 +4158,7 @@
                     </a:lnL>
                     <a:lnR w="9525" cap="flat" cmpd="sng" algn="ctr">
                       <a:solidFill>
-                        <a:srgbClr val="E3E3E3"/>
+                        <a:srgbClr val="D9D9D9"/>
                       </a:solidFill>
                       <a:prstDash val="solid"/>
                       <a:round/>
@@ -4100,7 +4167,7 @@
                     </a:lnR>
                     <a:lnT w="9525" cap="flat" cmpd="sng" algn="ctr">
                       <a:solidFill>
-                        <a:srgbClr val="E3E3E3"/>
+                        <a:srgbClr val="D9D9D9"/>
                       </a:solidFill>
                       <a:prstDash val="solid"/>
                       <a:round/>
@@ -4109,7 +4176,7 @@
                     </a:lnT>
                     <a:lnB w="9525" cap="flat" cmpd="sng" algn="ctr">
                       <a:solidFill>
-                        <a:srgbClr val="E3E3E3"/>
+                        <a:srgbClr val="D9D9D9"/>
                       </a:solidFill>
                       <a:prstDash val="solid"/>
                       <a:round/>
@@ -4150,7 +4217,7 @@
                   <a:tcPr marL="91440" marR="91440" marT="45720" marB="45720" anchor="ctr">
                     <a:lnL w="9525" cap="flat" cmpd="sng" algn="ctr">
                       <a:solidFill>
-                        <a:srgbClr val="E3E3E3"/>
+                        <a:srgbClr val="D9D9D9"/>
                       </a:solidFill>
                       <a:prstDash val="solid"/>
                       <a:round/>
@@ -4159,7 +4226,7 @@
                     </a:lnL>
                     <a:lnR w="9525" cap="flat" cmpd="sng" algn="ctr">
                       <a:solidFill>
-                        <a:srgbClr val="E3E3E3"/>
+                        <a:srgbClr val="D9D9D9"/>
                       </a:solidFill>
                       <a:prstDash val="solid"/>
                       <a:round/>
@@ -4168,7 +4235,7 @@
                     </a:lnR>
                     <a:lnT w="9525" cap="flat" cmpd="sng" algn="ctr">
                       <a:solidFill>
-                        <a:srgbClr val="E3E3E3"/>
+                        <a:srgbClr val="D9D9D9"/>
                       </a:solidFill>
                       <a:prstDash val="solid"/>
                       <a:round/>
@@ -4177,7 +4244,7 @@
                     </a:lnT>
                     <a:lnB w="9525" cap="flat" cmpd="sng" algn="ctr">
                       <a:solidFill>
-                        <a:srgbClr val="E3E3E3"/>
+                        <a:srgbClr val="D9D9D9"/>
                       </a:solidFill>
                       <a:prstDash val="solid"/>
                       <a:round/>
@@ -4226,6 +4293,9 @@
                 <a:solidFill>
                   <a:srgbClr val="7A7A7A"/>
                 </a:solidFill>
+                <a:latin typeface="Segoe UI"/>
+                <a:ea typeface="Segoe UI"/>
+                <a:cs typeface="Segoe UI"/>
               </a:defRPr>
             </a:lvl1pPr>
           </a:lstStyle>
@@ -4284,7 +4354,7 @@
           <a:ln/>
         </p:spPr>
         <p:txBody>
-          <a:bodyPr wrap="square" rtlCol="0" anchor="ctr"/>
+          <a:bodyPr wrap="square" lIns="0" tIns="0" rIns="0" bIns="0" rtlCol="0" anchor="ctr"/>
           <a:lstStyle/>
           <a:p>
             <a:pPr algn="l" indent="0" marL="0">
@@ -4299,7 +4369,7 @@
                 <a:ea typeface="Segoe UI" pitchFamily="34" charset="-122"/>
                 <a:cs typeface="Segoe UI" pitchFamily="34" charset="-120"/>
               </a:rPr>
-              <a:t>Relevé d’informations, de décisions et d’actions (2/2)</a:t>
+              <a:t>Relevé d’informations, de décisions et d’actions (2/3)</a:t>
             </a:r>
             <a:endParaRPr lang="en-US" sz="1800" dirty="0"/>
           </a:p>
@@ -4361,36 +4431,36 @@
                     </a:p>
                   </a:txBody>
                   <a:tcPr marL="91440" marR="91440" marT="45720" marB="45720" anchor="ctr">
-                    <a:lnL w="38100" cap="flat" cmpd="sng" algn="ctr">
-                      <a:solidFill>
-                        <a:srgbClr val="FFFFFF"/>
+                    <a:lnL w="9525" cap="flat" cmpd="sng" algn="ctr">
+                      <a:solidFill>
+                        <a:srgbClr val="D9D9D9"/>
                       </a:solidFill>
                       <a:prstDash val="solid"/>
                       <a:round/>
                       <a:headEnd type="none" w="med" len="med"/>
                       <a:tailEnd type="none" w="med" len="med"/>
                     </a:lnL>
-                    <a:lnR w="38100" cap="flat" cmpd="sng" algn="ctr">
-                      <a:solidFill>
-                        <a:srgbClr val="FFFFFF"/>
+                    <a:lnR w="9525" cap="flat" cmpd="sng" algn="ctr">
+                      <a:solidFill>
+                        <a:srgbClr val="D9D9D9"/>
                       </a:solidFill>
                       <a:prstDash val="solid"/>
                       <a:round/>
                       <a:headEnd type="none" w="med" len="med"/>
                       <a:tailEnd type="none" w="med" len="med"/>
                     </a:lnR>
-                    <a:lnT w="38100" cap="flat" cmpd="sng" algn="ctr">
-                      <a:solidFill>
-                        <a:srgbClr val="FFFFFF"/>
+                    <a:lnT w="9525" cap="flat" cmpd="sng" algn="ctr">
+                      <a:solidFill>
+                        <a:srgbClr val="D9D9D9"/>
                       </a:solidFill>
                       <a:prstDash val="solid"/>
                       <a:round/>
                       <a:headEnd type="none" w="med" len="med"/>
                       <a:tailEnd type="none" w="med" len="med"/>
                     </a:lnT>
-                    <a:lnB w="38100" cap="flat" cmpd="sng" algn="ctr">
-                      <a:solidFill>
-                        <a:srgbClr val="FFFFFF"/>
+                    <a:lnB w="9525" cap="flat" cmpd="sng" algn="ctr">
+                      <a:solidFill>
+                        <a:srgbClr val="D9D9D9"/>
                       </a:solidFill>
                       <a:prstDash val="solid"/>
                       <a:round/>
@@ -4429,36 +4499,36 @@
                     </a:p>
                   </a:txBody>
                   <a:tcPr marL="91440" marR="91440" marT="45720" marB="45720" anchor="ctr">
-                    <a:lnL w="38100" cap="flat" cmpd="sng" algn="ctr">
-                      <a:solidFill>
-                        <a:srgbClr val="FFFFFF"/>
+                    <a:lnL w="9525" cap="flat" cmpd="sng" algn="ctr">
+                      <a:solidFill>
+                        <a:srgbClr val="D9D9D9"/>
                       </a:solidFill>
                       <a:prstDash val="solid"/>
                       <a:round/>
                       <a:headEnd type="none" w="med" len="med"/>
                       <a:tailEnd type="none" w="med" len="med"/>
                     </a:lnL>
-                    <a:lnR w="38100" cap="flat" cmpd="sng" algn="ctr">
-                      <a:solidFill>
-                        <a:srgbClr val="FFFFFF"/>
+                    <a:lnR w="9525" cap="flat" cmpd="sng" algn="ctr">
+                      <a:solidFill>
+                        <a:srgbClr val="D9D9D9"/>
                       </a:solidFill>
                       <a:prstDash val="solid"/>
                       <a:round/>
                       <a:headEnd type="none" w="med" len="med"/>
                       <a:tailEnd type="none" w="med" len="med"/>
                     </a:lnR>
-                    <a:lnT w="38100" cap="flat" cmpd="sng" algn="ctr">
-                      <a:solidFill>
-                        <a:srgbClr val="FFFFFF"/>
+                    <a:lnT w="9525" cap="flat" cmpd="sng" algn="ctr">
+                      <a:solidFill>
+                        <a:srgbClr val="D9D9D9"/>
                       </a:solidFill>
                       <a:prstDash val="solid"/>
                       <a:round/>
                       <a:headEnd type="none" w="med" len="med"/>
                       <a:tailEnd type="none" w="med" len="med"/>
                     </a:lnT>
-                    <a:lnB w="38100" cap="flat" cmpd="sng" algn="ctr">
-                      <a:solidFill>
-                        <a:srgbClr val="FFFFFF"/>
+                    <a:lnB w="9525" cap="flat" cmpd="sng" algn="ctr">
+                      <a:solidFill>
+                        <a:srgbClr val="D9D9D9"/>
                       </a:solidFill>
                       <a:prstDash val="solid"/>
                       <a:round/>
@@ -4497,36 +4567,36 @@
                     </a:p>
                   </a:txBody>
                   <a:tcPr marL="91440" marR="91440" marT="45720" marB="45720" anchor="ctr">
-                    <a:lnL w="38100" cap="flat" cmpd="sng" algn="ctr">
-                      <a:solidFill>
-                        <a:srgbClr val="FFFFFF"/>
+                    <a:lnL w="9525" cap="flat" cmpd="sng" algn="ctr">
+                      <a:solidFill>
+                        <a:srgbClr val="D9D9D9"/>
                       </a:solidFill>
                       <a:prstDash val="solid"/>
                       <a:round/>
                       <a:headEnd type="none" w="med" len="med"/>
                       <a:tailEnd type="none" w="med" len="med"/>
                     </a:lnL>
-                    <a:lnR w="38100" cap="flat" cmpd="sng" algn="ctr">
-                      <a:solidFill>
-                        <a:srgbClr val="FFFFFF"/>
+                    <a:lnR w="9525" cap="flat" cmpd="sng" algn="ctr">
+                      <a:solidFill>
+                        <a:srgbClr val="D9D9D9"/>
                       </a:solidFill>
                       <a:prstDash val="solid"/>
                       <a:round/>
                       <a:headEnd type="none" w="med" len="med"/>
                       <a:tailEnd type="none" w="med" len="med"/>
                     </a:lnR>
-                    <a:lnT w="38100" cap="flat" cmpd="sng" algn="ctr">
-                      <a:solidFill>
-                        <a:srgbClr val="FFFFFF"/>
+                    <a:lnT w="9525" cap="flat" cmpd="sng" algn="ctr">
+                      <a:solidFill>
+                        <a:srgbClr val="D9D9D9"/>
                       </a:solidFill>
                       <a:prstDash val="solid"/>
                       <a:round/>
                       <a:headEnd type="none" w="med" len="med"/>
                       <a:tailEnd type="none" w="med" len="med"/>
                     </a:lnT>
-                    <a:lnB w="38100" cap="flat" cmpd="sng" algn="ctr">
-                      <a:solidFill>
-                        <a:srgbClr val="FFFFFF"/>
+                    <a:lnB w="9525" cap="flat" cmpd="sng" algn="ctr">
+                      <a:solidFill>
+                        <a:srgbClr val="D9D9D9"/>
                       </a:solidFill>
                       <a:prstDash val="solid"/>
                       <a:round/>
@@ -4565,36 +4635,36 @@
                     </a:p>
                   </a:txBody>
                   <a:tcPr marL="91440" marR="91440" marT="45720" marB="45720" anchor="ctr">
-                    <a:lnL w="38100" cap="flat" cmpd="sng" algn="ctr">
-                      <a:solidFill>
-                        <a:srgbClr val="FFFFFF"/>
+                    <a:lnL w="9525" cap="flat" cmpd="sng" algn="ctr">
+                      <a:solidFill>
+                        <a:srgbClr val="D9D9D9"/>
                       </a:solidFill>
                       <a:prstDash val="solid"/>
                       <a:round/>
                       <a:headEnd type="none" w="med" len="med"/>
                       <a:tailEnd type="none" w="med" len="med"/>
                     </a:lnL>
-                    <a:lnR w="38100" cap="flat" cmpd="sng" algn="ctr">
-                      <a:solidFill>
-                        <a:srgbClr val="FFFFFF"/>
+                    <a:lnR w="9525" cap="flat" cmpd="sng" algn="ctr">
+                      <a:solidFill>
+                        <a:srgbClr val="D9D9D9"/>
                       </a:solidFill>
                       <a:prstDash val="solid"/>
                       <a:round/>
                       <a:headEnd type="none" w="med" len="med"/>
                       <a:tailEnd type="none" w="med" len="med"/>
                     </a:lnR>
-                    <a:lnT w="38100" cap="flat" cmpd="sng" algn="ctr">
-                      <a:solidFill>
-                        <a:srgbClr val="FFFFFF"/>
+                    <a:lnT w="9525" cap="flat" cmpd="sng" algn="ctr">
+                      <a:solidFill>
+                        <a:srgbClr val="D9D9D9"/>
                       </a:solidFill>
                       <a:prstDash val="solid"/>
                       <a:round/>
                       <a:headEnd type="none" w="med" len="med"/>
                       <a:tailEnd type="none" w="med" len="med"/>
                     </a:lnT>
-                    <a:lnB w="38100" cap="flat" cmpd="sng" algn="ctr">
-                      <a:solidFill>
-                        <a:srgbClr val="FFFFFF"/>
+                    <a:lnB w="9525" cap="flat" cmpd="sng" algn="ctr">
+                      <a:solidFill>
+                        <a:srgbClr val="D9D9D9"/>
                       </a:solidFill>
                       <a:prstDash val="solid"/>
                       <a:round/>
@@ -4607,7 +4677,7 @@
                   </a:tcPr>
                 </a:tc>
               </a:tr>
-              <a:tr h="685800">
+              <a:tr h="658368">
                 <a:tc rowSpan="2">
                   <a:txBody>
                     <a:bodyPr/>
@@ -4635,36 +4705,36 @@
                     </a:p>
                   </a:txBody>
                   <a:tcPr marL="76200" marR="127000" marT="50800" marB="50800" anchor="ctr">
-                    <a:lnL w="38100" cap="flat" cmpd="sng" algn="ctr">
-                      <a:solidFill>
-                        <a:srgbClr val="FFFFFF"/>
+                    <a:lnL w="9525" cap="flat" cmpd="sng" algn="ctr">
+                      <a:solidFill>
+                        <a:srgbClr val="D9D9D9"/>
                       </a:solidFill>
                       <a:prstDash val="solid"/>
                       <a:round/>
                       <a:headEnd type="none" w="med" len="med"/>
                       <a:tailEnd type="none" w="med" len="med"/>
                     </a:lnL>
-                    <a:lnR w="38100" cap="flat" cmpd="sng" algn="ctr">
-                      <a:solidFill>
-                        <a:srgbClr val="FFFFFF"/>
+                    <a:lnR w="9525" cap="flat" cmpd="sng" algn="ctr">
+                      <a:solidFill>
+                        <a:srgbClr val="D9D9D9"/>
                       </a:solidFill>
                       <a:prstDash val="solid"/>
                       <a:round/>
                       <a:headEnd type="none" w="med" len="med"/>
                       <a:tailEnd type="none" w="med" len="med"/>
                     </a:lnR>
-                    <a:lnT w="38100" cap="flat" cmpd="sng" algn="ctr">
-                      <a:solidFill>
-                        <a:srgbClr val="FFFFFF"/>
+                    <a:lnT w="9525" cap="flat" cmpd="sng" algn="ctr">
+                      <a:solidFill>
+                        <a:srgbClr val="D9D9D9"/>
                       </a:solidFill>
                       <a:prstDash val="solid"/>
                       <a:round/>
                       <a:headEnd type="none" w="med" len="med"/>
                       <a:tailEnd type="none" w="med" len="med"/>
                     </a:lnT>
-                    <a:lnB w="38100" cap="flat" cmpd="sng" algn="ctr">
-                      <a:solidFill>
-                        <a:srgbClr val="FFFFFF"/>
+                    <a:lnB w="9525" cap="flat" cmpd="sng" algn="ctr">
+                      <a:solidFill>
+                        <a:srgbClr val="D9D9D9"/>
                       </a:solidFill>
                       <a:prstDash val="solid"/>
                       <a:round/>
@@ -4705,7 +4775,7 @@
                   <a:tcPr marL="91440" marR="91440" marT="45720" marB="45720" anchor="ctr">
                     <a:lnL w="9525" cap="flat" cmpd="sng" algn="ctr">
                       <a:solidFill>
-                        <a:srgbClr val="E3E3E3"/>
+                        <a:srgbClr val="D9D9D9"/>
                       </a:solidFill>
                       <a:prstDash val="solid"/>
                       <a:round/>
@@ -4714,7 +4784,7 @@
                     </a:lnL>
                     <a:lnR w="9525" cap="flat" cmpd="sng" algn="ctr">
                       <a:solidFill>
-                        <a:srgbClr val="E3E3E3"/>
+                        <a:srgbClr val="D9D9D9"/>
                       </a:solidFill>
                       <a:prstDash val="solid"/>
                       <a:round/>
@@ -4723,7 +4793,7 @@
                     </a:lnR>
                     <a:lnT w="9525" cap="flat" cmpd="sng" algn="ctr">
                       <a:solidFill>
-                        <a:srgbClr val="E3E3E3"/>
+                        <a:srgbClr val="D9D9D9"/>
                       </a:solidFill>
                       <a:prstDash val="solid"/>
                       <a:round/>
@@ -4732,7 +4802,7 @@
                     </a:lnT>
                     <a:lnB w="9525" cap="flat" cmpd="sng" algn="ctr">
                       <a:solidFill>
-                        <a:srgbClr val="E3E3E3"/>
+                        <a:srgbClr val="D9D9D9"/>
                       </a:solidFill>
                       <a:prstDash val="solid"/>
                       <a:round/>
@@ -4767,13 +4837,6 @@
                         </a:rPr>
                         <a:t>Les </a:t>
                       </a:r>
-                      <a:pPr algn="just" marL="177800" indent="-177800">
-                        <a:spcAft>
-                          <a:spcPts val="400"/>
-                        </a:spcAft>
-                        <a:buSzPct val="100000"/>
-                        <a:buChar char="▪"/>
-                      </a:pPr>
                       <a:r>
                         <a:rPr lang="en-US" sz="1150" b="1" dirty="0">
                           <a:solidFill>
@@ -4785,13 +4848,6 @@
                         </a:rPr>
                         <a:t>18 cas d’étude fictifs</a:t>
                       </a:r>
-                      <a:pPr algn="just" marL="177800" indent="-177800">
-                        <a:spcAft>
-                          <a:spcPts val="400"/>
-                        </a:spcAft>
-                        <a:buSzPct val="100000"/>
-                        <a:buChar char="▪"/>
-                      </a:pPr>
                       <a:r>
                         <a:rPr lang="en-US" sz="1150" dirty="0">
                           <a:solidFill>
@@ -4810,10 +4866,10 @@
                       </a:endParaRPr>
                     </a:p>
                   </a:txBody>
-                  <a:tcPr marL="101600" marR="127000" marT="63500" marB="63500" anchor="ctr">
+                  <a:tcPr marL="91440" marR="91440" marT="45720" marB="45720" anchor="ctr">
                     <a:lnL w="9525" cap="flat" cmpd="sng" algn="ctr">
                       <a:solidFill>
-                        <a:srgbClr val="E3E3E3"/>
+                        <a:srgbClr val="D9D9D9"/>
                       </a:solidFill>
                       <a:prstDash val="solid"/>
                       <a:round/>
@@ -4822,7 +4878,7 @@
                     </a:lnL>
                     <a:lnR w="9525" cap="flat" cmpd="sng" algn="ctr">
                       <a:solidFill>
-                        <a:srgbClr val="E3E3E3"/>
+                        <a:srgbClr val="D9D9D9"/>
                       </a:solidFill>
                       <a:prstDash val="solid"/>
                       <a:round/>
@@ -4831,7 +4887,7 @@
                     </a:lnR>
                     <a:lnT w="9525" cap="flat" cmpd="sng" algn="ctr">
                       <a:solidFill>
-                        <a:srgbClr val="E3E3E3"/>
+                        <a:srgbClr val="D9D9D9"/>
                       </a:solidFill>
                       <a:prstDash val="solid"/>
                       <a:round/>
@@ -4840,7 +4896,7 @@
                     </a:lnT>
                     <a:lnB w="9525" cap="flat" cmpd="sng" algn="ctr">
                       <a:solidFill>
-                        <a:srgbClr val="E3E3E3"/>
+                        <a:srgbClr val="D9D9D9"/>
                       </a:solidFill>
                       <a:prstDash val="solid"/>
                       <a:round/>
@@ -4881,7 +4937,7 @@
                   <a:tcPr marL="91440" marR="91440" marT="45720" marB="45720" anchor="ctr">
                     <a:lnL w="9525" cap="flat" cmpd="sng" algn="ctr">
                       <a:solidFill>
-                        <a:srgbClr val="E3E3E3"/>
+                        <a:srgbClr val="D9D9D9"/>
                       </a:solidFill>
                       <a:prstDash val="solid"/>
                       <a:round/>
@@ -4890,7 +4946,7 @@
                     </a:lnL>
                     <a:lnR w="9525" cap="flat" cmpd="sng" algn="ctr">
                       <a:solidFill>
-                        <a:srgbClr val="E3E3E3"/>
+                        <a:srgbClr val="D9D9D9"/>
                       </a:solidFill>
                       <a:prstDash val="solid"/>
                       <a:round/>
@@ -4899,7 +4955,7 @@
                     </a:lnR>
                     <a:lnT w="9525" cap="flat" cmpd="sng" algn="ctr">
                       <a:solidFill>
-                        <a:srgbClr val="E3E3E3"/>
+                        <a:srgbClr val="D9D9D9"/>
                       </a:solidFill>
                       <a:prstDash val="solid"/>
                       <a:round/>
@@ -4908,7 +4964,7 @@
                     </a:lnT>
                     <a:lnB w="9525" cap="flat" cmpd="sng" algn="ctr">
                       <a:solidFill>
-                        <a:srgbClr val="E3E3E3"/>
+                        <a:srgbClr val="D9D9D9"/>
                       </a:solidFill>
                       <a:prstDash val="solid"/>
                       <a:round/>
@@ -4921,7 +4977,7 @@
                   </a:tcPr>
                 </a:tc>
               </a:tr>
-              <a:tr h="749808">
+              <a:tr h="658368">
                 <a:tc vMerge="1">
                   <a:tcPr/>
                 </a:tc>
@@ -4954,7 +5010,7 @@
                   <a:tcPr marL="91440" marR="91440" marT="45720" marB="45720" anchor="ctr">
                     <a:lnL w="9525" cap="flat" cmpd="sng" algn="ctr">
                       <a:solidFill>
-                        <a:srgbClr val="E3E3E3"/>
+                        <a:srgbClr val="D9D9D9"/>
                       </a:solidFill>
                       <a:prstDash val="solid"/>
                       <a:round/>
@@ -4963,7 +5019,7 @@
                     </a:lnL>
                     <a:lnR w="9525" cap="flat" cmpd="sng" algn="ctr">
                       <a:solidFill>
-                        <a:srgbClr val="E3E3E3"/>
+                        <a:srgbClr val="D9D9D9"/>
                       </a:solidFill>
                       <a:prstDash val="solid"/>
                       <a:round/>
@@ -4972,7 +5028,7 @@
                     </a:lnR>
                     <a:lnT w="9525" cap="flat" cmpd="sng" algn="ctr">
                       <a:solidFill>
-                        <a:srgbClr val="E3E3E3"/>
+                        <a:srgbClr val="D9D9D9"/>
                       </a:solidFill>
                       <a:prstDash val="solid"/>
                       <a:round/>
@@ -4981,7 +5037,7 @@
                     </a:lnT>
                     <a:lnB w="9525" cap="flat" cmpd="sng" algn="ctr">
                       <a:solidFill>
-                        <a:srgbClr val="E3E3E3"/>
+                        <a:srgbClr val="D9D9D9"/>
                       </a:solidFill>
                       <a:prstDash val="solid"/>
                       <a:round/>
@@ -5016,13 +5072,6 @@
                         </a:rPr>
                         <a:t>Il est proposé de </a:t>
                       </a:r>
-                      <a:pPr algn="just" marL="177800" indent="-177800">
-                        <a:spcAft>
-                          <a:spcPts val="400"/>
-                        </a:spcAft>
-                        <a:buSzPct val="100000"/>
-                        <a:buChar char="▪"/>
-                      </a:pPr>
                       <a:r>
                         <a:rPr lang="en-US" sz="1150" b="1" dirty="0">
                           <a:solidFill>
@@ -5034,13 +5083,6 @@
                         </a:rPr>
                         <a:t>supprimer les anciennes saisies de test, après archivage</a:t>
                       </a:r>
-                      <a:pPr algn="just" marL="177800" indent="-177800">
-                        <a:spcAft>
-                          <a:spcPts val="400"/>
-                        </a:spcAft>
-                        <a:buSzPct val="100000"/>
-                        <a:buChar char="▪"/>
-                      </a:pPr>
                       <a:r>
                         <a:rPr lang="en-US" sz="1150" dirty="0">
                           <a:solidFill>
@@ -5059,10 +5101,10 @@
                       </a:endParaRPr>
                     </a:p>
                   </a:txBody>
-                  <a:tcPr marL="101600" marR="127000" marT="63500" marB="63500" anchor="ctr">
+                  <a:tcPr marL="91440" marR="91440" marT="45720" marB="45720" anchor="ctr">
                     <a:lnL w="9525" cap="flat" cmpd="sng" algn="ctr">
                       <a:solidFill>
-                        <a:srgbClr val="E3E3E3"/>
+                        <a:srgbClr val="D9D9D9"/>
                       </a:solidFill>
                       <a:prstDash val="solid"/>
                       <a:round/>
@@ -5071,7 +5113,7 @@
                     </a:lnL>
                     <a:lnR w="9525" cap="flat" cmpd="sng" algn="ctr">
                       <a:solidFill>
-                        <a:srgbClr val="E3E3E3"/>
+                        <a:srgbClr val="D9D9D9"/>
                       </a:solidFill>
                       <a:prstDash val="solid"/>
                       <a:round/>
@@ -5080,7 +5122,7 @@
                     </a:lnR>
                     <a:lnT w="9525" cap="flat" cmpd="sng" algn="ctr">
                       <a:solidFill>
-                        <a:srgbClr val="E3E3E3"/>
+                        <a:srgbClr val="D9D9D9"/>
                       </a:solidFill>
                       <a:prstDash val="solid"/>
                       <a:round/>
@@ -5089,7 +5131,7 @@
                     </a:lnT>
                     <a:lnB w="9525" cap="flat" cmpd="sng" algn="ctr">
                       <a:solidFill>
-                        <a:srgbClr val="E3E3E3"/>
+                        <a:srgbClr val="D9D9D9"/>
                       </a:solidFill>
                       <a:prstDash val="solid"/>
                       <a:round/>
@@ -5130,7 +5172,7 @@
                   <a:tcPr marL="91440" marR="91440" marT="45720" marB="45720" anchor="ctr">
                     <a:lnL w="9525" cap="flat" cmpd="sng" algn="ctr">
                       <a:solidFill>
-                        <a:srgbClr val="E3E3E3"/>
+                        <a:srgbClr val="D9D9D9"/>
                       </a:solidFill>
                       <a:prstDash val="solid"/>
                       <a:round/>
@@ -5139,7 +5181,7 @@
                     </a:lnL>
                     <a:lnR w="9525" cap="flat" cmpd="sng" algn="ctr">
                       <a:solidFill>
-                        <a:srgbClr val="E3E3E3"/>
+                        <a:srgbClr val="D9D9D9"/>
                       </a:solidFill>
                       <a:prstDash val="solid"/>
                       <a:round/>
@@ -5148,7 +5190,7 @@
                     </a:lnR>
                     <a:lnT w="9525" cap="flat" cmpd="sng" algn="ctr">
                       <a:solidFill>
-                        <a:srgbClr val="E3E3E3"/>
+                        <a:srgbClr val="D9D9D9"/>
                       </a:solidFill>
                       <a:prstDash val="solid"/>
                       <a:round/>
@@ -5157,7 +5199,7 @@
                     </a:lnT>
                     <a:lnB w="9525" cap="flat" cmpd="sng" algn="ctr">
                       <a:solidFill>
-                        <a:srgbClr val="E3E3E3"/>
+                        <a:srgbClr val="D9D9D9"/>
                       </a:solidFill>
                       <a:prstDash val="solid"/>
                       <a:round/>
@@ -5170,8 +5212,8 @@
                   </a:tcPr>
                 </a:tc>
               </a:tr>
-              <a:tr h="685800">
-                <a:tc rowSpan="2">
+              <a:tr h="658368">
+                <a:tc rowSpan="3">
                   <a:txBody>
                     <a:bodyPr/>
                     <a:lstStyle/>
@@ -5198,36 +5240,36 @@
                     </a:p>
                   </a:txBody>
                   <a:tcPr marL="76200" marR="127000" marT="50800" marB="50800" anchor="ctr">
-                    <a:lnL w="38100" cap="flat" cmpd="sng" algn="ctr">
-                      <a:solidFill>
-                        <a:srgbClr val="FFFFFF"/>
+                    <a:lnL w="9525" cap="flat" cmpd="sng" algn="ctr">
+                      <a:solidFill>
+                        <a:srgbClr val="D9D9D9"/>
                       </a:solidFill>
                       <a:prstDash val="solid"/>
                       <a:round/>
                       <a:headEnd type="none" w="med" len="med"/>
                       <a:tailEnd type="none" w="med" len="med"/>
                     </a:lnL>
-                    <a:lnR w="38100" cap="flat" cmpd="sng" algn="ctr">
-                      <a:solidFill>
-                        <a:srgbClr val="FFFFFF"/>
+                    <a:lnR w="9525" cap="flat" cmpd="sng" algn="ctr">
+                      <a:solidFill>
+                        <a:srgbClr val="D9D9D9"/>
                       </a:solidFill>
                       <a:prstDash val="solid"/>
                       <a:round/>
                       <a:headEnd type="none" w="med" len="med"/>
                       <a:tailEnd type="none" w="med" len="med"/>
                     </a:lnR>
-                    <a:lnT w="38100" cap="flat" cmpd="sng" algn="ctr">
-                      <a:solidFill>
-                        <a:srgbClr val="FFFFFF"/>
+                    <a:lnT w="9525" cap="flat" cmpd="sng" algn="ctr">
+                      <a:solidFill>
+                        <a:srgbClr val="D9D9D9"/>
                       </a:solidFill>
                       <a:prstDash val="solid"/>
                       <a:round/>
                       <a:headEnd type="none" w="med" len="med"/>
                       <a:tailEnd type="none" w="med" len="med"/>
                     </a:lnT>
-                    <a:lnB w="38100" cap="flat" cmpd="sng" algn="ctr">
-                      <a:solidFill>
-                        <a:srgbClr val="FFFFFF"/>
+                    <a:lnB w="9525" cap="flat" cmpd="sng" algn="ctr">
+                      <a:solidFill>
+                        <a:srgbClr val="D9D9D9"/>
                       </a:solidFill>
                       <a:prstDash val="solid"/>
                       <a:round/>
@@ -5268,7 +5310,7 @@
                   <a:tcPr marL="91440" marR="91440" marT="45720" marB="45720" anchor="ctr">
                     <a:lnL w="9525" cap="flat" cmpd="sng" algn="ctr">
                       <a:solidFill>
-                        <a:srgbClr val="E3E3E3"/>
+                        <a:srgbClr val="D9D9D9"/>
                       </a:solidFill>
                       <a:prstDash val="solid"/>
                       <a:round/>
@@ -5277,7 +5319,7 @@
                     </a:lnL>
                     <a:lnR w="9525" cap="flat" cmpd="sng" algn="ctr">
                       <a:solidFill>
-                        <a:srgbClr val="E3E3E3"/>
+                        <a:srgbClr val="D9D9D9"/>
                       </a:solidFill>
                       <a:prstDash val="solid"/>
                       <a:round/>
@@ -5286,7 +5328,7 @@
                     </a:lnR>
                     <a:lnT w="9525" cap="flat" cmpd="sng" algn="ctr">
                       <a:solidFill>
-                        <a:srgbClr val="E3E3E3"/>
+                        <a:srgbClr val="D9D9D9"/>
                       </a:solidFill>
                       <a:prstDash val="solid"/>
                       <a:round/>
@@ -5295,7 +5337,7 @@
                     </a:lnT>
                     <a:lnB w="9525" cap="flat" cmpd="sng" algn="ctr">
                       <a:solidFill>
-                        <a:srgbClr val="E3E3E3"/>
+                        <a:srgbClr val="D9D9D9"/>
                       </a:solidFill>
                       <a:prstDash val="solid"/>
                       <a:round/>
@@ -5330,13 +5372,6 @@
                         </a:rPr>
                         <a:t>Un banc d’essai a validé l’import de bout en bout : </a:t>
                       </a:r>
-                      <a:pPr algn="just" marL="177800" indent="-177800">
-                        <a:spcAft>
-                          <a:spcPts val="400"/>
-                        </a:spcAft>
-                        <a:buSzPct val="100000"/>
-                        <a:buChar char="▪"/>
-                      </a:pPr>
                       <a:r>
                         <a:rPr lang="en-US" sz="1150" b="1" dirty="0">
                           <a:solidFill>
@@ -5348,13 +5383,6 @@
                         </a:rPr>
                         <a:t>note, verrous et plafonds conformes dans les 18 cas</a:t>
                       </a:r>
-                      <a:pPr algn="just" marL="177800" indent="-177800">
-                        <a:spcAft>
-                          <a:spcPts val="400"/>
-                        </a:spcAft>
-                        <a:buSzPct val="100000"/>
-                        <a:buChar char="▪"/>
-                      </a:pPr>
                       <a:r>
                         <a:rPr lang="en-US" sz="1150" dirty="0">
                           <a:solidFill>
@@ -5373,10 +5401,10 @@
                       </a:endParaRPr>
                     </a:p>
                   </a:txBody>
-                  <a:tcPr marL="101600" marR="127000" marT="63500" marB="63500" anchor="ctr">
+                  <a:tcPr marL="91440" marR="91440" marT="45720" marB="45720" anchor="ctr">
                     <a:lnL w="9525" cap="flat" cmpd="sng" algn="ctr">
                       <a:solidFill>
-                        <a:srgbClr val="E3E3E3"/>
+                        <a:srgbClr val="D9D9D9"/>
                       </a:solidFill>
                       <a:prstDash val="solid"/>
                       <a:round/>
@@ -5385,7 +5413,7 @@
                     </a:lnL>
                     <a:lnR w="9525" cap="flat" cmpd="sng" algn="ctr">
                       <a:solidFill>
-                        <a:srgbClr val="E3E3E3"/>
+                        <a:srgbClr val="D9D9D9"/>
                       </a:solidFill>
                       <a:prstDash val="solid"/>
                       <a:round/>
@@ -5394,7 +5422,7 @@
                     </a:lnR>
                     <a:lnT w="9525" cap="flat" cmpd="sng" algn="ctr">
                       <a:solidFill>
-                        <a:srgbClr val="E3E3E3"/>
+                        <a:srgbClr val="D9D9D9"/>
                       </a:solidFill>
                       <a:prstDash val="solid"/>
                       <a:round/>
@@ -5403,7 +5431,7 @@
                     </a:lnT>
                     <a:lnB w="9525" cap="flat" cmpd="sng" algn="ctr">
                       <a:solidFill>
-                        <a:srgbClr val="E3E3E3"/>
+                        <a:srgbClr val="D9D9D9"/>
                       </a:solidFill>
                       <a:prstDash val="solid"/>
                       <a:round/>
@@ -5444,7 +5472,7 @@
                   <a:tcPr marL="91440" marR="91440" marT="45720" marB="45720" anchor="ctr">
                     <a:lnL w="9525" cap="flat" cmpd="sng" algn="ctr">
                       <a:solidFill>
-                        <a:srgbClr val="E3E3E3"/>
+                        <a:srgbClr val="D9D9D9"/>
                       </a:solidFill>
                       <a:prstDash val="solid"/>
                       <a:round/>
@@ -5453,7 +5481,7 @@
                     </a:lnL>
                     <a:lnR w="9525" cap="flat" cmpd="sng" algn="ctr">
                       <a:solidFill>
-                        <a:srgbClr val="E3E3E3"/>
+                        <a:srgbClr val="D9D9D9"/>
                       </a:solidFill>
                       <a:prstDash val="solid"/>
                       <a:round/>
@@ -5462,7 +5490,7 @@
                     </a:lnR>
                     <a:lnT w="9525" cap="flat" cmpd="sng" algn="ctr">
                       <a:solidFill>
-                        <a:srgbClr val="E3E3E3"/>
+                        <a:srgbClr val="D9D9D9"/>
                       </a:solidFill>
                       <a:prstDash val="solid"/>
                       <a:round/>
@@ -5471,7 +5499,7 @@
                     </a:lnT>
                     <a:lnB w="9525" cap="flat" cmpd="sng" algn="ctr">
                       <a:solidFill>
-                        <a:srgbClr val="E3E3E3"/>
+                        <a:srgbClr val="D9D9D9"/>
                       </a:solidFill>
                       <a:prstDash val="solid"/>
                       <a:round/>
@@ -5484,7 +5512,7 @@
                   </a:tcPr>
                 </a:tc>
               </a:tr>
-              <a:tr h="749808">
+              <a:tr h="960120">
                 <a:tc vMerge="1">
                   <a:tcPr/>
                 </a:tc>
@@ -5505,7 +5533,7 @@
                           <a:ea typeface="Segoe UI" pitchFamily="34" charset="-122"/>
                           <a:cs typeface="Segoe UI" pitchFamily="34" charset="-120"/>
                         </a:rPr>
-                        <a:t>A.3</a:t>
+                        <a:t>I.6</a:t>
                       </a:r>
                       <a:endParaRPr lang="en-US" sz="1150" dirty="0">
                         <a:latin typeface="Segoe UI" charset="0"/>
@@ -5517,7 +5545,7 @@
                   <a:tcPr marL="91440" marR="91440" marT="45720" marB="45720" anchor="ctr">
                     <a:lnL w="9525" cap="flat" cmpd="sng" algn="ctr">
                       <a:solidFill>
-                        <a:srgbClr val="E3E3E3"/>
+                        <a:srgbClr val="D9D9D9"/>
                       </a:solidFill>
                       <a:prstDash val="solid"/>
                       <a:round/>
@@ -5526,7 +5554,7 @@
                     </a:lnL>
                     <a:lnR w="9525" cap="flat" cmpd="sng" algn="ctr">
                       <a:solidFill>
-                        <a:srgbClr val="E3E3E3"/>
+                        <a:srgbClr val="D9D9D9"/>
                       </a:solidFill>
                       <a:prstDash val="solid"/>
                       <a:round/>
@@ -5535,7 +5563,7 @@
                     </a:lnR>
                     <a:lnT w="9525" cap="flat" cmpd="sng" algn="ctr">
                       <a:solidFill>
-                        <a:srgbClr val="E3E3E3"/>
+                        <a:srgbClr val="D9D9D9"/>
                       </a:solidFill>
                       <a:prstDash val="solid"/>
                       <a:round/>
@@ -5544,7 +5572,7 @@
                     </a:lnT>
                     <a:lnB w="9525" cap="flat" cmpd="sng" algn="ctr">
                       <a:solidFill>
-                        <a:srgbClr val="E3E3E3"/>
+                        <a:srgbClr val="D9D9D9"/>
                       </a:solidFill>
                       <a:prstDash val="solid"/>
                       <a:round/>
@@ -5569,6 +5597,17 @@
                         <a:buChar char="▪"/>
                       </a:pPr>
                       <a:r>
+                        <a:rPr lang="en-US" sz="1150" b="1" dirty="0">
+                          <a:solidFill>
+                            <a:srgbClr val="333333"/>
+                          </a:solidFill>
+                          <a:latin typeface="Segoe UI" pitchFamily="34" charset="0"/>
+                          <a:ea typeface="Segoe UI" pitchFamily="34" charset="-122"/>
+                          <a:cs typeface="Segoe UI" pitchFamily="34" charset="-120"/>
+                        </a:rPr>
+                        <a:t>Origine des champs</a:t>
+                      </a:r>
+                      <a:r>
                         <a:rPr lang="en-US" sz="1150" dirty="0">
                           <a:solidFill>
                             <a:srgbClr val="333333"/>
@@ -5577,8 +5616,59 @@
                           <a:ea typeface="Segoe UI" pitchFamily="34" charset="-122"/>
                           <a:cs typeface="Segoe UI" pitchFamily="34" charset="-120"/>
                         </a:rPr>
-                        <a:t>Configurer le </a:t>
-                      </a:r>
+                        <a:t> : l’IA lit les pièces (PDF, scans, Word, Excel) et propose </a:t>
+                      </a:r>
+                      <a:r>
+                        <a:rPr lang="en-US" sz="1150" b="1" dirty="0">
+                          <a:solidFill>
+                            <a:srgbClr val="333333"/>
+                          </a:solidFill>
+                          <a:latin typeface="Segoe UI" pitchFamily="34" charset="0"/>
+                          <a:ea typeface="Segoe UI" pitchFamily="34" charset="-122"/>
+                          <a:cs typeface="Segoe UI" pitchFamily="34" charset="-120"/>
+                        </a:rPr>
+                        <a:t>plus de 300 champs</a:t>
+                      </a:r>
+                      <a:r>
+                        <a:rPr lang="en-US" sz="1150" dirty="0">
+                          <a:solidFill>
+                            <a:srgbClr val="333333"/>
+                          </a:solidFill>
+                          <a:latin typeface="Segoe UI" pitchFamily="34" charset="0"/>
+                          <a:ea typeface="Segoe UI" pitchFamily="34" charset="-122"/>
+                          <a:cs typeface="Segoe UI" pitchFamily="34" charset="-120"/>
+                        </a:rPr>
+                        <a:t> ; chaque valeur reprise affiche son origine sous le champ (</a:t>
+                      </a:r>
+                      <a:r>
+                        <a:rPr lang="en-US" sz="1150" b="1" dirty="0">
+                          <a:solidFill>
+                            <a:srgbClr val="333333"/>
+                          </a:solidFill>
+                          <a:latin typeface="Segoe UI" pitchFamily="34" charset="0"/>
+                          <a:ea typeface="Segoe UI" pitchFamily="34" charset="-122"/>
+                          <a:cs typeface="Segoe UI" pitchFamily="34" charset="-120"/>
+                        </a:rPr>
+                        <a:t>pièce, page, confiance</a:t>
+                      </a:r>
+                      <a:r>
+                        <a:rPr lang="en-US" sz="1150" dirty="0">
+                          <a:solidFill>
+                            <a:srgbClr val="333333"/>
+                          </a:solidFill>
+                          <a:latin typeface="Segoe UI" pitchFamily="34" charset="0"/>
+                          <a:ea typeface="Segoe UI" pitchFamily="34" charset="-122"/>
+                          <a:cs typeface="Segoe UI" pitchFamily="34" charset="-120"/>
+                        </a:rPr>
+                        <a:t>) et la valeur initiale reste lisible si l’analyste la modifie.</a:t>
+                      </a:r>
+                      <a:endParaRPr lang="en-US" sz="1150" dirty="0">
+                        <a:latin typeface="Segoe UI" charset="0"/>
+                        <a:ea typeface="Segoe UI" charset="0"/>
+                        <a:cs typeface="Segoe UI" charset="0"/>
+                      </a:endParaRPr>
+                    </a:p>
+                    <a:p>
                       <a:pPr algn="just" marL="177800" indent="-177800">
                         <a:spcAft>
                           <a:spcPts val="400"/>
@@ -5587,7 +5677,7 @@
                         <a:buChar char="▪"/>
                       </a:pPr>
                       <a:r>
-                        <a:rPr lang="en-US" sz="1150" b="1" dirty="0">
+                        <a:rPr lang="en-US" sz="1150" dirty="0">
                           <a:solidFill>
                             <a:srgbClr val="333333"/>
                           </a:solidFill>
@@ -5595,25 +5685,7 @@
                           <a:ea typeface="Segoe UI" pitchFamily="34" charset="-122"/>
                           <a:cs typeface="Segoe UI" pitchFamily="34" charset="-120"/>
                         </a:rPr>
-                        <a:t>stockage des pièces et la clé d’API de l’IA</a:t>
-                      </a:r>
-                      <a:pPr algn="just" marL="177800" indent="-177800">
-                        <a:spcAft>
-                          <a:spcPts val="400"/>
-                        </a:spcAft>
-                        <a:buSzPct val="100000"/>
-                        <a:buChar char="▪"/>
-                      </a:pPr>
-                      <a:r>
-                        <a:rPr lang="en-US" sz="1150" dirty="0">
-                          <a:solidFill>
-                            <a:srgbClr val="333333"/>
-                          </a:solidFill>
-                          <a:latin typeface="Segoe UI" pitchFamily="34" charset="0"/>
-                          <a:ea typeface="Segoe UI" pitchFamily="34" charset="-122"/>
-                          <a:cs typeface="Segoe UI" pitchFamily="34" charset="-120"/>
-                        </a:rPr>
-                        <a:t> sur l’hébergement, puis réaliser un essai avec le modèle réel sur deux cas.</a:t>
+                        <a:t>Les origines IA ne s’écrivent que côté serveur, à l’acceptation d’une proposition.</a:t>
                       </a:r>
                       <a:endParaRPr lang="en-US" sz="1150" dirty="0">
                         <a:latin typeface="Segoe UI" charset="0"/>
@@ -5622,10 +5694,10 @@
                       </a:endParaRPr>
                     </a:p>
                   </a:txBody>
-                  <a:tcPr marL="101600" marR="127000" marT="63500" marB="63500" anchor="ctr">
+                  <a:tcPr marL="91440" marR="91440" marT="45720" marB="45720" anchor="ctr">
                     <a:lnL w="9525" cap="flat" cmpd="sng" algn="ctr">
                       <a:solidFill>
-                        <a:srgbClr val="E3E3E3"/>
+                        <a:srgbClr val="D9D9D9"/>
                       </a:solidFill>
                       <a:prstDash val="solid"/>
                       <a:round/>
@@ -5634,7 +5706,7 @@
                     </a:lnL>
                     <a:lnR w="9525" cap="flat" cmpd="sng" algn="ctr">
                       <a:solidFill>
-                        <a:srgbClr val="E3E3E3"/>
+                        <a:srgbClr val="D9D9D9"/>
                       </a:solidFill>
                       <a:prstDash val="solid"/>
                       <a:round/>
@@ -5643,7 +5715,7 @@
                     </a:lnR>
                     <a:lnT w="9525" cap="flat" cmpd="sng" algn="ctr">
                       <a:solidFill>
-                        <a:srgbClr val="E3E3E3"/>
+                        <a:srgbClr val="D9D9D9"/>
                       </a:solidFill>
                       <a:prstDash val="solid"/>
                       <a:round/>
@@ -5652,7 +5724,7 @@
                     </a:lnT>
                     <a:lnB w="9525" cap="flat" cmpd="sng" algn="ctr">
                       <a:solidFill>
-                        <a:srgbClr val="E3E3E3"/>
+                        <a:srgbClr val="D9D9D9"/>
                       </a:solidFill>
                       <a:prstDash val="solid"/>
                       <a:round/>
@@ -5673,7 +5745,7 @@
                         <a:buNone/>
                       </a:pPr>
                       <a:r>
-                        <a:rPr lang="en-US" sz="1150" b="1" i="1" dirty="0">
+                        <a:rPr lang="en-US" sz="1150" i="1" dirty="0">
                           <a:solidFill>
                             <a:srgbClr val="404040"/>
                           </a:solidFill>
@@ -5681,7 +5753,7 @@
                           <a:ea typeface="Segoe UI" pitchFamily="34" charset="-122"/>
                           <a:cs typeface="Segoe UI" pitchFamily="34" charset="-120"/>
                         </a:rPr>
-                        <a:t>Équipe SI</a:t>
+                        <a:t>-</a:t>
                       </a:r>
                       <a:endParaRPr lang="en-US" sz="1150" dirty="0">
                         <a:latin typeface="Segoe UI" charset="0"/>
@@ -5693,7 +5765,7 @@
                   <a:tcPr marL="91440" marR="91440" marT="45720" marB="45720" anchor="ctr">
                     <a:lnL w="9525" cap="flat" cmpd="sng" algn="ctr">
                       <a:solidFill>
-                        <a:srgbClr val="E3E3E3"/>
+                        <a:srgbClr val="D9D9D9"/>
                       </a:solidFill>
                       <a:prstDash val="solid"/>
                       <a:round/>
@@ -5702,7 +5774,7 @@
                     </a:lnL>
                     <a:lnR w="9525" cap="flat" cmpd="sng" algn="ctr">
                       <a:solidFill>
-                        <a:srgbClr val="E3E3E3"/>
+                        <a:srgbClr val="D9D9D9"/>
                       </a:solidFill>
                       <a:prstDash val="solid"/>
                       <a:round/>
@@ -5711,7 +5783,7 @@
                     </a:lnR>
                     <a:lnT w="9525" cap="flat" cmpd="sng" algn="ctr">
                       <a:solidFill>
-                        <a:srgbClr val="E3E3E3"/>
+                        <a:srgbClr val="D9D9D9"/>
                       </a:solidFill>
                       <a:prstDash val="solid"/>
                       <a:round/>
@@ -5720,7 +5792,7 @@
                     </a:lnT>
                     <a:lnB w="9525" cap="flat" cmpd="sng" algn="ctr">
                       <a:solidFill>
-                        <a:srgbClr val="E3E3E3"/>
+                        <a:srgbClr val="D9D9D9"/>
                       </a:solidFill>
                       <a:prstDash val="solid"/>
                       <a:round/>
@@ -5733,74 +5805,9 @@
                   </a:tcPr>
                 </a:tc>
               </a:tr>
-              <a:tr h="1417320">
-                <a:tc>
-                  <a:txBody>
-                    <a:bodyPr/>
-                    <a:lstStyle/>
-                    <a:p>
-                      <a:pPr algn="r" indent="0" marL="0">
-                        <a:buNone/>
-                      </a:pPr>
-                      <a:r>
-                        <a:rPr lang="en-US" sz="1300" b="1" i="1" dirty="0">
-                          <a:solidFill>
-                            <a:srgbClr val="FFFFFF"/>
-                          </a:solidFill>
-                          <a:latin typeface="Segoe UI" pitchFamily="34" charset="0"/>
-                          <a:ea typeface="Segoe UI" pitchFamily="34" charset="-122"/>
-                          <a:cs typeface="Segoe UI" pitchFamily="34" charset="-120"/>
-                        </a:rPr>
-                        <a:t>Conduite de changement</a:t>
-                      </a:r>
-                      <a:endParaRPr lang="en-US" sz="1300" dirty="0">
-                        <a:latin typeface="Segoe UI" charset="0"/>
-                        <a:ea typeface="Segoe UI" charset="0"/>
-                        <a:cs typeface="Segoe UI" charset="0"/>
-                      </a:endParaRPr>
-                    </a:p>
-                  </a:txBody>
-                  <a:tcPr marL="76200" marR="127000" marT="50800" marB="50800" anchor="ctr">
-                    <a:lnL w="38100" cap="flat" cmpd="sng" algn="ctr">
-                      <a:solidFill>
-                        <a:srgbClr val="FFFFFF"/>
-                      </a:solidFill>
-                      <a:prstDash val="solid"/>
-                      <a:round/>
-                      <a:headEnd type="none" w="med" len="med"/>
-                      <a:tailEnd type="none" w="med" len="med"/>
-                    </a:lnL>
-                    <a:lnR w="38100" cap="flat" cmpd="sng" algn="ctr">
-                      <a:solidFill>
-                        <a:srgbClr val="FFFFFF"/>
-                      </a:solidFill>
-                      <a:prstDash val="solid"/>
-                      <a:round/>
-                      <a:headEnd type="none" w="med" len="med"/>
-                      <a:tailEnd type="none" w="med" len="med"/>
-                    </a:lnR>
-                    <a:lnT w="38100" cap="flat" cmpd="sng" algn="ctr">
-                      <a:solidFill>
-                        <a:srgbClr val="FFFFFF"/>
-                      </a:solidFill>
-                      <a:prstDash val="solid"/>
-                      <a:round/>
-                      <a:headEnd type="none" w="med" len="med"/>
-                      <a:tailEnd type="none" w="med" len="med"/>
-                    </a:lnT>
-                    <a:lnB w="38100" cap="flat" cmpd="sng" algn="ctr">
-                      <a:solidFill>
-                        <a:srgbClr val="FFFFFF"/>
-                      </a:solidFill>
-                      <a:prstDash val="solid"/>
-                      <a:round/>
-                      <a:headEnd type="none" w="med" len="med"/>
-                      <a:tailEnd type="none" w="med" len="med"/>
-                    </a:lnB>
-                    <a:solidFill>
-                      <a:srgbClr val="EFA54C"/>
-                    </a:solidFill>
-                  </a:tcPr>
+              <a:tr h="658368">
+                <a:tc vMerge="1">
+                  <a:tcPr/>
                 </a:tc>
                 <a:tc>
                   <a:txBody>
@@ -5819,7 +5826,7 @@
                           <a:ea typeface="Segoe UI" pitchFamily="34" charset="-122"/>
                           <a:cs typeface="Segoe UI" pitchFamily="34" charset="-120"/>
                         </a:rPr>
-                        <a:t>D.3</a:t>
+                        <a:t>A.3</a:t>
                       </a:r>
                       <a:endParaRPr lang="en-US" sz="1150" dirty="0">
                         <a:latin typeface="Segoe UI" charset="0"/>
@@ -5831,7 +5838,7 @@
                   <a:tcPr marL="91440" marR="91440" marT="45720" marB="45720" anchor="ctr">
                     <a:lnL w="9525" cap="flat" cmpd="sng" algn="ctr">
                       <a:solidFill>
-                        <a:srgbClr val="E3E3E3"/>
+                        <a:srgbClr val="D9D9D9"/>
                       </a:solidFill>
                       <a:prstDash val="solid"/>
                       <a:round/>
@@ -5840,7 +5847,7 @@
                     </a:lnL>
                     <a:lnR w="9525" cap="flat" cmpd="sng" algn="ctr">
                       <a:solidFill>
-                        <a:srgbClr val="E3E3E3"/>
+                        <a:srgbClr val="D9D9D9"/>
                       </a:solidFill>
                       <a:prstDash val="solid"/>
                       <a:round/>
@@ -5849,7 +5856,7 @@
                     </a:lnR>
                     <a:lnT w="9525" cap="flat" cmpd="sng" algn="ctr">
                       <a:solidFill>
-                        <a:srgbClr val="E3E3E3"/>
+                        <a:srgbClr val="D9D9D9"/>
                       </a:solidFill>
                       <a:prstDash val="solid"/>
                       <a:round/>
@@ -5858,7 +5865,7 @@
                     </a:lnT>
                     <a:lnB w="9525" cap="flat" cmpd="sng" algn="ctr">
                       <a:solidFill>
-                        <a:srgbClr val="E3E3E3"/>
+                        <a:srgbClr val="D9D9D9"/>
                       </a:solidFill>
                       <a:prstDash val="solid"/>
                       <a:round/>
@@ -5891,22 +5898,8 @@
                           <a:ea typeface="Segoe UI" pitchFamily="34" charset="-122"/>
                           <a:cs typeface="Segoe UI" pitchFamily="34" charset="-120"/>
                         </a:rPr>
-                        <a:t>Il est proposé de mener la conduite de changement en deux niveaux :</a:t>
-                      </a:r>
-                      <a:endParaRPr lang="en-US" sz="1150" dirty="0">
-                        <a:latin typeface="Segoe UI" charset="0"/>
-                        <a:ea typeface="Segoe UI" charset="0"/>
-                        <a:cs typeface="Segoe UI" charset="0"/>
-                      </a:endParaRPr>
-                    </a:p>
-                    <a:p>
-                      <a:pPr algn="just" marL="177800" indent="-177800">
-                        <a:spcAft>
-                          <a:spcPts val="400"/>
-                        </a:spcAft>
-                        <a:buSzPct val="100000"/>
-                        <a:buChar char="▪"/>
-                      </a:pPr>
+                        <a:t>Configurer le </a:t>
+                      </a:r>
                       <a:r>
                         <a:rPr lang="en-US" sz="1150" b="1" dirty="0">
                           <a:solidFill>
@@ -5916,15 +5909,8 @@
                           <a:ea typeface="Segoe UI" pitchFamily="34" charset="-122"/>
                           <a:cs typeface="Segoe UI" pitchFamily="34" charset="-120"/>
                         </a:rPr>
-                        <a:t>Niveau 1</a:t>
-                      </a:r>
-                      <a:pPr algn="just" marL="177800" indent="-177800">
-                        <a:spcAft>
-                          <a:spcPts val="400"/>
-                        </a:spcAft>
-                        <a:buSzPct val="100000"/>
-                        <a:buChar char="▪"/>
-                      </a:pPr>
+                        <a:t>stockage des pièces et la clé d’API de l’IA</a:t>
+                      </a:r>
                       <a:r>
                         <a:rPr lang="en-US" sz="1150" dirty="0">
                           <a:solidFill>
@@ -5934,50 +5920,7 @@
                           <a:ea typeface="Segoe UI" pitchFamily="34" charset="-122"/>
                           <a:cs typeface="Segoe UI" pitchFamily="34" charset="-120"/>
                         </a:rPr>
-                        <a:t> : revue du modèle par les experts (questionnaire, présentation et discours livrés), pour calibrer les paramètres.</a:t>
-                      </a:r>
-                      <a:endParaRPr lang="en-US" sz="1150" dirty="0">
-                        <a:latin typeface="Segoe UI" charset="0"/>
-                        <a:ea typeface="Segoe UI" charset="0"/>
-                        <a:cs typeface="Segoe UI" charset="0"/>
-                      </a:endParaRPr>
-                    </a:p>
-                    <a:p>
-                      <a:pPr algn="just" marL="177800" indent="-177800">
-                        <a:spcAft>
-                          <a:spcPts val="400"/>
-                        </a:spcAft>
-                        <a:buSzPct val="100000"/>
-                        <a:buChar char="▪"/>
-                      </a:pPr>
-                      <a:r>
-                        <a:rPr lang="en-US" sz="1150" b="1" dirty="0">
-                          <a:solidFill>
-                            <a:srgbClr val="333333"/>
-                          </a:solidFill>
-                          <a:latin typeface="Segoe UI" pitchFamily="34" charset="0"/>
-                          <a:ea typeface="Segoe UI" pitchFamily="34" charset="-122"/>
-                          <a:cs typeface="Segoe UI" pitchFamily="34" charset="-120"/>
-                        </a:rPr>
-                        <a:t>Niveau 2</a:t>
-                      </a:r>
-                      <a:pPr algn="just" marL="177800" indent="-177800">
-                        <a:spcAft>
-                          <a:spcPts val="400"/>
-                        </a:spcAft>
-                        <a:buSzPct val="100000"/>
-                        <a:buChar char="▪"/>
-                      </a:pPr>
-                      <a:r>
-                        <a:rPr lang="en-US" sz="1150" dirty="0">
-                          <a:solidFill>
-                            <a:srgbClr val="333333"/>
-                          </a:solidFill>
-                          <a:latin typeface="Segoe UI" pitchFamily="34" charset="0"/>
-                          <a:ea typeface="Segoe UI" pitchFamily="34" charset="-122"/>
-                          <a:cs typeface="Segoe UI" pitchFamily="34" charset="-120"/>
-                        </a:rPr>
-                        <a:t> : formation des chargés d’affaires à l’outil, après validation du modèle (guide de saisie et pièces fictives des 18 cas livrés).</a:t>
+                        <a:t> sur l’hébergement, puis réaliser un essai avec le modèle réel sur deux cas.</a:t>
                       </a:r>
                       <a:endParaRPr lang="en-US" sz="1150" dirty="0">
                         <a:latin typeface="Segoe UI" charset="0"/>
@@ -5986,10 +5929,10 @@
                       </a:endParaRPr>
                     </a:p>
                   </a:txBody>
-                  <a:tcPr marL="101600" marR="127000" marT="63500" marB="63500" anchor="ctr">
+                  <a:tcPr marL="91440" marR="91440" marT="45720" marB="45720" anchor="ctr">
                     <a:lnL w="9525" cap="flat" cmpd="sng" algn="ctr">
                       <a:solidFill>
-                        <a:srgbClr val="E3E3E3"/>
+                        <a:srgbClr val="D9D9D9"/>
                       </a:solidFill>
                       <a:prstDash val="solid"/>
                       <a:round/>
@@ -5998,7 +5941,7 @@
                     </a:lnL>
                     <a:lnR w="9525" cap="flat" cmpd="sng" algn="ctr">
                       <a:solidFill>
-                        <a:srgbClr val="E3E3E3"/>
+                        <a:srgbClr val="D9D9D9"/>
                       </a:solidFill>
                       <a:prstDash val="solid"/>
                       <a:round/>
@@ -6007,7 +5950,7 @@
                     </a:lnR>
                     <a:lnT w="9525" cap="flat" cmpd="sng" algn="ctr">
                       <a:solidFill>
-                        <a:srgbClr val="E3E3E3"/>
+                        <a:srgbClr val="D9D9D9"/>
                       </a:solidFill>
                       <a:prstDash val="solid"/>
                       <a:round/>
@@ -6016,7 +5959,7 @@
                     </a:lnT>
                     <a:lnB w="9525" cap="flat" cmpd="sng" algn="ctr">
                       <a:solidFill>
-                        <a:srgbClr val="E3E3E3"/>
+                        <a:srgbClr val="D9D9D9"/>
                       </a:solidFill>
                       <a:prstDash val="solid"/>
                       <a:round/>
@@ -6037,7 +5980,7 @@
                         <a:buNone/>
                       </a:pPr>
                       <a:r>
-                        <a:rPr lang="en-US" sz="1150" i="1" dirty="0">
+                        <a:rPr lang="en-US" sz="1150" b="1" i="1" dirty="0">
                           <a:solidFill>
                             <a:srgbClr val="404040"/>
                           </a:solidFill>
@@ -6045,7 +5988,7 @@
                           <a:ea typeface="Segoe UI" pitchFamily="34" charset="-122"/>
                           <a:cs typeface="Segoe UI" pitchFamily="34" charset="-120"/>
                         </a:rPr>
-                        <a:t>-</a:t>
+                        <a:t>Équipe SI</a:t>
                       </a:r>
                       <a:endParaRPr lang="en-US" sz="1150" dirty="0">
                         <a:latin typeface="Segoe UI" charset="0"/>
@@ -6057,7 +6000,7 @@
                   <a:tcPr marL="91440" marR="91440" marT="45720" marB="45720" anchor="ctr">
                     <a:lnL w="9525" cap="flat" cmpd="sng" algn="ctr">
                       <a:solidFill>
-                        <a:srgbClr val="E3E3E3"/>
+                        <a:srgbClr val="D9D9D9"/>
                       </a:solidFill>
                       <a:prstDash val="solid"/>
                       <a:round/>
@@ -6066,7 +6009,7 @@
                     </a:lnL>
                     <a:lnR w="9525" cap="flat" cmpd="sng" algn="ctr">
                       <a:solidFill>
-                        <a:srgbClr val="E3E3E3"/>
+                        <a:srgbClr val="D9D9D9"/>
                       </a:solidFill>
                       <a:prstDash val="solid"/>
                       <a:round/>
@@ -6075,7 +6018,7 @@
                     </a:lnR>
                     <a:lnT w="9525" cap="flat" cmpd="sng" algn="ctr">
                       <a:solidFill>
-                        <a:srgbClr val="E3E3E3"/>
+                        <a:srgbClr val="D9D9D9"/>
                       </a:solidFill>
                       <a:prstDash val="solid"/>
                       <a:round/>
@@ -6084,7 +6027,7 @@
                     </a:lnT>
                     <a:lnB w="9525" cap="flat" cmpd="sng" algn="ctr">
                       <a:solidFill>
-                        <a:srgbClr val="E3E3E3"/>
+                        <a:srgbClr val="D9D9D9"/>
                       </a:solidFill>
                       <a:prstDash val="solid"/>
                       <a:round/>
@@ -6097,8 +6040,8 @@
                   </a:tcPr>
                 </a:tc>
               </a:tr>
-              <a:tr h="731520">
-                <a:tc>
+              <a:tr h="960120">
+                <a:tc rowSpan="2">
                   <a:txBody>
                     <a:bodyPr/>
                     <a:lstStyle/>
@@ -6115,7 +6058,7 @@
                           <a:ea typeface="Segoe UI" pitchFamily="34" charset="-122"/>
                           <a:cs typeface="Segoe UI" pitchFamily="34" charset="-120"/>
                         </a:rPr>
-                        <a:t>Pilotage transverse</a:t>
+                        <a:t>Stress test</a:t>
                       </a:r>
                       <a:endParaRPr lang="en-US" sz="1300" dirty="0">
                         <a:latin typeface="Segoe UI" charset="0"/>
@@ -6125,36 +6068,36 @@
                     </a:p>
                   </a:txBody>
                   <a:tcPr marL="76200" marR="127000" marT="50800" marB="50800" anchor="ctr">
-                    <a:lnL w="38100" cap="flat" cmpd="sng" algn="ctr">
-                      <a:solidFill>
-                        <a:srgbClr val="FFFFFF"/>
+                    <a:lnL w="9525" cap="flat" cmpd="sng" algn="ctr">
+                      <a:solidFill>
+                        <a:srgbClr val="D9D9D9"/>
                       </a:solidFill>
                       <a:prstDash val="solid"/>
                       <a:round/>
                       <a:headEnd type="none" w="med" len="med"/>
                       <a:tailEnd type="none" w="med" len="med"/>
                     </a:lnL>
-                    <a:lnR w="38100" cap="flat" cmpd="sng" algn="ctr">
-                      <a:solidFill>
-                        <a:srgbClr val="FFFFFF"/>
+                    <a:lnR w="9525" cap="flat" cmpd="sng" algn="ctr">
+                      <a:solidFill>
+                        <a:srgbClr val="D9D9D9"/>
                       </a:solidFill>
                       <a:prstDash val="solid"/>
                       <a:round/>
                       <a:headEnd type="none" w="med" len="med"/>
                       <a:tailEnd type="none" w="med" len="med"/>
                     </a:lnR>
-                    <a:lnT w="38100" cap="flat" cmpd="sng" algn="ctr">
-                      <a:solidFill>
-                        <a:srgbClr val="FFFFFF"/>
+                    <a:lnT w="9525" cap="flat" cmpd="sng" algn="ctr">
+                      <a:solidFill>
+                        <a:srgbClr val="D9D9D9"/>
                       </a:solidFill>
                       <a:prstDash val="solid"/>
                       <a:round/>
                       <a:headEnd type="none" w="med" len="med"/>
                       <a:tailEnd type="none" w="med" len="med"/>
                     </a:lnT>
-                    <a:lnB w="38100" cap="flat" cmpd="sng" algn="ctr">
-                      <a:solidFill>
-                        <a:srgbClr val="FFFFFF"/>
+                    <a:lnB w="9525" cap="flat" cmpd="sng" algn="ctr">
+                      <a:solidFill>
+                        <a:srgbClr val="D9D9D9"/>
                       </a:solidFill>
                       <a:prstDash val="solid"/>
                       <a:round/>
@@ -6183,7 +6126,7 @@
                           <a:ea typeface="Segoe UI" pitchFamily="34" charset="-122"/>
                           <a:cs typeface="Segoe UI" pitchFamily="34" charset="-120"/>
                         </a:rPr>
-                        <a:t>A.4</a:t>
+                        <a:t>I.7</a:t>
                       </a:r>
                       <a:endParaRPr lang="en-US" sz="1150" dirty="0">
                         <a:latin typeface="Segoe UI" charset="0"/>
@@ -6195,7 +6138,7 @@
                   <a:tcPr marL="91440" marR="91440" marT="45720" marB="45720" anchor="ctr">
                     <a:lnL w="9525" cap="flat" cmpd="sng" algn="ctr">
                       <a:solidFill>
-                        <a:srgbClr val="E3E3E3"/>
+                        <a:srgbClr val="D9D9D9"/>
                       </a:solidFill>
                       <a:prstDash val="solid"/>
                       <a:round/>
@@ -6204,7 +6147,7 @@
                     </a:lnL>
                     <a:lnR w="9525" cap="flat" cmpd="sng" algn="ctr">
                       <a:solidFill>
-                        <a:srgbClr val="E3E3E3"/>
+                        <a:srgbClr val="D9D9D9"/>
                       </a:solidFill>
                       <a:prstDash val="solid"/>
                       <a:round/>
@@ -6213,7 +6156,7 @@
                     </a:lnR>
                     <a:lnT w="9525" cap="flat" cmpd="sng" algn="ctr">
                       <a:solidFill>
-                        <a:srgbClr val="E3E3E3"/>
+                        <a:srgbClr val="D9D9D9"/>
                       </a:solidFill>
                       <a:prstDash val="solid"/>
                       <a:round/>
@@ -6222,7 +6165,7 @@
                     </a:lnT>
                     <a:lnB w="9525" cap="flat" cmpd="sng" algn="ctr">
                       <a:solidFill>
-                        <a:srgbClr val="E3E3E3"/>
+                        <a:srgbClr val="D9D9D9"/>
                       </a:solidFill>
                       <a:prstDash val="solid"/>
                       <a:round/>
@@ -6247,6 +6190,17 @@
                         <a:buChar char="▪"/>
                       </a:pPr>
                       <a:r>
+                        <a:rPr lang="en-US" sz="1150" b="1" dirty="0">
+                          <a:solidFill>
+                            <a:srgbClr val="333333"/>
+                          </a:solidFill>
+                          <a:latin typeface="Segoe UI" pitchFamily="34" charset="0"/>
+                          <a:ea typeface="Segoe UI" pitchFamily="34" charset="-122"/>
+                          <a:cs typeface="Segoe UI" pitchFamily="34" charset="-120"/>
+                        </a:rPr>
+                        <a:t>Bibliothèque de scénarios défavorables de référence</a:t>
+                      </a:r>
+                      <a:r>
                         <a:rPr lang="en-US" sz="1150" dirty="0">
                           <a:solidFill>
                             <a:srgbClr val="333333"/>
@@ -6255,8 +6209,15 @@
                           <a:ea typeface="Segoe UI" pitchFamily="34" charset="-122"/>
                           <a:cs typeface="Segoe UI" pitchFamily="34" charset="-120"/>
                         </a:rPr>
-                        <a:t>Planifier un </a:t>
-                      </a:r>
+                        <a:t> pour les 12 secteurs (risque principal, baisse des recettes, hausse des charges, source), proposée au bloc 6.</a:t>
+                      </a:r>
+                      <a:endParaRPr lang="en-US" sz="1150" dirty="0">
+                        <a:latin typeface="Segoe UI" charset="0"/>
+                        <a:ea typeface="Segoe UI" charset="0"/>
+                        <a:cs typeface="Segoe UI" charset="0"/>
+                      </a:endParaRPr>
+                    </a:p>
+                    <a:p>
                       <a:pPr algn="just" marL="177800" indent="-177800">
                         <a:spcAft>
                           <a:spcPts val="400"/>
@@ -6273,15 +6234,8 @@
                           <a:ea typeface="Segoe UI" pitchFamily="34" charset="-122"/>
                           <a:cs typeface="Segoe UI" pitchFamily="34" charset="-120"/>
                         </a:rPr>
-                        <a:t>Comité de validation du modèle</a:t>
-                      </a:r>
-                      <a:pPr algn="just" marL="177800" indent="-177800">
-                        <a:spcAft>
-                          <a:spcPts val="400"/>
-                        </a:spcAft>
-                        <a:buSzPct val="100000"/>
-                        <a:buChar char="▪"/>
-                      </a:pPr>
+                        <a:t>Calcul du choc</a:t>
+                      </a:r>
                       <a:r>
                         <a:rPr lang="en-US" sz="1150" dirty="0">
                           <a:solidFill>
@@ -6291,7 +6245,7 @@
                           <a:ea typeface="Segoe UI" pitchFamily="34" charset="-122"/>
                           <a:cs typeface="Segoe UI" pitchFamily="34" charset="-120"/>
                         </a:rPr>
-                        <a:t> pour approuver les paramètres, puis un Comité de pilotage auprès de la Direction générale pour restituer les réalisations.</a:t>
+                        <a:t> : (recettes perdues + charges supplémentaires) ÷ CFADS central ; DSCR stressé = DSCR central × (1 − choc). Ex. : choc 14 %, DSCR 1,29 → 1,11.</a:t>
                       </a:r>
                       <a:endParaRPr lang="en-US" sz="1150" dirty="0">
                         <a:latin typeface="Segoe UI" charset="0"/>
@@ -6300,10 +6254,10 @@
                       </a:endParaRPr>
                     </a:p>
                   </a:txBody>
-                  <a:tcPr marL="101600" marR="127000" marT="63500" marB="63500" anchor="ctr">
+                  <a:tcPr marL="91440" marR="91440" marT="45720" marB="45720" anchor="ctr">
                     <a:lnL w="9525" cap="flat" cmpd="sng" algn="ctr">
                       <a:solidFill>
-                        <a:srgbClr val="E3E3E3"/>
+                        <a:srgbClr val="D9D9D9"/>
                       </a:solidFill>
                       <a:prstDash val="solid"/>
                       <a:round/>
@@ -6312,7 +6266,7 @@
                     </a:lnL>
                     <a:lnR w="9525" cap="flat" cmpd="sng" algn="ctr">
                       <a:solidFill>
-                        <a:srgbClr val="E3E3E3"/>
+                        <a:srgbClr val="D9D9D9"/>
                       </a:solidFill>
                       <a:prstDash val="solid"/>
                       <a:round/>
@@ -6321,7 +6275,7 @@
                     </a:lnR>
                     <a:lnT w="9525" cap="flat" cmpd="sng" algn="ctr">
                       <a:solidFill>
-                        <a:srgbClr val="E3E3E3"/>
+                        <a:srgbClr val="D9D9D9"/>
                       </a:solidFill>
                       <a:prstDash val="solid"/>
                       <a:round/>
@@ -6330,7 +6284,7 @@
                     </a:lnT>
                     <a:lnB w="9525" cap="flat" cmpd="sng" algn="ctr">
                       <a:solidFill>
-                        <a:srgbClr val="E3E3E3"/>
+                        <a:srgbClr val="D9D9D9"/>
                       </a:solidFill>
                       <a:prstDash val="solid"/>
                       <a:round/>
@@ -6351,7 +6305,7 @@
                         <a:buNone/>
                       </a:pPr>
                       <a:r>
-                        <a:rPr lang="en-US" sz="1150" b="1" i="1" dirty="0">
+                        <a:rPr lang="en-US" sz="1150" i="1" dirty="0">
                           <a:solidFill>
                             <a:srgbClr val="404040"/>
                           </a:solidFill>
@@ -6359,7 +6313,7 @@
                           <a:ea typeface="Segoe UI" pitchFamily="34" charset="-122"/>
                           <a:cs typeface="Segoe UI" pitchFamily="34" charset="-120"/>
                         </a:rPr>
-                        <a:t>Risques Groupe</a:t>
+                        <a:t>-</a:t>
                       </a:r>
                       <a:endParaRPr lang="en-US" sz="1150" dirty="0">
                         <a:latin typeface="Segoe UI" charset="0"/>
@@ -6371,7 +6325,7 @@
                   <a:tcPr marL="91440" marR="91440" marT="45720" marB="45720" anchor="ctr">
                     <a:lnL w="9525" cap="flat" cmpd="sng" algn="ctr">
                       <a:solidFill>
-                        <a:srgbClr val="E3E3E3"/>
+                        <a:srgbClr val="D9D9D9"/>
                       </a:solidFill>
                       <a:prstDash val="solid"/>
                       <a:round/>
@@ -6380,7 +6334,7 @@
                     </a:lnL>
                     <a:lnR w="9525" cap="flat" cmpd="sng" algn="ctr">
                       <a:solidFill>
-                        <a:srgbClr val="E3E3E3"/>
+                        <a:srgbClr val="D9D9D9"/>
                       </a:solidFill>
                       <a:prstDash val="solid"/>
                       <a:round/>
@@ -6389,7 +6343,7 @@
                     </a:lnR>
                     <a:lnT w="9525" cap="flat" cmpd="sng" algn="ctr">
                       <a:solidFill>
-                        <a:srgbClr val="E3E3E3"/>
+                        <a:srgbClr val="D9D9D9"/>
                       </a:solidFill>
                       <a:prstDash val="solid"/>
                       <a:round/>
@@ -6398,7 +6352,242 @@
                     </a:lnT>
                     <a:lnB w="9525" cap="flat" cmpd="sng" algn="ctr">
                       <a:solidFill>
-                        <a:srgbClr val="E3E3E3"/>
+                        <a:srgbClr val="D9D9D9"/>
+                      </a:solidFill>
+                      <a:prstDash val="solid"/>
+                      <a:round/>
+                      <a:headEnd type="none" w="med" len="med"/>
+                      <a:tailEnd type="none" w="med" len="med"/>
+                    </a:lnB>
+                    <a:solidFill>
+                      <a:srgbClr val="FFFFFF"/>
+                    </a:solidFill>
+                  </a:tcPr>
+                </a:tc>
+              </a:tr>
+              <a:tr h="658368">
+                <a:tc vMerge="1">
+                  <a:tcPr/>
+                </a:tc>
+                <a:tc>
+                  <a:txBody>
+                    <a:bodyPr/>
+                    <a:lstStyle/>
+                    <a:p>
+                      <a:pPr algn="ctr" indent="0" marL="0">
+                        <a:buNone/>
+                      </a:pPr>
+                      <a:r>
+                        <a:rPr lang="en-US" sz="1150" b="1" i="1" dirty="0">
+                          <a:solidFill>
+                            <a:srgbClr val="404040"/>
+                          </a:solidFill>
+                          <a:latin typeface="Segoe UI" pitchFamily="34" charset="0"/>
+                          <a:ea typeface="Segoe UI" pitchFamily="34" charset="-122"/>
+                          <a:cs typeface="Segoe UI" pitchFamily="34" charset="-120"/>
+                        </a:rPr>
+                        <a:t>D.3</a:t>
+                      </a:r>
+                      <a:endParaRPr lang="en-US" sz="1150" dirty="0">
+                        <a:latin typeface="Segoe UI" charset="0"/>
+                        <a:ea typeface="Segoe UI" charset="0"/>
+                        <a:cs typeface="Segoe UI" charset="0"/>
+                      </a:endParaRPr>
+                    </a:p>
+                  </a:txBody>
+                  <a:tcPr marL="91440" marR="91440" marT="45720" marB="45720" anchor="ctr">
+                    <a:lnL w="9525" cap="flat" cmpd="sng" algn="ctr">
+                      <a:solidFill>
+                        <a:srgbClr val="D9D9D9"/>
+                      </a:solidFill>
+                      <a:prstDash val="solid"/>
+                      <a:round/>
+                      <a:headEnd type="none" w="med" len="med"/>
+                      <a:tailEnd type="none" w="med" len="med"/>
+                    </a:lnL>
+                    <a:lnR w="9525" cap="flat" cmpd="sng" algn="ctr">
+                      <a:solidFill>
+                        <a:srgbClr val="D9D9D9"/>
+                      </a:solidFill>
+                      <a:prstDash val="solid"/>
+                      <a:round/>
+                      <a:headEnd type="none" w="med" len="med"/>
+                      <a:tailEnd type="none" w="med" len="med"/>
+                    </a:lnR>
+                    <a:lnT w="9525" cap="flat" cmpd="sng" algn="ctr">
+                      <a:solidFill>
+                        <a:srgbClr val="D9D9D9"/>
+                      </a:solidFill>
+                      <a:prstDash val="solid"/>
+                      <a:round/>
+                      <a:headEnd type="none" w="med" len="med"/>
+                      <a:tailEnd type="none" w="med" len="med"/>
+                    </a:lnT>
+                    <a:lnB w="9525" cap="flat" cmpd="sng" algn="ctr">
+                      <a:solidFill>
+                        <a:srgbClr val="D9D9D9"/>
+                      </a:solidFill>
+                      <a:prstDash val="solid"/>
+                      <a:round/>
+                      <a:headEnd type="none" w="med" len="med"/>
+                      <a:tailEnd type="none" w="med" len="med"/>
+                    </a:lnB>
+                    <a:solidFill>
+                      <a:srgbClr val="FFFFFF"/>
+                    </a:solidFill>
+                  </a:tcPr>
+                </a:tc>
+                <a:tc>
+                  <a:txBody>
+                    <a:bodyPr/>
+                    <a:lstStyle/>
+                    <a:p>
+                      <a:pPr algn="just" marL="177800" indent="-177800">
+                        <a:spcAft>
+                          <a:spcPts val="400"/>
+                        </a:spcAft>
+                        <a:buSzPct val="100000"/>
+                        <a:buChar char="▪"/>
+                      </a:pPr>
+                      <a:r>
+                        <a:rPr lang="en-US" sz="1150" dirty="0">
+                          <a:solidFill>
+                            <a:srgbClr val="333333"/>
+                          </a:solidFill>
+                          <a:latin typeface="Segoe UI" pitchFamily="34" charset="0"/>
+                          <a:ea typeface="Segoe UI" pitchFamily="34" charset="-122"/>
+                          <a:cs typeface="Segoe UI" pitchFamily="34" charset="-120"/>
+                        </a:rPr>
+                        <a:t>Il est proposé de </a:t>
+                      </a:r>
+                      <a:r>
+                        <a:rPr lang="en-US" sz="1150" b="1" dirty="0">
+                          <a:solidFill>
+                            <a:srgbClr val="333333"/>
+                          </a:solidFill>
+                          <a:latin typeface="Segoe UI" pitchFamily="34" charset="0"/>
+                          <a:ea typeface="Segoe UI" pitchFamily="34" charset="-122"/>
+                          <a:cs typeface="Segoe UI" pitchFamily="34" charset="-120"/>
+                        </a:rPr>
+                        <a:t>faire valider les scénarios de référence par secteur</a:t>
+                      </a:r>
+                      <a:r>
+                        <a:rPr lang="en-US" sz="1150" dirty="0">
+                          <a:solidFill>
+                            <a:srgbClr val="333333"/>
+                          </a:solidFill>
+                          <a:latin typeface="Segoe UI" pitchFamily="34" charset="0"/>
+                          <a:ea typeface="Segoe UI" pitchFamily="34" charset="-122"/>
+                          <a:cs typeface="Segoe UI" pitchFamily="34" charset="-120"/>
+                        </a:rPr>
+                        <a:t> par le Comité de validation du modèle, après avis des experts.</a:t>
+                      </a:r>
+                      <a:endParaRPr lang="en-US" sz="1150" dirty="0">
+                        <a:latin typeface="Segoe UI" charset="0"/>
+                        <a:ea typeface="Segoe UI" charset="0"/>
+                        <a:cs typeface="Segoe UI" charset="0"/>
+                      </a:endParaRPr>
+                    </a:p>
+                  </a:txBody>
+                  <a:tcPr marL="91440" marR="91440" marT="45720" marB="45720" anchor="ctr">
+                    <a:lnL w="9525" cap="flat" cmpd="sng" algn="ctr">
+                      <a:solidFill>
+                        <a:srgbClr val="D9D9D9"/>
+                      </a:solidFill>
+                      <a:prstDash val="solid"/>
+                      <a:round/>
+                      <a:headEnd type="none" w="med" len="med"/>
+                      <a:tailEnd type="none" w="med" len="med"/>
+                    </a:lnL>
+                    <a:lnR w="9525" cap="flat" cmpd="sng" algn="ctr">
+                      <a:solidFill>
+                        <a:srgbClr val="D9D9D9"/>
+                      </a:solidFill>
+                      <a:prstDash val="solid"/>
+                      <a:round/>
+                      <a:headEnd type="none" w="med" len="med"/>
+                      <a:tailEnd type="none" w="med" len="med"/>
+                    </a:lnR>
+                    <a:lnT w="9525" cap="flat" cmpd="sng" algn="ctr">
+                      <a:solidFill>
+                        <a:srgbClr val="D9D9D9"/>
+                      </a:solidFill>
+                      <a:prstDash val="solid"/>
+                      <a:round/>
+                      <a:headEnd type="none" w="med" len="med"/>
+                      <a:tailEnd type="none" w="med" len="med"/>
+                    </a:lnT>
+                    <a:lnB w="9525" cap="flat" cmpd="sng" algn="ctr">
+                      <a:solidFill>
+                        <a:srgbClr val="D9D9D9"/>
+                      </a:solidFill>
+                      <a:prstDash val="solid"/>
+                      <a:round/>
+                      <a:headEnd type="none" w="med" len="med"/>
+                      <a:tailEnd type="none" w="med" len="med"/>
+                    </a:lnB>
+                    <a:solidFill>
+                      <a:srgbClr val="FFFFFF"/>
+                    </a:solidFill>
+                  </a:tcPr>
+                </a:tc>
+                <a:tc>
+                  <a:txBody>
+                    <a:bodyPr/>
+                    <a:lstStyle/>
+                    <a:p>
+                      <a:pPr algn="ctr" indent="0" marL="0">
+                        <a:buNone/>
+                      </a:pPr>
+                      <a:r>
+                        <a:rPr lang="en-US" sz="1150" b="1" i="1" dirty="0">
+                          <a:solidFill>
+                            <a:srgbClr val="404040"/>
+                          </a:solidFill>
+                          <a:latin typeface="Segoe UI" pitchFamily="34" charset="0"/>
+                          <a:ea typeface="Segoe UI" pitchFamily="34" charset="-122"/>
+                          <a:cs typeface="Segoe UI" pitchFamily="34" charset="-120"/>
+                        </a:rPr>
+                        <a:t>Risques Groupe</a:t>
+                      </a:r>
+                      <a:endParaRPr lang="en-US" sz="1150" dirty="0">
+                        <a:latin typeface="Segoe UI" charset="0"/>
+                        <a:ea typeface="Segoe UI" charset="0"/>
+                        <a:cs typeface="Segoe UI" charset="0"/>
+                      </a:endParaRPr>
+                    </a:p>
+                  </a:txBody>
+                  <a:tcPr marL="91440" marR="91440" marT="45720" marB="45720" anchor="ctr">
+                    <a:lnL w="9525" cap="flat" cmpd="sng" algn="ctr">
+                      <a:solidFill>
+                        <a:srgbClr val="D9D9D9"/>
+                      </a:solidFill>
+                      <a:prstDash val="solid"/>
+                      <a:round/>
+                      <a:headEnd type="none" w="med" len="med"/>
+                      <a:tailEnd type="none" w="med" len="med"/>
+                    </a:lnL>
+                    <a:lnR w="9525" cap="flat" cmpd="sng" algn="ctr">
+                      <a:solidFill>
+                        <a:srgbClr val="D9D9D9"/>
+                      </a:solidFill>
+                      <a:prstDash val="solid"/>
+                      <a:round/>
+                      <a:headEnd type="none" w="med" len="med"/>
+                      <a:tailEnd type="none" w="med" len="med"/>
+                    </a:lnR>
+                    <a:lnT w="9525" cap="flat" cmpd="sng" algn="ctr">
+                      <a:solidFill>
+                        <a:srgbClr val="D9D9D9"/>
+                      </a:solidFill>
+                      <a:prstDash val="solid"/>
+                      <a:round/>
+                      <a:headEnd type="none" w="med" len="med"/>
+                      <a:tailEnd type="none" w="med" len="med"/>
+                    </a:lnT>
+                    <a:lnB w="9525" cap="flat" cmpd="sng" algn="ctr">
+                      <a:solidFill>
+                        <a:srgbClr val="D9D9D9"/>
                       </a:solidFill>
                       <a:prstDash val="solid"/>
                       <a:round/>
@@ -6447,6 +6636,9 @@
                 <a:solidFill>
                   <a:srgbClr val="7A7A7A"/>
                 </a:solidFill>
+                <a:latin typeface="Segoe UI"/>
+                <a:ea typeface="Segoe UI"/>
+                <a:cs typeface="Segoe UI"/>
               </a:defRPr>
             </a:lvl1pPr>
           </a:lstStyle>
@@ -6468,48 +6660,2431 @@
 </p:sld>
 </file>
 
+<file path=ppt/slides/slide4.xml><?xml version="1.0" encoding="utf-8"?>
+<p:sld xmlns:a="http://schemas.openxmlformats.org/drawingml/2006/main" xmlns:r="http://schemas.openxmlformats.org/officeDocument/2006/relationships" xmlns:p="http://schemas.openxmlformats.org/presentationml/2006/main">
+  <p:cSld name="Slide 4">
+    <p:spTree>
+      <p:nvGrpSpPr>
+        <p:cNvPr id="1" name=""/>
+        <p:cNvGrpSpPr/>
+        <p:nvPr/>
+      </p:nvGrpSpPr>
+      <p:grpSpPr>
+        <a:xfrm>
+          <a:off x="0" y="0"/>
+          <a:ext cx="0" cy="0"/>
+          <a:chOff x="0" y="0"/>
+          <a:chExt cx="0" cy="0"/>
+        </a:xfrm>
+      </p:grpSpPr>
+      <p:sp>
+        <p:nvSpPr>
+          <p:cNvPr id="2" name="Text 0"/>
+          <p:cNvSpPr/>
+          <p:nvPr>
+            <p:ph idx="100" type="title" hasCustomPrompt="1"/>
+          </p:nvPr>
+        </p:nvSpPr>
+        <p:spPr>
+          <a:xfrm>
+            <a:off x="228600" y="109728"/>
+            <a:ext cx="11704320" cy="457200"/>
+          </a:xfrm>
+          <a:prstGeom prst="rect">
+            <a:avLst/>
+          </a:prstGeom>
+          <a:noFill/>
+          <a:ln/>
+        </p:spPr>
+        <p:txBody>
+          <a:bodyPr wrap="square" lIns="0" tIns="0" rIns="0" bIns="0" rtlCol="0" anchor="ctr"/>
+          <a:lstStyle/>
+          <a:p>
+            <a:pPr algn="l" indent="0" marL="0">
+              <a:buNone/>
+            </a:pPr>
+            <a:r>
+              <a:rPr lang="en-US" sz="1800" b="1" dirty="0">
+                <a:solidFill>
+                  <a:srgbClr val="E8790F"/>
+                </a:solidFill>
+                <a:latin typeface="Segoe UI" pitchFamily="34" charset="0"/>
+                <a:ea typeface="Segoe UI" pitchFamily="34" charset="-122"/>
+                <a:cs typeface="Segoe UI" pitchFamily="34" charset="-120"/>
+              </a:rPr>
+              <a:t>Relevé d’informations, de décisions et d’actions (3/3)</a:t>
+            </a:r>
+            <a:endParaRPr lang="en-US" sz="1800" dirty="0"/>
+          </a:p>
+        </p:txBody>
+      </p:sp>
+      <p:graphicFrame>
+        <p:nvGraphicFramePr>
+          <p:cNvPr id="5" name="Table 0"/>
+          <p:cNvGraphicFramePr>
+            <a:graphicFrameLocks noGrp="1"/>
+          </p:cNvGraphicFramePr>
+          <p:nvPr>
+            <p:extLst>
+              <p:ext uri="{D42A27DB-BD31-4B8C-83A1-F6EECF244321}">
+                <p14:modId xmlns:p14="http://schemas.microsoft.com/office/powerpoint/2010/main" val="1579011935"/>
+              </p:ext>
+            </p:extLst>
+          </p:nvPr>
+        </p:nvGraphicFramePr>
+        <p:xfrm>
+          <a:off x="201168" y="658368"/>
+          <a:ext cx="11750040" cy="914400"/>
+        </p:xfrm>
+        <a:graphic>
+          <a:graphicData uri="http://schemas.openxmlformats.org/drawingml/2006/table">
+            <a:tbl>
+              <a:tblPr/>
+              <a:tblGrid>
+                <a:gridCol w="1828800"/>
+                <a:gridCol w="658368"/>
+                <a:gridCol w="7863840"/>
+                <a:gridCol w="1399032"/>
+              </a:tblGrid>
+              <a:tr h="329184">
+                <a:tc>
+                  <a:txBody>
+                    <a:bodyPr/>
+                    <a:lstStyle/>
+                    <a:p>
+                      <a:pPr algn="ctr" indent="0" marL="0">
+                        <a:buNone/>
+                      </a:pPr>
+                      <a:r>
+                        <a:rPr lang="en-US" sz="1100" b="1" i="1" dirty="0">
+                          <a:solidFill>
+                            <a:srgbClr val="404040"/>
+                          </a:solidFill>
+                          <a:latin typeface="Segoe UI" pitchFamily="34" charset="0"/>
+                          <a:ea typeface="Segoe UI" pitchFamily="34" charset="-122"/>
+                          <a:cs typeface="Segoe UI" pitchFamily="34" charset="-120"/>
+                        </a:rPr>
+                        <a:t>Thématique</a:t>
+                      </a:r>
+                      <a:endParaRPr lang="en-US" sz="1100" dirty="0">
+                        <a:latin typeface="Segoe UI" charset="0"/>
+                        <a:ea typeface="Segoe UI" charset="0"/>
+                        <a:cs typeface="Segoe UI" charset="0"/>
+                      </a:endParaRPr>
+                    </a:p>
+                  </a:txBody>
+                  <a:tcPr marL="91440" marR="91440" marT="45720" marB="45720" anchor="ctr">
+                    <a:lnL w="9525" cap="flat" cmpd="sng" algn="ctr">
+                      <a:solidFill>
+                        <a:srgbClr val="D9D9D9"/>
+                      </a:solidFill>
+                      <a:prstDash val="solid"/>
+                      <a:round/>
+                      <a:headEnd type="none" w="med" len="med"/>
+                      <a:tailEnd type="none" w="med" len="med"/>
+                    </a:lnL>
+                    <a:lnR w="9525" cap="flat" cmpd="sng" algn="ctr">
+                      <a:solidFill>
+                        <a:srgbClr val="D9D9D9"/>
+                      </a:solidFill>
+                      <a:prstDash val="solid"/>
+                      <a:round/>
+                      <a:headEnd type="none" w="med" len="med"/>
+                      <a:tailEnd type="none" w="med" len="med"/>
+                    </a:lnR>
+                    <a:lnT w="9525" cap="flat" cmpd="sng" algn="ctr">
+                      <a:solidFill>
+                        <a:srgbClr val="D9D9D9"/>
+                      </a:solidFill>
+                      <a:prstDash val="solid"/>
+                      <a:round/>
+                      <a:headEnd type="none" w="med" len="med"/>
+                      <a:tailEnd type="none" w="med" len="med"/>
+                    </a:lnT>
+                    <a:lnB w="9525" cap="flat" cmpd="sng" algn="ctr">
+                      <a:solidFill>
+                        <a:srgbClr val="D9D9D9"/>
+                      </a:solidFill>
+                      <a:prstDash val="solid"/>
+                      <a:round/>
+                      <a:headEnd type="none" w="med" len="med"/>
+                      <a:tailEnd type="none" w="med" len="med"/>
+                    </a:lnB>
+                    <a:solidFill>
+                      <a:srgbClr val="EFEFEF"/>
+                    </a:solidFill>
+                  </a:tcPr>
+                </a:tc>
+                <a:tc>
+                  <a:txBody>
+                    <a:bodyPr/>
+                    <a:lstStyle/>
+                    <a:p>
+                      <a:pPr algn="ctr" indent="0" marL="0">
+                        <a:buNone/>
+                      </a:pPr>
+                      <a:r>
+                        <a:rPr lang="en-US" sz="1100" b="1" i="1" dirty="0">
+                          <a:solidFill>
+                            <a:srgbClr val="404040"/>
+                          </a:solidFill>
+                          <a:latin typeface="Segoe UI" pitchFamily="34" charset="0"/>
+                          <a:ea typeface="Segoe UI" pitchFamily="34" charset="-122"/>
+                          <a:cs typeface="Segoe UI" pitchFamily="34" charset="-120"/>
+                        </a:rPr>
+                        <a:t>Réf.</a:t>
+                      </a:r>
+                      <a:endParaRPr lang="en-US" sz="1100" dirty="0">
+                        <a:latin typeface="Segoe UI" charset="0"/>
+                        <a:ea typeface="Segoe UI" charset="0"/>
+                        <a:cs typeface="Segoe UI" charset="0"/>
+                      </a:endParaRPr>
+                    </a:p>
+                  </a:txBody>
+                  <a:tcPr marL="91440" marR="91440" marT="45720" marB="45720" anchor="ctr">
+                    <a:lnL w="9525" cap="flat" cmpd="sng" algn="ctr">
+                      <a:solidFill>
+                        <a:srgbClr val="D9D9D9"/>
+                      </a:solidFill>
+                      <a:prstDash val="solid"/>
+                      <a:round/>
+                      <a:headEnd type="none" w="med" len="med"/>
+                      <a:tailEnd type="none" w="med" len="med"/>
+                    </a:lnL>
+                    <a:lnR w="9525" cap="flat" cmpd="sng" algn="ctr">
+                      <a:solidFill>
+                        <a:srgbClr val="D9D9D9"/>
+                      </a:solidFill>
+                      <a:prstDash val="solid"/>
+                      <a:round/>
+                      <a:headEnd type="none" w="med" len="med"/>
+                      <a:tailEnd type="none" w="med" len="med"/>
+                    </a:lnR>
+                    <a:lnT w="9525" cap="flat" cmpd="sng" algn="ctr">
+                      <a:solidFill>
+                        <a:srgbClr val="D9D9D9"/>
+                      </a:solidFill>
+                      <a:prstDash val="solid"/>
+                      <a:round/>
+                      <a:headEnd type="none" w="med" len="med"/>
+                      <a:tailEnd type="none" w="med" len="med"/>
+                    </a:lnT>
+                    <a:lnB w="9525" cap="flat" cmpd="sng" algn="ctr">
+                      <a:solidFill>
+                        <a:srgbClr val="D9D9D9"/>
+                      </a:solidFill>
+                      <a:prstDash val="solid"/>
+                      <a:round/>
+                      <a:headEnd type="none" w="med" len="med"/>
+                      <a:tailEnd type="none" w="med" len="med"/>
+                    </a:lnB>
+                    <a:solidFill>
+                      <a:srgbClr val="EFEFEF"/>
+                    </a:solidFill>
+                  </a:tcPr>
+                </a:tc>
+                <a:tc>
+                  <a:txBody>
+                    <a:bodyPr/>
+                    <a:lstStyle/>
+                    <a:p>
+                      <a:pPr algn="ctr" indent="0" marL="0">
+                        <a:buNone/>
+                      </a:pPr>
+                      <a:r>
+                        <a:rPr lang="en-US" sz="1100" b="1" i="1" dirty="0">
+                          <a:solidFill>
+                            <a:srgbClr val="404040"/>
+                          </a:solidFill>
+                          <a:latin typeface="Segoe UI" pitchFamily="34" charset="0"/>
+                          <a:ea typeface="Segoe UI" pitchFamily="34" charset="-122"/>
+                          <a:cs typeface="Segoe UI" pitchFamily="34" charset="-120"/>
+                        </a:rPr>
+                        <a:t>Information (I) / Actions (A) / Décision (D)</a:t>
+                      </a:r>
+                      <a:endParaRPr lang="en-US" sz="1100" dirty="0">
+                        <a:latin typeface="Segoe UI" charset="0"/>
+                        <a:ea typeface="Segoe UI" charset="0"/>
+                        <a:cs typeface="Segoe UI" charset="0"/>
+                      </a:endParaRPr>
+                    </a:p>
+                  </a:txBody>
+                  <a:tcPr marL="91440" marR="91440" marT="45720" marB="45720" anchor="ctr">
+                    <a:lnL w="9525" cap="flat" cmpd="sng" algn="ctr">
+                      <a:solidFill>
+                        <a:srgbClr val="D9D9D9"/>
+                      </a:solidFill>
+                      <a:prstDash val="solid"/>
+                      <a:round/>
+                      <a:headEnd type="none" w="med" len="med"/>
+                      <a:tailEnd type="none" w="med" len="med"/>
+                    </a:lnL>
+                    <a:lnR w="9525" cap="flat" cmpd="sng" algn="ctr">
+                      <a:solidFill>
+                        <a:srgbClr val="D9D9D9"/>
+                      </a:solidFill>
+                      <a:prstDash val="solid"/>
+                      <a:round/>
+                      <a:headEnd type="none" w="med" len="med"/>
+                      <a:tailEnd type="none" w="med" len="med"/>
+                    </a:lnR>
+                    <a:lnT w="9525" cap="flat" cmpd="sng" algn="ctr">
+                      <a:solidFill>
+                        <a:srgbClr val="D9D9D9"/>
+                      </a:solidFill>
+                      <a:prstDash val="solid"/>
+                      <a:round/>
+                      <a:headEnd type="none" w="med" len="med"/>
+                      <a:tailEnd type="none" w="med" len="med"/>
+                    </a:lnT>
+                    <a:lnB w="9525" cap="flat" cmpd="sng" algn="ctr">
+                      <a:solidFill>
+                        <a:srgbClr val="D9D9D9"/>
+                      </a:solidFill>
+                      <a:prstDash val="solid"/>
+                      <a:round/>
+                      <a:headEnd type="none" w="med" len="med"/>
+                      <a:tailEnd type="none" w="med" len="med"/>
+                    </a:lnB>
+                    <a:solidFill>
+                      <a:srgbClr val="EFEFEF"/>
+                    </a:solidFill>
+                  </a:tcPr>
+                </a:tc>
+                <a:tc>
+                  <a:txBody>
+                    <a:bodyPr/>
+                    <a:lstStyle/>
+                    <a:p>
+                      <a:pPr algn="ctr" indent="0" marL="0">
+                        <a:buNone/>
+                      </a:pPr>
+                      <a:r>
+                        <a:rPr lang="en-US" sz="1100" b="1" i="1" dirty="0">
+                          <a:solidFill>
+                            <a:srgbClr val="404040"/>
+                          </a:solidFill>
+                          <a:latin typeface="Segoe UI" pitchFamily="34" charset="0"/>
+                          <a:ea typeface="Segoe UI" pitchFamily="34" charset="-122"/>
+                          <a:cs typeface="Segoe UI" pitchFamily="34" charset="-120"/>
+                        </a:rPr>
+                        <a:t>Responsable</a:t>
+                      </a:r>
+                      <a:endParaRPr lang="en-US" sz="1100" dirty="0">
+                        <a:latin typeface="Segoe UI" charset="0"/>
+                        <a:ea typeface="Segoe UI" charset="0"/>
+                        <a:cs typeface="Segoe UI" charset="0"/>
+                      </a:endParaRPr>
+                    </a:p>
+                  </a:txBody>
+                  <a:tcPr marL="91440" marR="91440" marT="45720" marB="45720" anchor="ctr">
+                    <a:lnL w="9525" cap="flat" cmpd="sng" algn="ctr">
+                      <a:solidFill>
+                        <a:srgbClr val="D9D9D9"/>
+                      </a:solidFill>
+                      <a:prstDash val="solid"/>
+                      <a:round/>
+                      <a:headEnd type="none" w="med" len="med"/>
+                      <a:tailEnd type="none" w="med" len="med"/>
+                    </a:lnL>
+                    <a:lnR w="9525" cap="flat" cmpd="sng" algn="ctr">
+                      <a:solidFill>
+                        <a:srgbClr val="D9D9D9"/>
+                      </a:solidFill>
+                      <a:prstDash val="solid"/>
+                      <a:round/>
+                      <a:headEnd type="none" w="med" len="med"/>
+                      <a:tailEnd type="none" w="med" len="med"/>
+                    </a:lnR>
+                    <a:lnT w="9525" cap="flat" cmpd="sng" algn="ctr">
+                      <a:solidFill>
+                        <a:srgbClr val="D9D9D9"/>
+                      </a:solidFill>
+                      <a:prstDash val="solid"/>
+                      <a:round/>
+                      <a:headEnd type="none" w="med" len="med"/>
+                      <a:tailEnd type="none" w="med" len="med"/>
+                    </a:lnT>
+                    <a:lnB w="9525" cap="flat" cmpd="sng" algn="ctr">
+                      <a:solidFill>
+                        <a:srgbClr val="D9D9D9"/>
+                      </a:solidFill>
+                      <a:prstDash val="solid"/>
+                      <a:round/>
+                      <a:headEnd type="none" w="med" len="med"/>
+                      <a:tailEnd type="none" w="med" len="med"/>
+                    </a:lnB>
+                    <a:solidFill>
+                      <a:srgbClr val="EFEFEF"/>
+                    </a:solidFill>
+                  </a:tcPr>
+                </a:tc>
+              </a:tr>
+              <a:tr h="658368">
+                <a:tc rowSpan="3">
+                  <a:txBody>
+                    <a:bodyPr/>
+                    <a:lstStyle/>
+                    <a:p>
+                      <a:pPr algn="r" indent="0" marL="0">
+                        <a:buNone/>
+                      </a:pPr>
+                      <a:r>
+                        <a:rPr lang="en-US" sz="1300" b="1" i="1" dirty="0">
+                          <a:solidFill>
+                            <a:srgbClr val="FFFFFF"/>
+                          </a:solidFill>
+                          <a:latin typeface="Segoe UI" pitchFamily="34" charset="0"/>
+                          <a:ea typeface="Segoe UI" pitchFamily="34" charset="-122"/>
+                          <a:cs typeface="Segoe UI" pitchFamily="34" charset="-120"/>
+                        </a:rPr>
+                        <a:t>Volet climatique</a:t>
+                      </a:r>
+                      <a:endParaRPr lang="en-US" sz="1300" dirty="0">
+                        <a:latin typeface="Segoe UI" charset="0"/>
+                        <a:ea typeface="Segoe UI" charset="0"/>
+                        <a:cs typeface="Segoe UI" charset="0"/>
+                      </a:endParaRPr>
+                    </a:p>
+                  </a:txBody>
+                  <a:tcPr marL="76200" marR="127000" marT="50800" marB="50800" anchor="ctr">
+                    <a:lnL w="9525" cap="flat" cmpd="sng" algn="ctr">
+                      <a:solidFill>
+                        <a:srgbClr val="D9D9D9"/>
+                      </a:solidFill>
+                      <a:prstDash val="solid"/>
+                      <a:round/>
+                      <a:headEnd type="none" w="med" len="med"/>
+                      <a:tailEnd type="none" w="med" len="med"/>
+                    </a:lnL>
+                    <a:lnR w="9525" cap="flat" cmpd="sng" algn="ctr">
+                      <a:solidFill>
+                        <a:srgbClr val="D9D9D9"/>
+                      </a:solidFill>
+                      <a:prstDash val="solid"/>
+                      <a:round/>
+                      <a:headEnd type="none" w="med" len="med"/>
+                      <a:tailEnd type="none" w="med" len="med"/>
+                    </a:lnR>
+                    <a:lnT w="9525" cap="flat" cmpd="sng" algn="ctr">
+                      <a:solidFill>
+                        <a:srgbClr val="D9D9D9"/>
+                      </a:solidFill>
+                      <a:prstDash val="solid"/>
+                      <a:round/>
+                      <a:headEnd type="none" w="med" len="med"/>
+                      <a:tailEnd type="none" w="med" len="med"/>
+                    </a:lnT>
+                    <a:lnB w="9525" cap="flat" cmpd="sng" algn="ctr">
+                      <a:solidFill>
+                        <a:srgbClr val="D9D9D9"/>
+                      </a:solidFill>
+                      <a:prstDash val="solid"/>
+                      <a:round/>
+                      <a:headEnd type="none" w="med" len="med"/>
+                      <a:tailEnd type="none" w="med" len="med"/>
+                    </a:lnB>
+                    <a:solidFill>
+                      <a:srgbClr val="EFA54C"/>
+                    </a:solidFill>
+                  </a:tcPr>
+                </a:tc>
+                <a:tc>
+                  <a:txBody>
+                    <a:bodyPr/>
+                    <a:lstStyle/>
+                    <a:p>
+                      <a:pPr algn="ctr" indent="0" marL="0">
+                        <a:buNone/>
+                      </a:pPr>
+                      <a:r>
+                        <a:rPr lang="en-US" sz="1150" b="1" i="1" dirty="0">
+                          <a:solidFill>
+                            <a:srgbClr val="404040"/>
+                          </a:solidFill>
+                          <a:latin typeface="Segoe UI" pitchFamily="34" charset="0"/>
+                          <a:ea typeface="Segoe UI" pitchFamily="34" charset="-122"/>
+                          <a:cs typeface="Segoe UI" pitchFamily="34" charset="-120"/>
+                        </a:rPr>
+                        <a:t>I.8</a:t>
+                      </a:r>
+                      <a:endParaRPr lang="en-US" sz="1150" dirty="0">
+                        <a:latin typeface="Segoe UI" charset="0"/>
+                        <a:ea typeface="Segoe UI" charset="0"/>
+                        <a:cs typeface="Segoe UI" charset="0"/>
+                      </a:endParaRPr>
+                    </a:p>
+                  </a:txBody>
+                  <a:tcPr marL="91440" marR="91440" marT="45720" marB="45720" anchor="ctr">
+                    <a:lnL w="9525" cap="flat" cmpd="sng" algn="ctr">
+                      <a:solidFill>
+                        <a:srgbClr val="D9D9D9"/>
+                      </a:solidFill>
+                      <a:prstDash val="solid"/>
+                      <a:round/>
+                      <a:headEnd type="none" w="med" len="med"/>
+                      <a:tailEnd type="none" w="med" len="med"/>
+                    </a:lnL>
+                    <a:lnR w="9525" cap="flat" cmpd="sng" algn="ctr">
+                      <a:solidFill>
+                        <a:srgbClr val="D9D9D9"/>
+                      </a:solidFill>
+                      <a:prstDash val="solid"/>
+                      <a:round/>
+                      <a:headEnd type="none" w="med" len="med"/>
+                      <a:tailEnd type="none" w="med" len="med"/>
+                    </a:lnR>
+                    <a:lnT w="9525" cap="flat" cmpd="sng" algn="ctr">
+                      <a:solidFill>
+                        <a:srgbClr val="D9D9D9"/>
+                      </a:solidFill>
+                      <a:prstDash val="solid"/>
+                      <a:round/>
+                      <a:headEnd type="none" w="med" len="med"/>
+                      <a:tailEnd type="none" w="med" len="med"/>
+                    </a:lnT>
+                    <a:lnB w="9525" cap="flat" cmpd="sng" algn="ctr">
+                      <a:solidFill>
+                        <a:srgbClr val="D9D9D9"/>
+                      </a:solidFill>
+                      <a:prstDash val="solid"/>
+                      <a:round/>
+                      <a:headEnd type="none" w="med" len="med"/>
+                      <a:tailEnd type="none" w="med" len="med"/>
+                    </a:lnB>
+                    <a:solidFill>
+                      <a:srgbClr val="FFFFFF"/>
+                    </a:solidFill>
+                  </a:tcPr>
+                </a:tc>
+                <a:tc>
+                  <a:txBody>
+                    <a:bodyPr/>
+                    <a:lstStyle/>
+                    <a:p>
+                      <a:pPr algn="just" marL="177800" indent="-177800">
+                        <a:spcAft>
+                          <a:spcPts val="400"/>
+                        </a:spcAft>
+                        <a:buSzPct val="100000"/>
+                        <a:buChar char="▪"/>
+                      </a:pPr>
+                      <a:r>
+                        <a:rPr lang="en-US" sz="1150" b="1" dirty="0">
+                          <a:solidFill>
+                            <a:srgbClr val="333333"/>
+                          </a:solidFill>
+                          <a:latin typeface="Segoe UI" pitchFamily="34" charset="0"/>
+                          <a:ea typeface="Segoe UI" pitchFamily="34" charset="-122"/>
+                          <a:cs typeface="Segoe UI" pitchFamily="34" charset="-120"/>
+                        </a:rPr>
+                        <a:t>Lot 1 en service, sans effet sur la note</a:t>
+                      </a:r>
+                      <a:r>
+                        <a:rPr lang="en-US" sz="1150" dirty="0">
+                          <a:solidFill>
+                            <a:srgbClr val="333333"/>
+                          </a:solidFill>
+                          <a:latin typeface="Segoe UI" pitchFamily="34" charset="0"/>
+                          <a:ea typeface="Segoe UI" pitchFamily="34" charset="-122"/>
+                          <a:cs typeface="Segoe UI" pitchFamily="34" charset="-120"/>
+                        </a:rPr>
+                        <a:t> : fiche climat (6 aléas présélectionnés par secteur ; transition : émissions, MACF, actif fossile, plan de transition ; scénario climatique ; fiche directive BAM 2/W/2025).</a:t>
+                      </a:r>
+                      <a:endParaRPr lang="en-US" sz="1150" dirty="0">
+                        <a:latin typeface="Segoe UI" charset="0"/>
+                        <a:ea typeface="Segoe UI" charset="0"/>
+                        <a:cs typeface="Segoe UI" charset="0"/>
+                      </a:endParaRPr>
+                    </a:p>
+                  </a:txBody>
+                  <a:tcPr marL="91440" marR="91440" marT="45720" marB="45720" anchor="ctr">
+                    <a:lnL w="9525" cap="flat" cmpd="sng" algn="ctr">
+                      <a:solidFill>
+                        <a:srgbClr val="D9D9D9"/>
+                      </a:solidFill>
+                      <a:prstDash val="solid"/>
+                      <a:round/>
+                      <a:headEnd type="none" w="med" len="med"/>
+                      <a:tailEnd type="none" w="med" len="med"/>
+                    </a:lnL>
+                    <a:lnR w="9525" cap="flat" cmpd="sng" algn="ctr">
+                      <a:solidFill>
+                        <a:srgbClr val="D9D9D9"/>
+                      </a:solidFill>
+                      <a:prstDash val="solid"/>
+                      <a:round/>
+                      <a:headEnd type="none" w="med" len="med"/>
+                      <a:tailEnd type="none" w="med" len="med"/>
+                    </a:lnR>
+                    <a:lnT w="9525" cap="flat" cmpd="sng" algn="ctr">
+                      <a:solidFill>
+                        <a:srgbClr val="D9D9D9"/>
+                      </a:solidFill>
+                      <a:prstDash val="solid"/>
+                      <a:round/>
+                      <a:headEnd type="none" w="med" len="med"/>
+                      <a:tailEnd type="none" w="med" len="med"/>
+                    </a:lnT>
+                    <a:lnB w="9525" cap="flat" cmpd="sng" algn="ctr">
+                      <a:solidFill>
+                        <a:srgbClr val="D9D9D9"/>
+                      </a:solidFill>
+                      <a:prstDash val="solid"/>
+                      <a:round/>
+                      <a:headEnd type="none" w="med" len="med"/>
+                      <a:tailEnd type="none" w="med" len="med"/>
+                    </a:lnB>
+                    <a:solidFill>
+                      <a:srgbClr val="FFFFFF"/>
+                    </a:solidFill>
+                  </a:tcPr>
+                </a:tc>
+                <a:tc>
+                  <a:txBody>
+                    <a:bodyPr/>
+                    <a:lstStyle/>
+                    <a:p>
+                      <a:pPr algn="ctr" indent="0" marL="0">
+                        <a:buNone/>
+                      </a:pPr>
+                      <a:r>
+                        <a:rPr lang="en-US" sz="1150" i="1" dirty="0">
+                          <a:solidFill>
+                            <a:srgbClr val="404040"/>
+                          </a:solidFill>
+                          <a:latin typeface="Segoe UI" pitchFamily="34" charset="0"/>
+                          <a:ea typeface="Segoe UI" pitchFamily="34" charset="-122"/>
+                          <a:cs typeface="Segoe UI" pitchFamily="34" charset="-120"/>
+                        </a:rPr>
+                        <a:t>-</a:t>
+                      </a:r>
+                      <a:endParaRPr lang="en-US" sz="1150" dirty="0">
+                        <a:latin typeface="Segoe UI" charset="0"/>
+                        <a:ea typeface="Segoe UI" charset="0"/>
+                        <a:cs typeface="Segoe UI" charset="0"/>
+                      </a:endParaRPr>
+                    </a:p>
+                  </a:txBody>
+                  <a:tcPr marL="91440" marR="91440" marT="45720" marB="45720" anchor="ctr">
+                    <a:lnL w="9525" cap="flat" cmpd="sng" algn="ctr">
+                      <a:solidFill>
+                        <a:srgbClr val="D9D9D9"/>
+                      </a:solidFill>
+                      <a:prstDash val="solid"/>
+                      <a:round/>
+                      <a:headEnd type="none" w="med" len="med"/>
+                      <a:tailEnd type="none" w="med" len="med"/>
+                    </a:lnL>
+                    <a:lnR w="9525" cap="flat" cmpd="sng" algn="ctr">
+                      <a:solidFill>
+                        <a:srgbClr val="D9D9D9"/>
+                      </a:solidFill>
+                      <a:prstDash val="solid"/>
+                      <a:round/>
+                      <a:headEnd type="none" w="med" len="med"/>
+                      <a:tailEnd type="none" w="med" len="med"/>
+                    </a:lnR>
+                    <a:lnT w="9525" cap="flat" cmpd="sng" algn="ctr">
+                      <a:solidFill>
+                        <a:srgbClr val="D9D9D9"/>
+                      </a:solidFill>
+                      <a:prstDash val="solid"/>
+                      <a:round/>
+                      <a:headEnd type="none" w="med" len="med"/>
+                      <a:tailEnd type="none" w="med" len="med"/>
+                    </a:lnT>
+                    <a:lnB w="9525" cap="flat" cmpd="sng" algn="ctr">
+                      <a:solidFill>
+                        <a:srgbClr val="D9D9D9"/>
+                      </a:solidFill>
+                      <a:prstDash val="solid"/>
+                      <a:round/>
+                      <a:headEnd type="none" w="med" len="med"/>
+                      <a:tailEnd type="none" w="med" len="med"/>
+                    </a:lnB>
+                    <a:solidFill>
+                      <a:srgbClr val="FFFFFF"/>
+                    </a:solidFill>
+                  </a:tcPr>
+                </a:tc>
+              </a:tr>
+              <a:tr h="1188720">
+                <a:tc vMerge="1">
+                  <a:tcPr/>
+                </a:tc>
+                <a:tc>
+                  <a:txBody>
+                    <a:bodyPr/>
+                    <a:lstStyle/>
+                    <a:p>
+                      <a:pPr algn="ctr" indent="0" marL="0">
+                        <a:buNone/>
+                      </a:pPr>
+                      <a:r>
+                        <a:rPr lang="en-US" sz="1150" b="1" i="1" dirty="0">
+                          <a:solidFill>
+                            <a:srgbClr val="404040"/>
+                          </a:solidFill>
+                          <a:latin typeface="Segoe UI" pitchFamily="34" charset="0"/>
+                          <a:ea typeface="Segoe UI" pitchFamily="34" charset="-122"/>
+                          <a:cs typeface="Segoe UI" pitchFamily="34" charset="-120"/>
+                        </a:rPr>
+                        <a:t>I.9</a:t>
+                      </a:r>
+                      <a:endParaRPr lang="en-US" sz="1150" dirty="0">
+                        <a:latin typeface="Segoe UI" charset="0"/>
+                        <a:ea typeface="Segoe UI" charset="0"/>
+                        <a:cs typeface="Segoe UI" charset="0"/>
+                      </a:endParaRPr>
+                    </a:p>
+                  </a:txBody>
+                  <a:tcPr marL="91440" marR="91440" marT="45720" marB="45720" anchor="ctr">
+                    <a:lnL w="9525" cap="flat" cmpd="sng" algn="ctr">
+                      <a:solidFill>
+                        <a:srgbClr val="D9D9D9"/>
+                      </a:solidFill>
+                      <a:prstDash val="solid"/>
+                      <a:round/>
+                      <a:headEnd type="none" w="med" len="med"/>
+                      <a:tailEnd type="none" w="med" len="med"/>
+                    </a:lnL>
+                    <a:lnR w="9525" cap="flat" cmpd="sng" algn="ctr">
+                      <a:solidFill>
+                        <a:srgbClr val="D9D9D9"/>
+                      </a:solidFill>
+                      <a:prstDash val="solid"/>
+                      <a:round/>
+                      <a:headEnd type="none" w="med" len="med"/>
+                      <a:tailEnd type="none" w="med" len="med"/>
+                    </a:lnR>
+                    <a:lnT w="9525" cap="flat" cmpd="sng" algn="ctr">
+                      <a:solidFill>
+                        <a:srgbClr val="D9D9D9"/>
+                      </a:solidFill>
+                      <a:prstDash val="solid"/>
+                      <a:round/>
+                      <a:headEnd type="none" w="med" len="med"/>
+                      <a:tailEnd type="none" w="med" len="med"/>
+                    </a:lnT>
+                    <a:lnB w="9525" cap="flat" cmpd="sng" algn="ctr">
+                      <a:solidFill>
+                        <a:srgbClr val="D9D9D9"/>
+                      </a:solidFill>
+                      <a:prstDash val="solid"/>
+                      <a:round/>
+                      <a:headEnd type="none" w="med" len="med"/>
+                      <a:tailEnd type="none" w="med" len="med"/>
+                    </a:lnB>
+                    <a:solidFill>
+                      <a:srgbClr val="FFFFFF"/>
+                    </a:solidFill>
+                  </a:tcPr>
+                </a:tc>
+                <a:tc>
+                  <a:txBody>
+                    <a:bodyPr/>
+                    <a:lstStyle/>
+                    <a:p>
+                      <a:pPr algn="just" marL="177800" indent="-177800">
+                        <a:spcAft>
+                          <a:spcPts val="400"/>
+                        </a:spcAft>
+                        <a:buSzPct val="100000"/>
+                        <a:buChar char="▪"/>
+                      </a:pPr>
+                      <a:r>
+                        <a:rPr lang="en-US" sz="1150" b="1" dirty="0">
+                          <a:solidFill>
+                            <a:srgbClr val="333333"/>
+                          </a:solidFill>
+                          <a:latin typeface="Segoe UI" pitchFamily="34" charset="0"/>
+                          <a:ea typeface="Segoe UI" pitchFamily="34" charset="-122"/>
+                          <a:cs typeface="Segoe UI" pitchFamily="34" charset="-120"/>
+                        </a:rPr>
+                        <a:t>Lot 2 intégré, inactif par défaut</a:t>
+                      </a:r>
+                      <a:r>
+                        <a:rPr lang="en-US" sz="1150" dirty="0">
+                          <a:solidFill>
+                            <a:srgbClr val="333333"/>
+                          </a:solidFill>
+                          <a:latin typeface="Segoe UI" pitchFamily="34" charset="0"/>
+                          <a:ea typeface="Segoe UI" pitchFamily="34" charset="-122"/>
+                          <a:cs typeface="Segoe UI" pitchFamily="34" charset="-120"/>
+                        </a:rPr>
+                        <a:t> (interrupteur du paramétrage) : exposition déduite des aléas, C11 révisé, </a:t>
+                      </a:r>
+                      <a:r>
+                        <a:rPr lang="en-US" sz="1150" b="1" dirty="0">
+                          <a:solidFill>
+                            <a:srgbClr val="333333"/>
+                          </a:solidFill>
+                          <a:latin typeface="Segoe UI" pitchFamily="34" charset="0"/>
+                          <a:ea typeface="Segoe UI" pitchFamily="34" charset="-122"/>
+                          <a:cs typeface="Segoe UI" pitchFamily="34" charset="-120"/>
+                        </a:rPr>
+                        <a:t>plafonds C16 et C17</a:t>
+                      </a:r>
+                      <a:r>
+                        <a:rPr lang="en-US" sz="1150" dirty="0">
+                          <a:solidFill>
+                            <a:srgbClr val="333333"/>
+                          </a:solidFill>
+                          <a:latin typeface="Segoe UI" pitchFamily="34" charset="0"/>
+                          <a:ea typeface="Segoe UI" pitchFamily="34" charset="-122"/>
+                          <a:cs typeface="Segoe UI" pitchFamily="34" charset="-120"/>
+                        </a:rPr>
+                        <a:t>, sous-critère D9.5 « risque de transition » (15 % de D9), scénario climatique pris dans N2.</a:t>
+                      </a:r>
+                      <a:endParaRPr lang="en-US" sz="1150" dirty="0">
+                        <a:latin typeface="Segoe UI" charset="0"/>
+                        <a:ea typeface="Segoe UI" charset="0"/>
+                        <a:cs typeface="Segoe UI" charset="0"/>
+                      </a:endParaRPr>
+                    </a:p>
+                    <a:p>
+                      <a:pPr algn="just" marL="177800" indent="-177800">
+                        <a:spcAft>
+                          <a:spcPts val="400"/>
+                        </a:spcAft>
+                        <a:buSzPct val="100000"/>
+                        <a:buChar char="▪"/>
+                      </a:pPr>
+                      <a:r>
+                        <a:rPr lang="en-US" sz="1150" b="1" dirty="0">
+                          <a:solidFill>
+                            <a:srgbClr val="333333"/>
+                          </a:solidFill>
+                          <a:latin typeface="Segoe UI" pitchFamily="34" charset="0"/>
+                          <a:ea typeface="Segoe UI" pitchFamily="34" charset="-122"/>
+                          <a:cs typeface="Segoe UI" pitchFamily="34" charset="-120"/>
+                        </a:rPr>
+                        <a:t>Étude d’impact sur les 18 cas</a:t>
+                      </a:r>
+                      <a:r>
+                        <a:rPr lang="en-US" sz="1150" dirty="0">
+                          <a:solidFill>
+                            <a:srgbClr val="333333"/>
+                          </a:solidFill>
+                          <a:latin typeface="Segoe UI" pitchFamily="34" charset="0"/>
+                          <a:ea typeface="Segoe UI" pitchFamily="34" charset="-122"/>
+                          <a:cs typeface="Segoe UI" pitchFamily="34" charset="-120"/>
+                        </a:rPr>
+                        <a:t> : 1 note modifiée (huilerie d’olives, 8 → 6), 8 dossiers avec un plafond climatique, 10 expositions retenues différentes de la case déclarée. </a:t>
+                      </a:r>
+                      <a:r>
+                        <a:rPr lang="en-US" sz="1150" b="1" dirty="0">
+                          <a:solidFill>
+                            <a:srgbClr val="333333"/>
+                          </a:solidFill>
+                          <a:latin typeface="Segoe UI" pitchFamily="34" charset="0"/>
+                          <a:ea typeface="Segoe UI" pitchFamily="34" charset="-122"/>
+                          <a:cs typeface="Segoe UI" pitchFamily="34" charset="-120"/>
+                        </a:rPr>
+                        <a:t>Dossier de validation</a:t>
+                      </a:r>
+                      <a:r>
+                        <a:rPr lang="en-US" sz="1150" dirty="0">
+                          <a:solidFill>
+                            <a:srgbClr val="333333"/>
+                          </a:solidFill>
+                          <a:latin typeface="Segoe UI" pitchFamily="34" charset="0"/>
+                          <a:ea typeface="Segoe UI" pitchFamily="34" charset="-122"/>
+                          <a:cs typeface="Segoe UI" pitchFamily="34" charset="-120"/>
+                        </a:rPr>
+                        <a:t> préparé.</a:t>
+                      </a:r>
+                      <a:endParaRPr lang="en-US" sz="1150" dirty="0">
+                        <a:latin typeface="Segoe UI" charset="0"/>
+                        <a:ea typeface="Segoe UI" charset="0"/>
+                        <a:cs typeface="Segoe UI" charset="0"/>
+                      </a:endParaRPr>
+                    </a:p>
+                  </a:txBody>
+                  <a:tcPr marL="91440" marR="91440" marT="45720" marB="45720" anchor="ctr">
+                    <a:lnL w="9525" cap="flat" cmpd="sng" algn="ctr">
+                      <a:solidFill>
+                        <a:srgbClr val="D9D9D9"/>
+                      </a:solidFill>
+                      <a:prstDash val="solid"/>
+                      <a:round/>
+                      <a:headEnd type="none" w="med" len="med"/>
+                      <a:tailEnd type="none" w="med" len="med"/>
+                    </a:lnL>
+                    <a:lnR w="9525" cap="flat" cmpd="sng" algn="ctr">
+                      <a:solidFill>
+                        <a:srgbClr val="D9D9D9"/>
+                      </a:solidFill>
+                      <a:prstDash val="solid"/>
+                      <a:round/>
+                      <a:headEnd type="none" w="med" len="med"/>
+                      <a:tailEnd type="none" w="med" len="med"/>
+                    </a:lnR>
+                    <a:lnT w="9525" cap="flat" cmpd="sng" algn="ctr">
+                      <a:solidFill>
+                        <a:srgbClr val="D9D9D9"/>
+                      </a:solidFill>
+                      <a:prstDash val="solid"/>
+                      <a:round/>
+                      <a:headEnd type="none" w="med" len="med"/>
+                      <a:tailEnd type="none" w="med" len="med"/>
+                    </a:lnT>
+                    <a:lnB w="9525" cap="flat" cmpd="sng" algn="ctr">
+                      <a:solidFill>
+                        <a:srgbClr val="D9D9D9"/>
+                      </a:solidFill>
+                      <a:prstDash val="solid"/>
+                      <a:round/>
+                      <a:headEnd type="none" w="med" len="med"/>
+                      <a:tailEnd type="none" w="med" len="med"/>
+                    </a:lnB>
+                    <a:solidFill>
+                      <a:srgbClr val="FFFFFF"/>
+                    </a:solidFill>
+                  </a:tcPr>
+                </a:tc>
+                <a:tc>
+                  <a:txBody>
+                    <a:bodyPr/>
+                    <a:lstStyle/>
+                    <a:p>
+                      <a:pPr algn="ctr" indent="0" marL="0">
+                        <a:buNone/>
+                      </a:pPr>
+                      <a:r>
+                        <a:rPr lang="en-US" sz="1150" i="1" dirty="0">
+                          <a:solidFill>
+                            <a:srgbClr val="404040"/>
+                          </a:solidFill>
+                          <a:latin typeface="Segoe UI" pitchFamily="34" charset="0"/>
+                          <a:ea typeface="Segoe UI" pitchFamily="34" charset="-122"/>
+                          <a:cs typeface="Segoe UI" pitchFamily="34" charset="-120"/>
+                        </a:rPr>
+                        <a:t>-</a:t>
+                      </a:r>
+                      <a:endParaRPr lang="en-US" sz="1150" dirty="0">
+                        <a:latin typeface="Segoe UI" charset="0"/>
+                        <a:ea typeface="Segoe UI" charset="0"/>
+                        <a:cs typeface="Segoe UI" charset="0"/>
+                      </a:endParaRPr>
+                    </a:p>
+                  </a:txBody>
+                  <a:tcPr marL="91440" marR="91440" marT="45720" marB="45720" anchor="ctr">
+                    <a:lnL w="9525" cap="flat" cmpd="sng" algn="ctr">
+                      <a:solidFill>
+                        <a:srgbClr val="D9D9D9"/>
+                      </a:solidFill>
+                      <a:prstDash val="solid"/>
+                      <a:round/>
+                      <a:headEnd type="none" w="med" len="med"/>
+                      <a:tailEnd type="none" w="med" len="med"/>
+                    </a:lnL>
+                    <a:lnR w="9525" cap="flat" cmpd="sng" algn="ctr">
+                      <a:solidFill>
+                        <a:srgbClr val="D9D9D9"/>
+                      </a:solidFill>
+                      <a:prstDash val="solid"/>
+                      <a:round/>
+                      <a:headEnd type="none" w="med" len="med"/>
+                      <a:tailEnd type="none" w="med" len="med"/>
+                    </a:lnR>
+                    <a:lnT w="9525" cap="flat" cmpd="sng" algn="ctr">
+                      <a:solidFill>
+                        <a:srgbClr val="D9D9D9"/>
+                      </a:solidFill>
+                      <a:prstDash val="solid"/>
+                      <a:round/>
+                      <a:headEnd type="none" w="med" len="med"/>
+                      <a:tailEnd type="none" w="med" len="med"/>
+                    </a:lnT>
+                    <a:lnB w="9525" cap="flat" cmpd="sng" algn="ctr">
+                      <a:solidFill>
+                        <a:srgbClr val="D9D9D9"/>
+                      </a:solidFill>
+                      <a:prstDash val="solid"/>
+                      <a:round/>
+                      <a:headEnd type="none" w="med" len="med"/>
+                      <a:tailEnd type="none" w="med" len="med"/>
+                    </a:lnB>
+                    <a:solidFill>
+                      <a:srgbClr val="FFFFFF"/>
+                    </a:solidFill>
+                  </a:tcPr>
+                </a:tc>
+              </a:tr>
+              <a:tr h="658368">
+                <a:tc vMerge="1">
+                  <a:tcPr/>
+                </a:tc>
+                <a:tc>
+                  <a:txBody>
+                    <a:bodyPr/>
+                    <a:lstStyle/>
+                    <a:p>
+                      <a:pPr algn="ctr" indent="0" marL="0">
+                        <a:buNone/>
+                      </a:pPr>
+                      <a:r>
+                        <a:rPr lang="en-US" sz="1150" b="1" i="1" dirty="0">
+                          <a:solidFill>
+                            <a:srgbClr val="404040"/>
+                          </a:solidFill>
+                          <a:latin typeface="Segoe UI" pitchFamily="34" charset="0"/>
+                          <a:ea typeface="Segoe UI" pitchFamily="34" charset="-122"/>
+                          <a:cs typeface="Segoe UI" pitchFamily="34" charset="-120"/>
+                        </a:rPr>
+                        <a:t>D.4</a:t>
+                      </a:r>
+                      <a:endParaRPr lang="en-US" sz="1150" dirty="0">
+                        <a:latin typeface="Segoe UI" charset="0"/>
+                        <a:ea typeface="Segoe UI" charset="0"/>
+                        <a:cs typeface="Segoe UI" charset="0"/>
+                      </a:endParaRPr>
+                    </a:p>
+                  </a:txBody>
+                  <a:tcPr marL="91440" marR="91440" marT="45720" marB="45720" anchor="ctr">
+                    <a:lnL w="9525" cap="flat" cmpd="sng" algn="ctr">
+                      <a:solidFill>
+                        <a:srgbClr val="D9D9D9"/>
+                      </a:solidFill>
+                      <a:prstDash val="solid"/>
+                      <a:round/>
+                      <a:headEnd type="none" w="med" len="med"/>
+                      <a:tailEnd type="none" w="med" len="med"/>
+                    </a:lnL>
+                    <a:lnR w="9525" cap="flat" cmpd="sng" algn="ctr">
+                      <a:solidFill>
+                        <a:srgbClr val="D9D9D9"/>
+                      </a:solidFill>
+                      <a:prstDash val="solid"/>
+                      <a:round/>
+                      <a:headEnd type="none" w="med" len="med"/>
+                      <a:tailEnd type="none" w="med" len="med"/>
+                    </a:lnR>
+                    <a:lnT w="9525" cap="flat" cmpd="sng" algn="ctr">
+                      <a:solidFill>
+                        <a:srgbClr val="D9D9D9"/>
+                      </a:solidFill>
+                      <a:prstDash val="solid"/>
+                      <a:round/>
+                      <a:headEnd type="none" w="med" len="med"/>
+                      <a:tailEnd type="none" w="med" len="med"/>
+                    </a:lnT>
+                    <a:lnB w="9525" cap="flat" cmpd="sng" algn="ctr">
+                      <a:solidFill>
+                        <a:srgbClr val="D9D9D9"/>
+                      </a:solidFill>
+                      <a:prstDash val="solid"/>
+                      <a:round/>
+                      <a:headEnd type="none" w="med" len="med"/>
+                      <a:tailEnd type="none" w="med" len="med"/>
+                    </a:lnB>
+                    <a:solidFill>
+                      <a:srgbClr val="FFFFFF"/>
+                    </a:solidFill>
+                  </a:tcPr>
+                </a:tc>
+                <a:tc>
+                  <a:txBody>
+                    <a:bodyPr/>
+                    <a:lstStyle/>
+                    <a:p>
+                      <a:pPr algn="just" marL="177800" indent="-177800">
+                        <a:spcAft>
+                          <a:spcPts val="400"/>
+                        </a:spcAft>
+                        <a:buSzPct val="100000"/>
+                        <a:buChar char="▪"/>
+                      </a:pPr>
+                      <a:r>
+                        <a:rPr lang="en-US" sz="1150" dirty="0">
+                          <a:solidFill>
+                            <a:srgbClr val="333333"/>
+                          </a:solidFill>
+                          <a:latin typeface="Segoe UI" pitchFamily="34" charset="0"/>
+                          <a:ea typeface="Segoe UI" pitchFamily="34" charset="-122"/>
+                          <a:cs typeface="Segoe UI" pitchFamily="34" charset="-120"/>
+                        </a:rPr>
+                        <a:t>Il est proposé de </a:t>
+                      </a:r>
+                      <a:r>
+                        <a:rPr lang="en-US" sz="1150" b="1" dirty="0">
+                          <a:solidFill>
+                            <a:srgbClr val="333333"/>
+                          </a:solidFill>
+                          <a:latin typeface="Segoe UI" pitchFamily="34" charset="0"/>
+                          <a:ea typeface="Segoe UI" pitchFamily="34" charset="-122"/>
+                          <a:cs typeface="Segoe UI" pitchFamily="34" charset="-120"/>
+                        </a:rPr>
+                        <a:t>soumettre le dossier de validation du lot 2 au Comité de validation du modèle</a:t>
+                      </a:r>
+                      <a:r>
+                        <a:rPr lang="en-US" sz="1150" dirty="0">
+                          <a:solidFill>
+                            <a:srgbClr val="333333"/>
+                          </a:solidFill>
+                          <a:latin typeface="Segoe UI" pitchFamily="34" charset="0"/>
+                          <a:ea typeface="Segoe UI" pitchFamily="34" charset="-122"/>
+                          <a:cs typeface="Segoe UI" pitchFamily="34" charset="-120"/>
+                        </a:rPr>
+                        <a:t>, puis d’activer le lot 2 à une date fixée par ce comité.</a:t>
+                      </a:r>
+                      <a:endParaRPr lang="en-US" sz="1150" dirty="0">
+                        <a:latin typeface="Segoe UI" charset="0"/>
+                        <a:ea typeface="Segoe UI" charset="0"/>
+                        <a:cs typeface="Segoe UI" charset="0"/>
+                      </a:endParaRPr>
+                    </a:p>
+                  </a:txBody>
+                  <a:tcPr marL="91440" marR="91440" marT="45720" marB="45720" anchor="ctr">
+                    <a:lnL w="9525" cap="flat" cmpd="sng" algn="ctr">
+                      <a:solidFill>
+                        <a:srgbClr val="D9D9D9"/>
+                      </a:solidFill>
+                      <a:prstDash val="solid"/>
+                      <a:round/>
+                      <a:headEnd type="none" w="med" len="med"/>
+                      <a:tailEnd type="none" w="med" len="med"/>
+                    </a:lnL>
+                    <a:lnR w="9525" cap="flat" cmpd="sng" algn="ctr">
+                      <a:solidFill>
+                        <a:srgbClr val="D9D9D9"/>
+                      </a:solidFill>
+                      <a:prstDash val="solid"/>
+                      <a:round/>
+                      <a:headEnd type="none" w="med" len="med"/>
+                      <a:tailEnd type="none" w="med" len="med"/>
+                    </a:lnR>
+                    <a:lnT w="9525" cap="flat" cmpd="sng" algn="ctr">
+                      <a:solidFill>
+                        <a:srgbClr val="D9D9D9"/>
+                      </a:solidFill>
+                      <a:prstDash val="solid"/>
+                      <a:round/>
+                      <a:headEnd type="none" w="med" len="med"/>
+                      <a:tailEnd type="none" w="med" len="med"/>
+                    </a:lnT>
+                    <a:lnB w="9525" cap="flat" cmpd="sng" algn="ctr">
+                      <a:solidFill>
+                        <a:srgbClr val="D9D9D9"/>
+                      </a:solidFill>
+                      <a:prstDash val="solid"/>
+                      <a:round/>
+                      <a:headEnd type="none" w="med" len="med"/>
+                      <a:tailEnd type="none" w="med" len="med"/>
+                    </a:lnB>
+                    <a:solidFill>
+                      <a:srgbClr val="FFFFFF"/>
+                    </a:solidFill>
+                  </a:tcPr>
+                </a:tc>
+                <a:tc>
+                  <a:txBody>
+                    <a:bodyPr/>
+                    <a:lstStyle/>
+                    <a:p>
+                      <a:pPr algn="ctr" indent="0" marL="0">
+                        <a:buNone/>
+                      </a:pPr>
+                      <a:r>
+                        <a:rPr lang="en-US" sz="1150" b="1" i="1" dirty="0">
+                          <a:solidFill>
+                            <a:srgbClr val="404040"/>
+                          </a:solidFill>
+                          <a:latin typeface="Segoe UI" pitchFamily="34" charset="0"/>
+                          <a:ea typeface="Segoe UI" pitchFamily="34" charset="-122"/>
+                          <a:cs typeface="Segoe UI" pitchFamily="34" charset="-120"/>
+                        </a:rPr>
+                        <a:t>Risques Groupe</a:t>
+                      </a:r>
+                      <a:endParaRPr lang="en-US" sz="1150" dirty="0">
+                        <a:latin typeface="Segoe UI" charset="0"/>
+                        <a:ea typeface="Segoe UI" charset="0"/>
+                        <a:cs typeface="Segoe UI" charset="0"/>
+                      </a:endParaRPr>
+                    </a:p>
+                  </a:txBody>
+                  <a:tcPr marL="91440" marR="91440" marT="45720" marB="45720" anchor="ctr">
+                    <a:lnL w="9525" cap="flat" cmpd="sng" algn="ctr">
+                      <a:solidFill>
+                        <a:srgbClr val="D9D9D9"/>
+                      </a:solidFill>
+                      <a:prstDash val="solid"/>
+                      <a:round/>
+                      <a:headEnd type="none" w="med" len="med"/>
+                      <a:tailEnd type="none" w="med" len="med"/>
+                    </a:lnL>
+                    <a:lnR w="9525" cap="flat" cmpd="sng" algn="ctr">
+                      <a:solidFill>
+                        <a:srgbClr val="D9D9D9"/>
+                      </a:solidFill>
+                      <a:prstDash val="solid"/>
+                      <a:round/>
+                      <a:headEnd type="none" w="med" len="med"/>
+                      <a:tailEnd type="none" w="med" len="med"/>
+                    </a:lnR>
+                    <a:lnT w="9525" cap="flat" cmpd="sng" algn="ctr">
+                      <a:solidFill>
+                        <a:srgbClr val="D9D9D9"/>
+                      </a:solidFill>
+                      <a:prstDash val="solid"/>
+                      <a:round/>
+                      <a:headEnd type="none" w="med" len="med"/>
+                      <a:tailEnd type="none" w="med" len="med"/>
+                    </a:lnT>
+                    <a:lnB w="9525" cap="flat" cmpd="sng" algn="ctr">
+                      <a:solidFill>
+                        <a:srgbClr val="D9D9D9"/>
+                      </a:solidFill>
+                      <a:prstDash val="solid"/>
+                      <a:round/>
+                      <a:headEnd type="none" w="med" len="med"/>
+                      <a:tailEnd type="none" w="med" len="med"/>
+                    </a:lnB>
+                    <a:solidFill>
+                      <a:srgbClr val="FFFFFF"/>
+                    </a:solidFill>
+                  </a:tcPr>
+                </a:tc>
+              </a:tr>
+              <a:tr h="658368">
+                <a:tc rowSpan="2">
+                  <a:txBody>
+                    <a:bodyPr/>
+                    <a:lstStyle/>
+                    <a:p>
+                      <a:pPr algn="r" indent="0" marL="0">
+                        <a:buNone/>
+                      </a:pPr>
+                      <a:r>
+                        <a:rPr lang="en-US" sz="1300" b="1" i="1" dirty="0">
+                          <a:solidFill>
+                            <a:srgbClr val="FFFFFF"/>
+                          </a:solidFill>
+                          <a:latin typeface="Segoe UI" pitchFamily="34" charset="0"/>
+                          <a:ea typeface="Segoe UI" pitchFamily="34" charset="-122"/>
+                          <a:cs typeface="Segoe UI" pitchFamily="34" charset="-120"/>
+                        </a:rPr>
+                        <a:t>Outil Excel et documents</a:t>
+                      </a:r>
+                      <a:endParaRPr lang="en-US" sz="1300" dirty="0">
+                        <a:latin typeface="Segoe UI" charset="0"/>
+                        <a:ea typeface="Segoe UI" charset="0"/>
+                        <a:cs typeface="Segoe UI" charset="0"/>
+                      </a:endParaRPr>
+                    </a:p>
+                  </a:txBody>
+                  <a:tcPr marL="76200" marR="127000" marT="50800" marB="50800" anchor="ctr">
+                    <a:lnL w="9525" cap="flat" cmpd="sng" algn="ctr">
+                      <a:solidFill>
+                        <a:srgbClr val="D9D9D9"/>
+                      </a:solidFill>
+                      <a:prstDash val="solid"/>
+                      <a:round/>
+                      <a:headEnd type="none" w="med" len="med"/>
+                      <a:tailEnd type="none" w="med" len="med"/>
+                    </a:lnL>
+                    <a:lnR w="9525" cap="flat" cmpd="sng" algn="ctr">
+                      <a:solidFill>
+                        <a:srgbClr val="D9D9D9"/>
+                      </a:solidFill>
+                      <a:prstDash val="solid"/>
+                      <a:round/>
+                      <a:headEnd type="none" w="med" len="med"/>
+                      <a:tailEnd type="none" w="med" len="med"/>
+                    </a:lnR>
+                    <a:lnT w="9525" cap="flat" cmpd="sng" algn="ctr">
+                      <a:solidFill>
+                        <a:srgbClr val="D9D9D9"/>
+                      </a:solidFill>
+                      <a:prstDash val="solid"/>
+                      <a:round/>
+                      <a:headEnd type="none" w="med" len="med"/>
+                      <a:tailEnd type="none" w="med" len="med"/>
+                    </a:lnT>
+                    <a:lnB w="9525" cap="flat" cmpd="sng" algn="ctr">
+                      <a:solidFill>
+                        <a:srgbClr val="D9D9D9"/>
+                      </a:solidFill>
+                      <a:prstDash val="solid"/>
+                      <a:round/>
+                      <a:headEnd type="none" w="med" len="med"/>
+                      <a:tailEnd type="none" w="med" len="med"/>
+                    </a:lnB>
+                    <a:solidFill>
+                      <a:srgbClr val="EFA54C"/>
+                    </a:solidFill>
+                  </a:tcPr>
+                </a:tc>
+                <a:tc>
+                  <a:txBody>
+                    <a:bodyPr/>
+                    <a:lstStyle/>
+                    <a:p>
+                      <a:pPr algn="ctr" indent="0" marL="0">
+                        <a:buNone/>
+                      </a:pPr>
+                      <a:r>
+                        <a:rPr lang="en-US" sz="1150" b="1" i="1" dirty="0">
+                          <a:solidFill>
+                            <a:srgbClr val="404040"/>
+                          </a:solidFill>
+                          <a:latin typeface="Segoe UI" pitchFamily="34" charset="0"/>
+                          <a:ea typeface="Segoe UI" pitchFamily="34" charset="-122"/>
+                          <a:cs typeface="Segoe UI" pitchFamily="34" charset="-120"/>
+                        </a:rPr>
+                        <a:t>I.10</a:t>
+                      </a:r>
+                      <a:endParaRPr lang="en-US" sz="1150" dirty="0">
+                        <a:latin typeface="Segoe UI" charset="0"/>
+                        <a:ea typeface="Segoe UI" charset="0"/>
+                        <a:cs typeface="Segoe UI" charset="0"/>
+                      </a:endParaRPr>
+                    </a:p>
+                  </a:txBody>
+                  <a:tcPr marL="91440" marR="91440" marT="45720" marB="45720" anchor="ctr">
+                    <a:lnL w="9525" cap="flat" cmpd="sng" algn="ctr">
+                      <a:solidFill>
+                        <a:srgbClr val="D9D9D9"/>
+                      </a:solidFill>
+                      <a:prstDash val="solid"/>
+                      <a:round/>
+                      <a:headEnd type="none" w="med" len="med"/>
+                      <a:tailEnd type="none" w="med" len="med"/>
+                    </a:lnL>
+                    <a:lnR w="9525" cap="flat" cmpd="sng" algn="ctr">
+                      <a:solidFill>
+                        <a:srgbClr val="D9D9D9"/>
+                      </a:solidFill>
+                      <a:prstDash val="solid"/>
+                      <a:round/>
+                      <a:headEnd type="none" w="med" len="med"/>
+                      <a:tailEnd type="none" w="med" len="med"/>
+                    </a:lnR>
+                    <a:lnT w="9525" cap="flat" cmpd="sng" algn="ctr">
+                      <a:solidFill>
+                        <a:srgbClr val="D9D9D9"/>
+                      </a:solidFill>
+                      <a:prstDash val="solid"/>
+                      <a:round/>
+                      <a:headEnd type="none" w="med" len="med"/>
+                      <a:tailEnd type="none" w="med" len="med"/>
+                    </a:lnT>
+                    <a:lnB w="9525" cap="flat" cmpd="sng" algn="ctr">
+                      <a:solidFill>
+                        <a:srgbClr val="D9D9D9"/>
+                      </a:solidFill>
+                      <a:prstDash val="solid"/>
+                      <a:round/>
+                      <a:headEnd type="none" w="med" len="med"/>
+                      <a:tailEnd type="none" w="med" len="med"/>
+                    </a:lnB>
+                    <a:solidFill>
+                      <a:srgbClr val="FFFFFF"/>
+                    </a:solidFill>
+                  </a:tcPr>
+                </a:tc>
+                <a:tc>
+                  <a:txBody>
+                    <a:bodyPr/>
+                    <a:lstStyle/>
+                    <a:p>
+                      <a:pPr algn="just" marL="177800" indent="-177800">
+                        <a:spcAft>
+                          <a:spcPts val="400"/>
+                        </a:spcAft>
+                        <a:buSzPct val="100000"/>
+                        <a:buChar char="▪"/>
+                      </a:pPr>
+                      <a:r>
+                        <a:rPr lang="en-US" sz="1150" b="1" dirty="0">
+                          <a:solidFill>
+                            <a:srgbClr val="333333"/>
+                          </a:solidFill>
+                          <a:latin typeface="Segoe UI" pitchFamily="34" charset="0"/>
+                          <a:ea typeface="Segoe UI" pitchFamily="34" charset="-122"/>
+                          <a:cs typeface="Segoe UI" pitchFamily="34" charset="-120"/>
+                        </a:rPr>
+                        <a:t>Outil Excel version 4</a:t>
+                      </a:r>
+                      <a:r>
+                        <a:rPr lang="en-US" sz="1150" dirty="0">
+                          <a:solidFill>
+                            <a:srgbClr val="333333"/>
+                          </a:solidFill>
+                          <a:latin typeface="Segoe UI" pitchFamily="34" charset="0"/>
+                          <a:ea typeface="Segoe UI" pitchFamily="34" charset="-122"/>
+                          <a:cs typeface="Segoe UI" pitchFamily="34" charset="-120"/>
+                        </a:rPr>
+                        <a:t> : section 14 « Volet climatique » et règles du lot 2 activables par le paramètre « Lot 2 actif » (« Non » par défaut) ; concordance des 18 cas contrôlée lot 2 inactif et actif.</a:t>
+                      </a:r>
+                      <a:endParaRPr lang="en-US" sz="1150" dirty="0">
+                        <a:latin typeface="Segoe UI" charset="0"/>
+                        <a:ea typeface="Segoe UI" charset="0"/>
+                        <a:cs typeface="Segoe UI" charset="0"/>
+                      </a:endParaRPr>
+                    </a:p>
+                  </a:txBody>
+                  <a:tcPr marL="91440" marR="91440" marT="45720" marB="45720" anchor="ctr">
+                    <a:lnL w="9525" cap="flat" cmpd="sng" algn="ctr">
+                      <a:solidFill>
+                        <a:srgbClr val="D9D9D9"/>
+                      </a:solidFill>
+                      <a:prstDash val="solid"/>
+                      <a:round/>
+                      <a:headEnd type="none" w="med" len="med"/>
+                      <a:tailEnd type="none" w="med" len="med"/>
+                    </a:lnL>
+                    <a:lnR w="9525" cap="flat" cmpd="sng" algn="ctr">
+                      <a:solidFill>
+                        <a:srgbClr val="D9D9D9"/>
+                      </a:solidFill>
+                      <a:prstDash val="solid"/>
+                      <a:round/>
+                      <a:headEnd type="none" w="med" len="med"/>
+                      <a:tailEnd type="none" w="med" len="med"/>
+                    </a:lnR>
+                    <a:lnT w="9525" cap="flat" cmpd="sng" algn="ctr">
+                      <a:solidFill>
+                        <a:srgbClr val="D9D9D9"/>
+                      </a:solidFill>
+                      <a:prstDash val="solid"/>
+                      <a:round/>
+                      <a:headEnd type="none" w="med" len="med"/>
+                      <a:tailEnd type="none" w="med" len="med"/>
+                    </a:lnT>
+                    <a:lnB w="9525" cap="flat" cmpd="sng" algn="ctr">
+                      <a:solidFill>
+                        <a:srgbClr val="D9D9D9"/>
+                      </a:solidFill>
+                      <a:prstDash val="solid"/>
+                      <a:round/>
+                      <a:headEnd type="none" w="med" len="med"/>
+                      <a:tailEnd type="none" w="med" len="med"/>
+                    </a:lnB>
+                    <a:solidFill>
+                      <a:srgbClr val="FFFFFF"/>
+                    </a:solidFill>
+                  </a:tcPr>
+                </a:tc>
+                <a:tc>
+                  <a:txBody>
+                    <a:bodyPr/>
+                    <a:lstStyle/>
+                    <a:p>
+                      <a:pPr algn="ctr" indent="0" marL="0">
+                        <a:buNone/>
+                      </a:pPr>
+                      <a:r>
+                        <a:rPr lang="en-US" sz="1150" i="1" dirty="0">
+                          <a:solidFill>
+                            <a:srgbClr val="404040"/>
+                          </a:solidFill>
+                          <a:latin typeface="Segoe UI" pitchFamily="34" charset="0"/>
+                          <a:ea typeface="Segoe UI" pitchFamily="34" charset="-122"/>
+                          <a:cs typeface="Segoe UI" pitchFamily="34" charset="-120"/>
+                        </a:rPr>
+                        <a:t>-</a:t>
+                      </a:r>
+                      <a:endParaRPr lang="en-US" sz="1150" dirty="0">
+                        <a:latin typeface="Segoe UI" charset="0"/>
+                        <a:ea typeface="Segoe UI" charset="0"/>
+                        <a:cs typeface="Segoe UI" charset="0"/>
+                      </a:endParaRPr>
+                    </a:p>
+                  </a:txBody>
+                  <a:tcPr marL="91440" marR="91440" marT="45720" marB="45720" anchor="ctr">
+                    <a:lnL w="9525" cap="flat" cmpd="sng" algn="ctr">
+                      <a:solidFill>
+                        <a:srgbClr val="D9D9D9"/>
+                      </a:solidFill>
+                      <a:prstDash val="solid"/>
+                      <a:round/>
+                      <a:headEnd type="none" w="med" len="med"/>
+                      <a:tailEnd type="none" w="med" len="med"/>
+                    </a:lnL>
+                    <a:lnR w="9525" cap="flat" cmpd="sng" algn="ctr">
+                      <a:solidFill>
+                        <a:srgbClr val="D9D9D9"/>
+                      </a:solidFill>
+                      <a:prstDash val="solid"/>
+                      <a:round/>
+                      <a:headEnd type="none" w="med" len="med"/>
+                      <a:tailEnd type="none" w="med" len="med"/>
+                    </a:lnR>
+                    <a:lnT w="9525" cap="flat" cmpd="sng" algn="ctr">
+                      <a:solidFill>
+                        <a:srgbClr val="D9D9D9"/>
+                      </a:solidFill>
+                      <a:prstDash val="solid"/>
+                      <a:round/>
+                      <a:headEnd type="none" w="med" len="med"/>
+                      <a:tailEnd type="none" w="med" len="med"/>
+                    </a:lnT>
+                    <a:lnB w="9525" cap="flat" cmpd="sng" algn="ctr">
+                      <a:solidFill>
+                        <a:srgbClr val="D9D9D9"/>
+                      </a:solidFill>
+                      <a:prstDash val="solid"/>
+                      <a:round/>
+                      <a:headEnd type="none" w="med" len="med"/>
+                      <a:tailEnd type="none" w="med" len="med"/>
+                    </a:lnB>
+                    <a:solidFill>
+                      <a:srgbClr val="FFFFFF"/>
+                    </a:solidFill>
+                  </a:tcPr>
+                </a:tc>
+              </a:tr>
+              <a:tr h="658368">
+                <a:tc vMerge="1">
+                  <a:tcPr/>
+                </a:tc>
+                <a:tc>
+                  <a:txBody>
+                    <a:bodyPr/>
+                    <a:lstStyle/>
+                    <a:p>
+                      <a:pPr algn="ctr" indent="0" marL="0">
+                        <a:buNone/>
+                      </a:pPr>
+                      <a:r>
+                        <a:rPr lang="en-US" sz="1150" b="1" i="1" dirty="0">
+                          <a:solidFill>
+                            <a:srgbClr val="404040"/>
+                          </a:solidFill>
+                          <a:latin typeface="Segoe UI" pitchFamily="34" charset="0"/>
+                          <a:ea typeface="Segoe UI" pitchFamily="34" charset="-122"/>
+                          <a:cs typeface="Segoe UI" pitchFamily="34" charset="-120"/>
+                        </a:rPr>
+                        <a:t>I.11</a:t>
+                      </a:r>
+                      <a:endParaRPr lang="en-US" sz="1150" dirty="0">
+                        <a:latin typeface="Segoe UI" charset="0"/>
+                        <a:ea typeface="Segoe UI" charset="0"/>
+                        <a:cs typeface="Segoe UI" charset="0"/>
+                      </a:endParaRPr>
+                    </a:p>
+                  </a:txBody>
+                  <a:tcPr marL="91440" marR="91440" marT="45720" marB="45720" anchor="ctr">
+                    <a:lnL w="9525" cap="flat" cmpd="sng" algn="ctr">
+                      <a:solidFill>
+                        <a:srgbClr val="D9D9D9"/>
+                      </a:solidFill>
+                      <a:prstDash val="solid"/>
+                      <a:round/>
+                      <a:headEnd type="none" w="med" len="med"/>
+                      <a:tailEnd type="none" w="med" len="med"/>
+                    </a:lnL>
+                    <a:lnR w="9525" cap="flat" cmpd="sng" algn="ctr">
+                      <a:solidFill>
+                        <a:srgbClr val="D9D9D9"/>
+                      </a:solidFill>
+                      <a:prstDash val="solid"/>
+                      <a:round/>
+                      <a:headEnd type="none" w="med" len="med"/>
+                      <a:tailEnd type="none" w="med" len="med"/>
+                    </a:lnR>
+                    <a:lnT w="9525" cap="flat" cmpd="sng" algn="ctr">
+                      <a:solidFill>
+                        <a:srgbClr val="D9D9D9"/>
+                      </a:solidFill>
+                      <a:prstDash val="solid"/>
+                      <a:round/>
+                      <a:headEnd type="none" w="med" len="med"/>
+                      <a:tailEnd type="none" w="med" len="med"/>
+                    </a:lnT>
+                    <a:lnB w="9525" cap="flat" cmpd="sng" algn="ctr">
+                      <a:solidFill>
+                        <a:srgbClr val="D9D9D9"/>
+                      </a:solidFill>
+                      <a:prstDash val="solid"/>
+                      <a:round/>
+                      <a:headEnd type="none" w="med" len="med"/>
+                      <a:tailEnd type="none" w="med" len="med"/>
+                    </a:lnB>
+                    <a:solidFill>
+                      <a:srgbClr val="FFFFFF"/>
+                    </a:solidFill>
+                  </a:tcPr>
+                </a:tc>
+                <a:tc>
+                  <a:txBody>
+                    <a:bodyPr/>
+                    <a:lstStyle/>
+                    <a:p>
+                      <a:pPr algn="just" marL="177800" indent="-177800">
+                        <a:spcAft>
+                          <a:spcPts val="400"/>
+                        </a:spcAft>
+                        <a:buSzPct val="100000"/>
+                        <a:buChar char="▪"/>
+                      </a:pPr>
+                      <a:r>
+                        <a:rPr lang="en-US" sz="1150" b="1" dirty="0">
+                          <a:solidFill>
+                            <a:srgbClr val="333333"/>
+                          </a:solidFill>
+                          <a:latin typeface="Segoe UI" pitchFamily="34" charset="0"/>
+                          <a:ea typeface="Segoe UI" pitchFamily="34" charset="-122"/>
+                          <a:cs typeface="Segoe UI" pitchFamily="34" charset="-120"/>
+                        </a:rPr>
+                        <a:t>Documents mis à jour</a:t>
+                      </a:r>
+                      <a:r>
+                        <a:rPr lang="en-US" sz="1150" dirty="0">
+                          <a:solidFill>
+                            <a:srgbClr val="333333"/>
+                          </a:solidFill>
+                          <a:latin typeface="Segoe UI" pitchFamily="34" charset="0"/>
+                          <a:ea typeface="Segoe UI" pitchFamily="34" charset="-122"/>
+                          <a:cs typeface="Segoe UI" pitchFamily="34" charset="-120"/>
+                        </a:rPr>
+                        <a:t> : présentation du modèle et discours, note pédagogique sur le stress test, proposition et dossier de validation du volet climatique.</a:t>
+                      </a:r>
+                      <a:endParaRPr lang="en-US" sz="1150" dirty="0">
+                        <a:latin typeface="Segoe UI" charset="0"/>
+                        <a:ea typeface="Segoe UI" charset="0"/>
+                        <a:cs typeface="Segoe UI" charset="0"/>
+                      </a:endParaRPr>
+                    </a:p>
+                  </a:txBody>
+                  <a:tcPr marL="91440" marR="91440" marT="45720" marB="45720" anchor="ctr">
+                    <a:lnL w="9525" cap="flat" cmpd="sng" algn="ctr">
+                      <a:solidFill>
+                        <a:srgbClr val="D9D9D9"/>
+                      </a:solidFill>
+                      <a:prstDash val="solid"/>
+                      <a:round/>
+                      <a:headEnd type="none" w="med" len="med"/>
+                      <a:tailEnd type="none" w="med" len="med"/>
+                    </a:lnL>
+                    <a:lnR w="9525" cap="flat" cmpd="sng" algn="ctr">
+                      <a:solidFill>
+                        <a:srgbClr val="D9D9D9"/>
+                      </a:solidFill>
+                      <a:prstDash val="solid"/>
+                      <a:round/>
+                      <a:headEnd type="none" w="med" len="med"/>
+                      <a:tailEnd type="none" w="med" len="med"/>
+                    </a:lnR>
+                    <a:lnT w="9525" cap="flat" cmpd="sng" algn="ctr">
+                      <a:solidFill>
+                        <a:srgbClr val="D9D9D9"/>
+                      </a:solidFill>
+                      <a:prstDash val="solid"/>
+                      <a:round/>
+                      <a:headEnd type="none" w="med" len="med"/>
+                      <a:tailEnd type="none" w="med" len="med"/>
+                    </a:lnT>
+                    <a:lnB w="9525" cap="flat" cmpd="sng" algn="ctr">
+                      <a:solidFill>
+                        <a:srgbClr val="D9D9D9"/>
+                      </a:solidFill>
+                      <a:prstDash val="solid"/>
+                      <a:round/>
+                      <a:headEnd type="none" w="med" len="med"/>
+                      <a:tailEnd type="none" w="med" len="med"/>
+                    </a:lnB>
+                    <a:solidFill>
+                      <a:srgbClr val="FFFFFF"/>
+                    </a:solidFill>
+                  </a:tcPr>
+                </a:tc>
+                <a:tc>
+                  <a:txBody>
+                    <a:bodyPr/>
+                    <a:lstStyle/>
+                    <a:p>
+                      <a:pPr algn="ctr" indent="0" marL="0">
+                        <a:buNone/>
+                      </a:pPr>
+                      <a:r>
+                        <a:rPr lang="en-US" sz="1150" i="1" dirty="0">
+                          <a:solidFill>
+                            <a:srgbClr val="404040"/>
+                          </a:solidFill>
+                          <a:latin typeface="Segoe UI" pitchFamily="34" charset="0"/>
+                          <a:ea typeface="Segoe UI" pitchFamily="34" charset="-122"/>
+                          <a:cs typeface="Segoe UI" pitchFamily="34" charset="-120"/>
+                        </a:rPr>
+                        <a:t>-</a:t>
+                      </a:r>
+                      <a:endParaRPr lang="en-US" sz="1150" dirty="0">
+                        <a:latin typeface="Segoe UI" charset="0"/>
+                        <a:ea typeface="Segoe UI" charset="0"/>
+                        <a:cs typeface="Segoe UI" charset="0"/>
+                      </a:endParaRPr>
+                    </a:p>
+                  </a:txBody>
+                  <a:tcPr marL="91440" marR="91440" marT="45720" marB="45720" anchor="ctr">
+                    <a:lnL w="9525" cap="flat" cmpd="sng" algn="ctr">
+                      <a:solidFill>
+                        <a:srgbClr val="D9D9D9"/>
+                      </a:solidFill>
+                      <a:prstDash val="solid"/>
+                      <a:round/>
+                      <a:headEnd type="none" w="med" len="med"/>
+                      <a:tailEnd type="none" w="med" len="med"/>
+                    </a:lnL>
+                    <a:lnR w="9525" cap="flat" cmpd="sng" algn="ctr">
+                      <a:solidFill>
+                        <a:srgbClr val="D9D9D9"/>
+                      </a:solidFill>
+                      <a:prstDash val="solid"/>
+                      <a:round/>
+                      <a:headEnd type="none" w="med" len="med"/>
+                      <a:tailEnd type="none" w="med" len="med"/>
+                    </a:lnR>
+                    <a:lnT w="9525" cap="flat" cmpd="sng" algn="ctr">
+                      <a:solidFill>
+                        <a:srgbClr val="D9D9D9"/>
+                      </a:solidFill>
+                      <a:prstDash val="solid"/>
+                      <a:round/>
+                      <a:headEnd type="none" w="med" len="med"/>
+                      <a:tailEnd type="none" w="med" len="med"/>
+                    </a:lnT>
+                    <a:lnB w="9525" cap="flat" cmpd="sng" algn="ctr">
+                      <a:solidFill>
+                        <a:srgbClr val="D9D9D9"/>
+                      </a:solidFill>
+                      <a:prstDash val="solid"/>
+                      <a:round/>
+                      <a:headEnd type="none" w="med" len="med"/>
+                      <a:tailEnd type="none" w="med" len="med"/>
+                    </a:lnB>
+                    <a:solidFill>
+                      <a:srgbClr val="FFFFFF"/>
+                    </a:solidFill>
+                  </a:tcPr>
+                </a:tc>
+              </a:tr>
+              <a:tr h="658368">
+                <a:tc>
+                  <a:txBody>
+                    <a:bodyPr/>
+                    <a:lstStyle/>
+                    <a:p>
+                      <a:pPr algn="r" indent="0" marL="0">
+                        <a:buNone/>
+                      </a:pPr>
+                      <a:r>
+                        <a:rPr lang="en-US" sz="1300" b="1" i="1" dirty="0">
+                          <a:solidFill>
+                            <a:srgbClr val="FFFFFF"/>
+                          </a:solidFill>
+                          <a:latin typeface="Segoe UI" pitchFamily="34" charset="0"/>
+                          <a:ea typeface="Segoe UI" pitchFamily="34" charset="-122"/>
+                          <a:cs typeface="Segoe UI" pitchFamily="34" charset="-120"/>
+                        </a:rPr>
+                        <a:t>Conduite de changement</a:t>
+                      </a:r>
+                      <a:endParaRPr lang="en-US" sz="1300" dirty="0">
+                        <a:latin typeface="Segoe UI" charset="0"/>
+                        <a:ea typeface="Segoe UI" charset="0"/>
+                        <a:cs typeface="Segoe UI" charset="0"/>
+                      </a:endParaRPr>
+                    </a:p>
+                  </a:txBody>
+                  <a:tcPr marL="76200" marR="127000" marT="50800" marB="50800" anchor="ctr">
+                    <a:lnL w="9525" cap="flat" cmpd="sng" algn="ctr">
+                      <a:solidFill>
+                        <a:srgbClr val="D9D9D9"/>
+                      </a:solidFill>
+                      <a:prstDash val="solid"/>
+                      <a:round/>
+                      <a:headEnd type="none" w="med" len="med"/>
+                      <a:tailEnd type="none" w="med" len="med"/>
+                    </a:lnL>
+                    <a:lnR w="9525" cap="flat" cmpd="sng" algn="ctr">
+                      <a:solidFill>
+                        <a:srgbClr val="D9D9D9"/>
+                      </a:solidFill>
+                      <a:prstDash val="solid"/>
+                      <a:round/>
+                      <a:headEnd type="none" w="med" len="med"/>
+                      <a:tailEnd type="none" w="med" len="med"/>
+                    </a:lnR>
+                    <a:lnT w="9525" cap="flat" cmpd="sng" algn="ctr">
+                      <a:solidFill>
+                        <a:srgbClr val="D9D9D9"/>
+                      </a:solidFill>
+                      <a:prstDash val="solid"/>
+                      <a:round/>
+                      <a:headEnd type="none" w="med" len="med"/>
+                      <a:tailEnd type="none" w="med" len="med"/>
+                    </a:lnT>
+                    <a:lnB w="9525" cap="flat" cmpd="sng" algn="ctr">
+                      <a:solidFill>
+                        <a:srgbClr val="D9D9D9"/>
+                      </a:solidFill>
+                      <a:prstDash val="solid"/>
+                      <a:round/>
+                      <a:headEnd type="none" w="med" len="med"/>
+                      <a:tailEnd type="none" w="med" len="med"/>
+                    </a:lnB>
+                    <a:solidFill>
+                      <a:srgbClr val="EFA54C"/>
+                    </a:solidFill>
+                  </a:tcPr>
+                </a:tc>
+                <a:tc>
+                  <a:txBody>
+                    <a:bodyPr/>
+                    <a:lstStyle/>
+                    <a:p>
+                      <a:pPr algn="ctr" indent="0" marL="0">
+                        <a:buNone/>
+                      </a:pPr>
+                      <a:r>
+                        <a:rPr lang="en-US" sz="1150" b="1" i="1" dirty="0">
+                          <a:solidFill>
+                            <a:srgbClr val="404040"/>
+                          </a:solidFill>
+                          <a:latin typeface="Segoe UI" pitchFamily="34" charset="0"/>
+                          <a:ea typeface="Segoe UI" pitchFamily="34" charset="-122"/>
+                          <a:cs typeface="Segoe UI" pitchFamily="34" charset="-120"/>
+                        </a:rPr>
+                        <a:t>D.5</a:t>
+                      </a:r>
+                      <a:endParaRPr lang="en-US" sz="1150" dirty="0">
+                        <a:latin typeface="Segoe UI" charset="0"/>
+                        <a:ea typeface="Segoe UI" charset="0"/>
+                        <a:cs typeface="Segoe UI" charset="0"/>
+                      </a:endParaRPr>
+                    </a:p>
+                  </a:txBody>
+                  <a:tcPr marL="91440" marR="91440" marT="45720" marB="45720" anchor="ctr">
+                    <a:lnL w="9525" cap="flat" cmpd="sng" algn="ctr">
+                      <a:solidFill>
+                        <a:srgbClr val="D9D9D9"/>
+                      </a:solidFill>
+                      <a:prstDash val="solid"/>
+                      <a:round/>
+                      <a:headEnd type="none" w="med" len="med"/>
+                      <a:tailEnd type="none" w="med" len="med"/>
+                    </a:lnL>
+                    <a:lnR w="9525" cap="flat" cmpd="sng" algn="ctr">
+                      <a:solidFill>
+                        <a:srgbClr val="D9D9D9"/>
+                      </a:solidFill>
+                      <a:prstDash val="solid"/>
+                      <a:round/>
+                      <a:headEnd type="none" w="med" len="med"/>
+                      <a:tailEnd type="none" w="med" len="med"/>
+                    </a:lnR>
+                    <a:lnT w="9525" cap="flat" cmpd="sng" algn="ctr">
+                      <a:solidFill>
+                        <a:srgbClr val="D9D9D9"/>
+                      </a:solidFill>
+                      <a:prstDash val="solid"/>
+                      <a:round/>
+                      <a:headEnd type="none" w="med" len="med"/>
+                      <a:tailEnd type="none" w="med" len="med"/>
+                    </a:lnT>
+                    <a:lnB w="9525" cap="flat" cmpd="sng" algn="ctr">
+                      <a:solidFill>
+                        <a:srgbClr val="D9D9D9"/>
+                      </a:solidFill>
+                      <a:prstDash val="solid"/>
+                      <a:round/>
+                      <a:headEnd type="none" w="med" len="med"/>
+                      <a:tailEnd type="none" w="med" len="med"/>
+                    </a:lnB>
+                    <a:solidFill>
+                      <a:srgbClr val="FFFFFF"/>
+                    </a:solidFill>
+                  </a:tcPr>
+                </a:tc>
+                <a:tc>
+                  <a:txBody>
+                    <a:bodyPr/>
+                    <a:lstStyle/>
+                    <a:p>
+                      <a:pPr algn="just" marL="177800" indent="-177800">
+                        <a:spcAft>
+                          <a:spcPts val="400"/>
+                        </a:spcAft>
+                        <a:buSzPct val="100000"/>
+                        <a:buChar char="▪"/>
+                      </a:pPr>
+                      <a:r>
+                        <a:rPr lang="en-US" sz="1150" dirty="0">
+                          <a:solidFill>
+                            <a:srgbClr val="333333"/>
+                          </a:solidFill>
+                          <a:latin typeface="Segoe UI" pitchFamily="34" charset="0"/>
+                          <a:ea typeface="Segoe UI" pitchFamily="34" charset="-122"/>
+                          <a:cs typeface="Segoe UI" pitchFamily="34" charset="-120"/>
+                        </a:rPr>
+                        <a:t>Il est proposé de mener la conduite de changement en deux niveaux : </a:t>
+                      </a:r>
+                      <a:r>
+                        <a:rPr lang="en-US" sz="1150" b="1" dirty="0">
+                          <a:solidFill>
+                            <a:srgbClr val="333333"/>
+                          </a:solidFill>
+                          <a:latin typeface="Segoe UI" pitchFamily="34" charset="0"/>
+                          <a:ea typeface="Segoe UI" pitchFamily="34" charset="-122"/>
+                          <a:cs typeface="Segoe UI" pitchFamily="34" charset="-120"/>
+                        </a:rPr>
+                        <a:t>revue du modèle par les experts</a:t>
+                      </a:r>
+                      <a:r>
+                        <a:rPr lang="en-US" sz="1150" dirty="0">
+                          <a:solidFill>
+                            <a:srgbClr val="333333"/>
+                          </a:solidFill>
+                          <a:latin typeface="Segoe UI" pitchFamily="34" charset="0"/>
+                          <a:ea typeface="Segoe UI" pitchFamily="34" charset="-122"/>
+                          <a:cs typeface="Segoe UI" pitchFamily="34" charset="-120"/>
+                        </a:rPr>
+                        <a:t> (questionnaire, présentation, discours), puis </a:t>
+                      </a:r>
+                      <a:r>
+                        <a:rPr lang="en-US" sz="1150" b="1" dirty="0">
+                          <a:solidFill>
+                            <a:srgbClr val="333333"/>
+                          </a:solidFill>
+                          <a:latin typeface="Segoe UI" pitchFamily="34" charset="0"/>
+                          <a:ea typeface="Segoe UI" pitchFamily="34" charset="-122"/>
+                          <a:cs typeface="Segoe UI" pitchFamily="34" charset="-120"/>
+                        </a:rPr>
+                        <a:t>formation des chargés d’affaires</a:t>
+                      </a:r>
+                      <a:r>
+                        <a:rPr lang="en-US" sz="1150" dirty="0">
+                          <a:solidFill>
+                            <a:srgbClr val="333333"/>
+                          </a:solidFill>
+                          <a:latin typeface="Segoe UI" pitchFamily="34" charset="0"/>
+                          <a:ea typeface="Segoe UI" pitchFamily="34" charset="-122"/>
+                          <a:cs typeface="Segoe UI" pitchFamily="34" charset="-120"/>
+                        </a:rPr>
+                        <a:t>, fiche climat comprise, après validation du modèle.</a:t>
+                      </a:r>
+                      <a:endParaRPr lang="en-US" sz="1150" dirty="0">
+                        <a:latin typeface="Segoe UI" charset="0"/>
+                        <a:ea typeface="Segoe UI" charset="0"/>
+                        <a:cs typeface="Segoe UI" charset="0"/>
+                      </a:endParaRPr>
+                    </a:p>
+                  </a:txBody>
+                  <a:tcPr marL="91440" marR="91440" marT="45720" marB="45720" anchor="ctr">
+                    <a:lnL w="9525" cap="flat" cmpd="sng" algn="ctr">
+                      <a:solidFill>
+                        <a:srgbClr val="D9D9D9"/>
+                      </a:solidFill>
+                      <a:prstDash val="solid"/>
+                      <a:round/>
+                      <a:headEnd type="none" w="med" len="med"/>
+                      <a:tailEnd type="none" w="med" len="med"/>
+                    </a:lnL>
+                    <a:lnR w="9525" cap="flat" cmpd="sng" algn="ctr">
+                      <a:solidFill>
+                        <a:srgbClr val="D9D9D9"/>
+                      </a:solidFill>
+                      <a:prstDash val="solid"/>
+                      <a:round/>
+                      <a:headEnd type="none" w="med" len="med"/>
+                      <a:tailEnd type="none" w="med" len="med"/>
+                    </a:lnR>
+                    <a:lnT w="9525" cap="flat" cmpd="sng" algn="ctr">
+                      <a:solidFill>
+                        <a:srgbClr val="D9D9D9"/>
+                      </a:solidFill>
+                      <a:prstDash val="solid"/>
+                      <a:round/>
+                      <a:headEnd type="none" w="med" len="med"/>
+                      <a:tailEnd type="none" w="med" len="med"/>
+                    </a:lnT>
+                    <a:lnB w="9525" cap="flat" cmpd="sng" algn="ctr">
+                      <a:solidFill>
+                        <a:srgbClr val="D9D9D9"/>
+                      </a:solidFill>
+                      <a:prstDash val="solid"/>
+                      <a:round/>
+                      <a:headEnd type="none" w="med" len="med"/>
+                      <a:tailEnd type="none" w="med" len="med"/>
+                    </a:lnB>
+                    <a:solidFill>
+                      <a:srgbClr val="FFFFFF"/>
+                    </a:solidFill>
+                  </a:tcPr>
+                </a:tc>
+                <a:tc>
+                  <a:txBody>
+                    <a:bodyPr/>
+                    <a:lstStyle/>
+                    <a:p>
+                      <a:pPr algn="ctr" indent="0" marL="0">
+                        <a:buNone/>
+                      </a:pPr>
+                      <a:r>
+                        <a:rPr lang="en-US" sz="1150" i="1" dirty="0">
+                          <a:solidFill>
+                            <a:srgbClr val="404040"/>
+                          </a:solidFill>
+                          <a:latin typeface="Segoe UI" pitchFamily="34" charset="0"/>
+                          <a:ea typeface="Segoe UI" pitchFamily="34" charset="-122"/>
+                          <a:cs typeface="Segoe UI" pitchFamily="34" charset="-120"/>
+                        </a:rPr>
+                        <a:t>-</a:t>
+                      </a:r>
+                      <a:endParaRPr lang="en-US" sz="1150" dirty="0">
+                        <a:latin typeface="Segoe UI" charset="0"/>
+                        <a:ea typeface="Segoe UI" charset="0"/>
+                        <a:cs typeface="Segoe UI" charset="0"/>
+                      </a:endParaRPr>
+                    </a:p>
+                  </a:txBody>
+                  <a:tcPr marL="91440" marR="91440" marT="45720" marB="45720" anchor="ctr">
+                    <a:lnL w="9525" cap="flat" cmpd="sng" algn="ctr">
+                      <a:solidFill>
+                        <a:srgbClr val="D9D9D9"/>
+                      </a:solidFill>
+                      <a:prstDash val="solid"/>
+                      <a:round/>
+                      <a:headEnd type="none" w="med" len="med"/>
+                      <a:tailEnd type="none" w="med" len="med"/>
+                    </a:lnL>
+                    <a:lnR w="9525" cap="flat" cmpd="sng" algn="ctr">
+                      <a:solidFill>
+                        <a:srgbClr val="D9D9D9"/>
+                      </a:solidFill>
+                      <a:prstDash val="solid"/>
+                      <a:round/>
+                      <a:headEnd type="none" w="med" len="med"/>
+                      <a:tailEnd type="none" w="med" len="med"/>
+                    </a:lnR>
+                    <a:lnT w="9525" cap="flat" cmpd="sng" algn="ctr">
+                      <a:solidFill>
+                        <a:srgbClr val="D9D9D9"/>
+                      </a:solidFill>
+                      <a:prstDash val="solid"/>
+                      <a:round/>
+                      <a:headEnd type="none" w="med" len="med"/>
+                      <a:tailEnd type="none" w="med" len="med"/>
+                    </a:lnT>
+                    <a:lnB w="9525" cap="flat" cmpd="sng" algn="ctr">
+                      <a:solidFill>
+                        <a:srgbClr val="D9D9D9"/>
+                      </a:solidFill>
+                      <a:prstDash val="solid"/>
+                      <a:round/>
+                      <a:headEnd type="none" w="med" len="med"/>
+                      <a:tailEnd type="none" w="med" len="med"/>
+                    </a:lnB>
+                    <a:solidFill>
+                      <a:srgbClr val="FFFFFF"/>
+                    </a:solidFill>
+                  </a:tcPr>
+                </a:tc>
+              </a:tr>
+              <a:tr h="658368">
+                <a:tc>
+                  <a:txBody>
+                    <a:bodyPr/>
+                    <a:lstStyle/>
+                    <a:p>
+                      <a:pPr algn="r" indent="0" marL="0">
+                        <a:buNone/>
+                      </a:pPr>
+                      <a:r>
+                        <a:rPr lang="en-US" sz="1300" b="1" i="1" dirty="0">
+                          <a:solidFill>
+                            <a:srgbClr val="FFFFFF"/>
+                          </a:solidFill>
+                          <a:latin typeface="Segoe UI" pitchFamily="34" charset="0"/>
+                          <a:ea typeface="Segoe UI" pitchFamily="34" charset="-122"/>
+                          <a:cs typeface="Segoe UI" pitchFamily="34" charset="-120"/>
+                        </a:rPr>
+                        <a:t>Pilotage transverse</a:t>
+                      </a:r>
+                      <a:endParaRPr lang="en-US" sz="1300" dirty="0">
+                        <a:latin typeface="Segoe UI" charset="0"/>
+                        <a:ea typeface="Segoe UI" charset="0"/>
+                        <a:cs typeface="Segoe UI" charset="0"/>
+                      </a:endParaRPr>
+                    </a:p>
+                  </a:txBody>
+                  <a:tcPr marL="76200" marR="127000" marT="50800" marB="50800" anchor="ctr">
+                    <a:lnL w="9525" cap="flat" cmpd="sng" algn="ctr">
+                      <a:solidFill>
+                        <a:srgbClr val="D9D9D9"/>
+                      </a:solidFill>
+                      <a:prstDash val="solid"/>
+                      <a:round/>
+                      <a:headEnd type="none" w="med" len="med"/>
+                      <a:tailEnd type="none" w="med" len="med"/>
+                    </a:lnL>
+                    <a:lnR w="9525" cap="flat" cmpd="sng" algn="ctr">
+                      <a:solidFill>
+                        <a:srgbClr val="D9D9D9"/>
+                      </a:solidFill>
+                      <a:prstDash val="solid"/>
+                      <a:round/>
+                      <a:headEnd type="none" w="med" len="med"/>
+                      <a:tailEnd type="none" w="med" len="med"/>
+                    </a:lnR>
+                    <a:lnT w="9525" cap="flat" cmpd="sng" algn="ctr">
+                      <a:solidFill>
+                        <a:srgbClr val="D9D9D9"/>
+                      </a:solidFill>
+                      <a:prstDash val="solid"/>
+                      <a:round/>
+                      <a:headEnd type="none" w="med" len="med"/>
+                      <a:tailEnd type="none" w="med" len="med"/>
+                    </a:lnT>
+                    <a:lnB w="9525" cap="flat" cmpd="sng" algn="ctr">
+                      <a:solidFill>
+                        <a:srgbClr val="D9D9D9"/>
+                      </a:solidFill>
+                      <a:prstDash val="solid"/>
+                      <a:round/>
+                      <a:headEnd type="none" w="med" len="med"/>
+                      <a:tailEnd type="none" w="med" len="med"/>
+                    </a:lnB>
+                    <a:solidFill>
+                      <a:srgbClr val="EFA54C"/>
+                    </a:solidFill>
+                  </a:tcPr>
+                </a:tc>
+                <a:tc>
+                  <a:txBody>
+                    <a:bodyPr/>
+                    <a:lstStyle/>
+                    <a:p>
+                      <a:pPr algn="ctr" indent="0" marL="0">
+                        <a:buNone/>
+                      </a:pPr>
+                      <a:r>
+                        <a:rPr lang="en-US" sz="1150" b="1" i="1" dirty="0">
+                          <a:solidFill>
+                            <a:srgbClr val="404040"/>
+                          </a:solidFill>
+                          <a:latin typeface="Segoe UI" pitchFamily="34" charset="0"/>
+                          <a:ea typeface="Segoe UI" pitchFamily="34" charset="-122"/>
+                          <a:cs typeface="Segoe UI" pitchFamily="34" charset="-120"/>
+                        </a:rPr>
+                        <a:t>A.4</a:t>
+                      </a:r>
+                      <a:endParaRPr lang="en-US" sz="1150" dirty="0">
+                        <a:latin typeface="Segoe UI" charset="0"/>
+                        <a:ea typeface="Segoe UI" charset="0"/>
+                        <a:cs typeface="Segoe UI" charset="0"/>
+                      </a:endParaRPr>
+                    </a:p>
+                  </a:txBody>
+                  <a:tcPr marL="91440" marR="91440" marT="45720" marB="45720" anchor="ctr">
+                    <a:lnL w="9525" cap="flat" cmpd="sng" algn="ctr">
+                      <a:solidFill>
+                        <a:srgbClr val="D9D9D9"/>
+                      </a:solidFill>
+                      <a:prstDash val="solid"/>
+                      <a:round/>
+                      <a:headEnd type="none" w="med" len="med"/>
+                      <a:tailEnd type="none" w="med" len="med"/>
+                    </a:lnL>
+                    <a:lnR w="9525" cap="flat" cmpd="sng" algn="ctr">
+                      <a:solidFill>
+                        <a:srgbClr val="D9D9D9"/>
+                      </a:solidFill>
+                      <a:prstDash val="solid"/>
+                      <a:round/>
+                      <a:headEnd type="none" w="med" len="med"/>
+                      <a:tailEnd type="none" w="med" len="med"/>
+                    </a:lnR>
+                    <a:lnT w="9525" cap="flat" cmpd="sng" algn="ctr">
+                      <a:solidFill>
+                        <a:srgbClr val="D9D9D9"/>
+                      </a:solidFill>
+                      <a:prstDash val="solid"/>
+                      <a:round/>
+                      <a:headEnd type="none" w="med" len="med"/>
+                      <a:tailEnd type="none" w="med" len="med"/>
+                    </a:lnT>
+                    <a:lnB w="9525" cap="flat" cmpd="sng" algn="ctr">
+                      <a:solidFill>
+                        <a:srgbClr val="D9D9D9"/>
+                      </a:solidFill>
+                      <a:prstDash val="solid"/>
+                      <a:round/>
+                      <a:headEnd type="none" w="med" len="med"/>
+                      <a:tailEnd type="none" w="med" len="med"/>
+                    </a:lnB>
+                    <a:solidFill>
+                      <a:srgbClr val="FFFFFF"/>
+                    </a:solidFill>
+                  </a:tcPr>
+                </a:tc>
+                <a:tc>
+                  <a:txBody>
+                    <a:bodyPr/>
+                    <a:lstStyle/>
+                    <a:p>
+                      <a:pPr algn="just" marL="177800" indent="-177800">
+                        <a:spcAft>
+                          <a:spcPts val="400"/>
+                        </a:spcAft>
+                        <a:buSzPct val="100000"/>
+                        <a:buChar char="▪"/>
+                      </a:pPr>
+                      <a:r>
+                        <a:rPr lang="en-US" sz="1150" dirty="0">
+                          <a:solidFill>
+                            <a:srgbClr val="333333"/>
+                          </a:solidFill>
+                          <a:latin typeface="Segoe UI" pitchFamily="34" charset="0"/>
+                          <a:ea typeface="Segoe UI" pitchFamily="34" charset="-122"/>
+                          <a:cs typeface="Segoe UI" pitchFamily="34" charset="-120"/>
+                        </a:rPr>
+                        <a:t>Planifier un </a:t>
+                      </a:r>
+                      <a:r>
+                        <a:rPr lang="en-US" sz="1150" b="1" dirty="0">
+                          <a:solidFill>
+                            <a:srgbClr val="333333"/>
+                          </a:solidFill>
+                          <a:latin typeface="Segoe UI" pitchFamily="34" charset="0"/>
+                          <a:ea typeface="Segoe UI" pitchFamily="34" charset="-122"/>
+                          <a:cs typeface="Segoe UI" pitchFamily="34" charset="-120"/>
+                        </a:rPr>
+                        <a:t>Comité de validation du modèle</a:t>
+                      </a:r>
+                      <a:r>
+                        <a:rPr lang="en-US" sz="1150" dirty="0">
+                          <a:solidFill>
+                            <a:srgbClr val="333333"/>
+                          </a:solidFill>
+                          <a:latin typeface="Segoe UI" pitchFamily="34" charset="0"/>
+                          <a:ea typeface="Segoe UI" pitchFamily="34" charset="-122"/>
+                          <a:cs typeface="Segoe UI" pitchFamily="34" charset="-120"/>
+                        </a:rPr>
+                        <a:t> (paramètres, scénarios de stress, lot 2 climatique), puis un Comité de pilotage auprès de la Direction générale pour restituer les réalisations.</a:t>
+                      </a:r>
+                      <a:endParaRPr lang="en-US" sz="1150" dirty="0">
+                        <a:latin typeface="Segoe UI" charset="0"/>
+                        <a:ea typeface="Segoe UI" charset="0"/>
+                        <a:cs typeface="Segoe UI" charset="0"/>
+                      </a:endParaRPr>
+                    </a:p>
+                  </a:txBody>
+                  <a:tcPr marL="91440" marR="91440" marT="45720" marB="45720" anchor="ctr">
+                    <a:lnL w="9525" cap="flat" cmpd="sng" algn="ctr">
+                      <a:solidFill>
+                        <a:srgbClr val="D9D9D9"/>
+                      </a:solidFill>
+                      <a:prstDash val="solid"/>
+                      <a:round/>
+                      <a:headEnd type="none" w="med" len="med"/>
+                      <a:tailEnd type="none" w="med" len="med"/>
+                    </a:lnL>
+                    <a:lnR w="9525" cap="flat" cmpd="sng" algn="ctr">
+                      <a:solidFill>
+                        <a:srgbClr val="D9D9D9"/>
+                      </a:solidFill>
+                      <a:prstDash val="solid"/>
+                      <a:round/>
+                      <a:headEnd type="none" w="med" len="med"/>
+                      <a:tailEnd type="none" w="med" len="med"/>
+                    </a:lnR>
+                    <a:lnT w="9525" cap="flat" cmpd="sng" algn="ctr">
+                      <a:solidFill>
+                        <a:srgbClr val="D9D9D9"/>
+                      </a:solidFill>
+                      <a:prstDash val="solid"/>
+                      <a:round/>
+                      <a:headEnd type="none" w="med" len="med"/>
+                      <a:tailEnd type="none" w="med" len="med"/>
+                    </a:lnT>
+                    <a:lnB w="9525" cap="flat" cmpd="sng" algn="ctr">
+                      <a:solidFill>
+                        <a:srgbClr val="D9D9D9"/>
+                      </a:solidFill>
+                      <a:prstDash val="solid"/>
+                      <a:round/>
+                      <a:headEnd type="none" w="med" len="med"/>
+                      <a:tailEnd type="none" w="med" len="med"/>
+                    </a:lnB>
+                    <a:solidFill>
+                      <a:srgbClr val="FFFFFF"/>
+                    </a:solidFill>
+                  </a:tcPr>
+                </a:tc>
+                <a:tc>
+                  <a:txBody>
+                    <a:bodyPr/>
+                    <a:lstStyle/>
+                    <a:p>
+                      <a:pPr algn="ctr" indent="0" marL="0">
+                        <a:buNone/>
+                      </a:pPr>
+                      <a:r>
+                        <a:rPr lang="en-US" sz="1150" b="1" i="1" dirty="0">
+                          <a:solidFill>
+                            <a:srgbClr val="404040"/>
+                          </a:solidFill>
+                          <a:latin typeface="Segoe UI" pitchFamily="34" charset="0"/>
+                          <a:ea typeface="Segoe UI" pitchFamily="34" charset="-122"/>
+                          <a:cs typeface="Segoe UI" pitchFamily="34" charset="-120"/>
+                        </a:rPr>
+                        <a:t>Risques Groupe</a:t>
+                      </a:r>
+                      <a:endParaRPr lang="en-US" sz="1150" dirty="0">
+                        <a:latin typeface="Segoe UI" charset="0"/>
+                        <a:ea typeface="Segoe UI" charset="0"/>
+                        <a:cs typeface="Segoe UI" charset="0"/>
+                      </a:endParaRPr>
+                    </a:p>
+                  </a:txBody>
+                  <a:tcPr marL="91440" marR="91440" marT="45720" marB="45720" anchor="ctr">
+                    <a:lnL w="9525" cap="flat" cmpd="sng" algn="ctr">
+                      <a:solidFill>
+                        <a:srgbClr val="D9D9D9"/>
+                      </a:solidFill>
+                      <a:prstDash val="solid"/>
+                      <a:round/>
+                      <a:headEnd type="none" w="med" len="med"/>
+                      <a:tailEnd type="none" w="med" len="med"/>
+                    </a:lnL>
+                    <a:lnR w="9525" cap="flat" cmpd="sng" algn="ctr">
+                      <a:solidFill>
+                        <a:srgbClr val="D9D9D9"/>
+                      </a:solidFill>
+                      <a:prstDash val="solid"/>
+                      <a:round/>
+                      <a:headEnd type="none" w="med" len="med"/>
+                      <a:tailEnd type="none" w="med" len="med"/>
+                    </a:lnR>
+                    <a:lnT w="9525" cap="flat" cmpd="sng" algn="ctr">
+                      <a:solidFill>
+                        <a:srgbClr val="D9D9D9"/>
+                      </a:solidFill>
+                      <a:prstDash val="solid"/>
+                      <a:round/>
+                      <a:headEnd type="none" w="med" len="med"/>
+                      <a:tailEnd type="none" w="med" len="med"/>
+                    </a:lnT>
+                    <a:lnB w="9525" cap="flat" cmpd="sng" algn="ctr">
+                      <a:solidFill>
+                        <a:srgbClr val="D9D9D9"/>
+                      </a:solidFill>
+                      <a:prstDash val="solid"/>
+                      <a:round/>
+                      <a:headEnd type="none" w="med" len="med"/>
+                      <a:tailEnd type="none" w="med" len="med"/>
+                    </a:lnB>
+                    <a:solidFill>
+                      <a:srgbClr val="FFFFFF"/>
+                    </a:solidFill>
+                  </a:tcPr>
+                </a:tc>
+              </a:tr>
+            </a:tbl>
+          </a:graphicData>
+        </a:graphic>
+      </p:graphicFrame>
+      <p:sp>
+        <p:nvSpPr>
+          <p:cNvPr id="25" name="Slide Number Placeholder 0"/>
+          <p:cNvSpPr>
+            <a:spLocks noGrp="1"/>
+          </p:cNvSpPr>
+          <p:nvPr>
+            <p:ph type="sldNum" sz="quarter" idx="4294967295"/>
+          </p:nvPr>
+        </p:nvSpPr>
+        <p:spPr>
+          <a:xfrm>
+            <a:off x="11521440" y="6263640"/>
+            <a:ext cx="457200" cy="228600"/>
+          </a:xfrm>
+          <a:prstGeom prst="rect">
+            <a:avLst/>
+          </a:prstGeom>
+          <a:extLst>
+            <a:ext uri="{C572A759-6A51-4108-AA02-DFA0A04FC94B}">
+              <ma14:wrappingTextBoxFlag xmlns:ma14="http://schemas.microsoft.com/office/mac/drawingml/2011/main" val="0"/>
+            </a:ext>
+          </a:extLst>
+        </p:spPr>
+        <p:txBody>
+          <a:bodyPr/>
+          <a:lstStyle>
+            <a:lvl1pPr>
+              <a:defRPr sz="800">
+                <a:solidFill>
+                  <a:srgbClr val="7A7A7A"/>
+                </a:solidFill>
+                <a:latin typeface="Segoe UI"/>
+                <a:ea typeface="Segoe UI"/>
+                <a:cs typeface="Segoe UI"/>
+              </a:defRPr>
+            </a:lvl1pPr>
+          </a:lstStyle>
+          <a:p>
+            <a:pPr algn="r"/>
+            <a:fld id="{F7021451-1387-4CA6-816F-3879F97B5CBC}" type="slidenum">
+              <a:rPr b="0" lang="en-US"/>
+              <a:t>4</a:t>
+            </a:fld>
+            <a:endParaRPr lang="en-US"/>
+          </a:p>
+        </p:txBody>
+      </p:sp>
+    </p:spTree>
+  </p:cSld>
+  <p:clrMapOvr>
+    <a:masterClrMapping/>
+  </p:clrMapOvr>
+</p:sld>
+</file>
+
 <file path=ppt/theme/theme1.xml><?xml version="1.0" encoding="utf-8"?>
-<a:theme xmlns:a="http://schemas.openxmlformats.org/drawingml/2006/main" name="Banque Populaire — COPIL">
+<a:theme xmlns:a="http://schemas.openxmlformats.org/drawingml/2006/main" name="Office Theme">
   <a:themeElements>
-    <a:clrScheme name="Banque Populaire — COPIL">
+    <a:clrScheme name="Office">
       <a:dk1>
-        <a:srgbClr val="333333"/>
+        <a:sysClr val="windowText" lastClr="000000"/>
       </a:dk1>
       <a:lt1>
-        <a:srgbClr val="FFFFFF"/>
+        <a:sysClr val="window" lastClr="FFFFFF"/>
       </a:lt1>
       <a:dk2>
-        <a:srgbClr val="5A3A1E"/>
+        <a:srgbClr val="44546A"/>
       </a:dk2>
       <a:lt2>
-        <a:srgbClr val="EFEFEF"/>
+        <a:srgbClr val="E7E6E6"/>
       </a:lt2>
       <a:accent1>
-        <a:srgbClr val="E8790F"/>
+        <a:srgbClr val="4472C4"/>
       </a:accent1>
       <a:accent2>
-        <a:srgbClr val="EFA54C"/>
+        <a:srgbClr val="ED7D31"/>
       </a:accent2>
       <a:accent3>
-        <a:srgbClr val="8B4A17"/>
+        <a:srgbClr val="A5A5A5"/>
       </a:accent3>
       <a:accent4>
-        <a:srgbClr val="F6D2A6"/>
+        <a:srgbClr val="FFC000"/>
       </a:accent4>
       <a:accent5>
-        <a:srgbClr val="7A7A7A"/>
+        <a:srgbClr val="5B9BD5"/>
       </a:accent5>
       <a:accent6>
-        <a:srgbClr val="BFBFBF"/>
+        <a:srgbClr val="70AD47"/>
       </a:accent6>
       <a:hlink>
-        <a:srgbClr val="E8790F"/>
+        <a:srgbClr val="0563C1"/>
       </a:hlink>
       <a:folHlink>
-        <a:srgbClr val="8B4A17"/>
+        <a:srgbClr val="954F72"/>
       </a:folHlink>
     </a:clrScheme>
-    <a:fontScheme name="Banque Populaire — COPIL">
+    <a:fontScheme name="Office">
       <a:majorFont>
         <a:latin typeface="Segoe UI"/>
         <a:ea typeface=""/>
